--- a/python_course/chapter_05_lists/presentation.pptx
+++ b/python_course/chapter_05_lists/presentation.pptx
@@ -25,7 +25,7 @@
     <p:sldId id="273" r:id="rId24"/>
     <p:sldId id="274" r:id="rId25"/>
   </p:sldIdLst>
-  <p:sldSz cx="9144000" cy="6858000" type="screen4x3"/>
+  <p:sldSz cx="12191695" cy="6858000" type="screen4x3"/>
   <p:notesSz cx="6858000" cy="9144000"/>
   <p:defaultTextStyle>
     <a:defPPr>
@@ -3099,14 +3099,6 @@
 <file path=ppt/slides/slide1.xml><?xml version="1.0" encoding="utf-8"?>
 <p:sld xmlns:a="http://schemas.openxmlformats.org/drawingml/2006/main" xmlns:p="http://schemas.openxmlformats.org/presentationml/2006/main" xmlns:r="http://schemas.openxmlformats.org/officeDocument/2006/relationships">
   <p:cSld>
-    <p:bg>
-      <p:bgPr>
-        <a:solidFill>
-          <a:srgbClr val="29629B"/>
-        </a:solidFill>
-        <a:effectLst/>
-      </p:bgPr>
-    </p:bg>
     <p:spTree>
       <p:nvGrpSpPr>
         <p:cNvPr id="1" name=""/>
@@ -3116,14 +3108,57 @@
       <p:grpSpPr/>
       <p:sp>
         <p:nvSpPr>
-          <p:cNvPr id="2" name="TextBox 1"/>
+          <p:cNvPr id="2" name="Rectangle 1"/>
+          <p:cNvSpPr/>
+          <p:nvPr/>
+        </p:nvSpPr>
+        <p:spPr>
+          <a:xfrm>
+            <a:off x="0" y="0"/>
+            <a:ext cx="12191695" cy="6858000"/>
+          </a:xfrm>
+          <a:prstGeom prst="rect">
+            <a:avLst/>
+          </a:prstGeom>
+          <a:solidFill>
+            <a:srgbClr val="F0F8FF"/>
+          </a:solidFill>
+          <a:ln>
+            <a:noFill/>
+          </a:ln>
+        </p:spPr>
+        <p:style>
+          <a:lnRef idx="1">
+            <a:schemeClr val="accent1"/>
+          </a:lnRef>
+          <a:fillRef idx="3">
+            <a:schemeClr val="accent1"/>
+          </a:fillRef>
+          <a:effectRef idx="2">
+            <a:schemeClr val="accent1"/>
+          </a:effectRef>
+          <a:fontRef idx="minor">
+            <a:schemeClr val="lt1"/>
+          </a:fontRef>
+        </p:style>
+        <p:txBody>
+          <a:bodyPr rtlCol="0" anchor="ctr"/>
+          <a:lstStyle/>
+          <a:p>
+            <a:pPr algn="ctr"/>
+          </a:p>
+        </p:txBody>
+      </p:sp>
+      <p:sp>
+        <p:nvSpPr>
+          <p:cNvPr id="3" name="TextBox 2"/>
           <p:cNvSpPr txBox="1"/>
           <p:nvPr/>
         </p:nvSpPr>
         <p:spPr>
           <a:xfrm>
-            <a:off x="457200" y="2286000"/>
-            <a:ext cx="8229600" cy="1371600"/>
+            <a:off x="914400" y="1828800"/>
+            <a:ext cx="10360152" cy="1371600"/>
           </a:xfrm>
           <a:prstGeom prst="rect">
             <a:avLst/>
@@ -3139,26 +3174,26 @@
             <a:pPr algn="ctr">
               <a:defRPr sz="5400" b="1">
                 <a:solidFill>
-                  <a:srgbClr val="FFFFFF"/>
-                </a:solidFill>
-              </a:defRPr>
-            </a:pPr>
-            <a:r>
-              <a:t>Chapter 5: Collections</a:t>
-            </a:r>
-          </a:p>
-        </p:txBody>
-      </p:sp>
-      <p:sp>
-        <p:nvSpPr>
-          <p:cNvPr id="3" name="TextBox 2"/>
+                  <a:srgbClr val="003366"/>
+                </a:solidFill>
+              </a:defRPr>
+            </a:pPr>
+            <a:r>
+              <a:t>Chapter 5</a:t>
+            </a:r>
+          </a:p>
+        </p:txBody>
+      </p:sp>
+      <p:sp>
+        <p:nvSpPr>
+          <p:cNvPr id="4" name="TextBox 3"/>
           <p:cNvSpPr txBox="1"/>
           <p:nvPr/>
         </p:nvSpPr>
         <p:spPr>
           <a:xfrm>
-            <a:off x="457200" y="3840480"/>
-            <a:ext cx="8229600" cy="731520"/>
+            <a:off x="914400" y="3657600"/>
+            <a:ext cx="10360152" cy="548640"/>
           </a:xfrm>
           <a:prstGeom prst="rect">
             <a:avLst/>
@@ -3174,12 +3209,47 @@
             <a:pPr algn="ctr">
               <a:defRPr sz="2800">
                 <a:solidFill>
-                  <a:srgbClr val="ADCCEB"/>
+                  <a:srgbClr val="4682B4"/>
                 </a:solidFill>
               </a:defRPr>
             </a:pPr>
             <a:r>
               <a:t>Working with Lists</a:t>
+            </a:r>
+          </a:p>
+        </p:txBody>
+      </p:sp>
+      <p:sp>
+        <p:nvSpPr>
+          <p:cNvPr id="5" name="TextBox 4"/>
+          <p:cNvSpPr txBox="1"/>
+          <p:nvPr/>
+        </p:nvSpPr>
+        <p:spPr>
+          <a:xfrm>
+            <a:off x="914400" y="4297680"/>
+            <a:ext cx="10360152" cy="548640"/>
+          </a:xfrm>
+          <a:prstGeom prst="rect">
+            <a:avLst/>
+          </a:prstGeom>
+          <a:noFill/>
+        </p:spPr>
+        <p:txBody>
+          <a:bodyPr wrap="none">
+            <a:spAutoFit/>
+          </a:bodyPr>
+          <a:lstStyle/>
+          <a:p>
+            <a:pPr algn="ctr">
+              <a:defRPr sz="2800">
+                <a:solidFill>
+                  <a:srgbClr val="4682B4"/>
+                </a:solidFill>
+              </a:defRPr>
+            </a:pPr>
+            <a:r>
+              <a:t>Organizing Data Like a Pro</a:t>
             </a:r>
           </a:p>
         </p:txBody>
@@ -3195,14 +3265,6 @@
 <file path=ppt/slides/slide10.xml><?xml version="1.0" encoding="utf-8"?>
 <p:sld xmlns:a="http://schemas.openxmlformats.org/drawingml/2006/main" xmlns:p="http://schemas.openxmlformats.org/presentationml/2006/main" xmlns:r="http://schemas.openxmlformats.org/officeDocument/2006/relationships">
   <p:cSld>
-    <p:bg>
-      <p:bgPr>
-        <a:solidFill>
-          <a:srgbClr val="FFFFFF"/>
-        </a:solidFill>
-        <a:effectLst/>
-      </p:bgPr>
-    </p:bg>
     <p:spTree>
       <p:nvGrpSpPr>
         <p:cNvPr id="1" name=""/>
@@ -3219,13 +3281,13 @@
         <p:spPr>
           <a:xfrm>
             <a:off x="0" y="0"/>
-            <a:ext cx="9144000" cy="914400"/>
+            <a:ext cx="12191695" cy="6858000"/>
           </a:xfrm>
           <a:prstGeom prst="rect">
             <a:avLst/>
           </a:prstGeom>
           <a:solidFill>
-            <a:srgbClr val="29629B"/>
+            <a:srgbClr val="FFFFFF"/>
           </a:solidFill>
           <a:ln>
             <a:noFill/>
@@ -3255,95 +3317,23 @@
       </p:sp>
       <p:sp>
         <p:nvSpPr>
-          <p:cNvPr id="3" name="TextBox 2"/>
-          <p:cNvSpPr txBox="1"/>
-          <p:nvPr/>
-        </p:nvSpPr>
-        <p:spPr>
-          <a:xfrm>
-            <a:off x="457200" y="137160"/>
-            <a:ext cx="8229600" cy="640080"/>
-          </a:xfrm>
-          <a:prstGeom prst="rect">
-            <a:avLst/>
-          </a:prstGeom>
-          <a:noFill/>
-        </p:spPr>
-        <p:txBody>
-          <a:bodyPr wrap="none">
-            <a:spAutoFit/>
-          </a:bodyPr>
-          <a:lstStyle/>
-          <a:p>
-            <a:pPr>
-              <a:defRPr sz="4000" b="1">
-                <a:solidFill>
-                  <a:srgbClr val="FFFFFF"/>
-                </a:solidFill>
-              </a:defRPr>
-            </a:pPr>
-            <a:r>
-              <a:t>Iterating Through Lists</a:t>
-            </a:r>
-          </a:p>
-        </p:txBody>
-      </p:sp>
-      <p:sp>
-        <p:nvSpPr>
-          <p:cNvPr id="4" name="TextBox 3"/>
-          <p:cNvSpPr txBox="1"/>
-          <p:nvPr/>
-        </p:nvSpPr>
-        <p:spPr>
-          <a:xfrm>
-            <a:off x="640080" y="1371600"/>
-            <a:ext cx="7863840" cy="914400"/>
-          </a:xfrm>
-          <a:prstGeom prst="rect">
-            <a:avLst/>
-          </a:prstGeom>
-          <a:noFill/>
-        </p:spPr>
-        <p:txBody>
-          <a:bodyPr wrap="square">
-            <a:spAutoFit/>
-          </a:bodyPr>
-          <a:lstStyle/>
-          <a:p>
-            <a:pPr>
-              <a:defRPr sz="1800">
-                <a:solidFill>
-                  <a:srgbClr val="595959"/>
-                </a:solidFill>
-              </a:defRPr>
-            </a:pPr>
-            <a:r>
-              <a:t>Loop through lists to process each item</a:t>
-            </a:r>
-          </a:p>
-        </p:txBody>
-      </p:sp>
-      <p:sp>
-        <p:nvSpPr>
-          <p:cNvPr id="5" name="Rectangle 4"/>
+          <p:cNvPr id="3" name="Rectangle 2"/>
           <p:cNvSpPr/>
           <p:nvPr/>
         </p:nvSpPr>
         <p:spPr>
           <a:xfrm>
-            <a:off x="640080" y="2468880"/>
-            <a:ext cx="7863840" cy="4389120"/>
+            <a:off x="0" y="0"/>
+            <a:ext cx="12191695" cy="137160"/>
           </a:xfrm>
           <a:prstGeom prst="rect">
             <a:avLst/>
           </a:prstGeom>
           <a:solidFill>
-            <a:srgbClr val="F8F9FA"/>
+            <a:srgbClr val="0066CC"/>
           </a:solidFill>
-          <a:ln w="25400">
-            <a:solidFill>
-              <a:srgbClr val="6497CA"/>
-            </a:solidFill>
+          <a:ln>
+            <a:noFill/>
           </a:ln>
         </p:spPr>
         <p:style>
@@ -3370,14 +3360,14 @@
       </p:sp>
       <p:sp>
         <p:nvSpPr>
-          <p:cNvPr id="6" name="TextBox 5"/>
+          <p:cNvPr id="4" name="TextBox 3"/>
           <p:cNvSpPr txBox="1"/>
           <p:nvPr/>
         </p:nvSpPr>
         <p:spPr>
           <a:xfrm>
-            <a:off x="914400" y="2651760"/>
-            <a:ext cx="7315200" cy="4023359"/>
+            <a:off x="457200" y="365760"/>
+            <a:ext cx="10972800" cy="731520"/>
           </a:xfrm>
           <a:prstGeom prst="rect">
             <a:avLst/>
@@ -3391,284 +3381,125 @@
           <a:lstStyle/>
           <a:p>
             <a:pPr>
-              <a:spcAft>
-                <a:spcPts val="200"/>
-              </a:spcAft>
-              <a:defRPr sz="1600">
-                <a:solidFill>
-                  <a:srgbClr val="595959"/>
-                </a:solidFill>
-                <a:latin typeface="Courier New"/>
-              </a:defRPr>
-            </a:pPr>
-            <a:r>
-              <a:t># Basic for loop</a:t>
-            </a:r>
-          </a:p>
+              <a:defRPr sz="4000" b="1">
+                <a:solidFill>
+                  <a:srgbClr val="003366"/>
+                </a:solidFill>
+              </a:defRPr>
+            </a:pPr>
+            <a:r>
+              <a:t>Organizing Lists 📊</a:t>
+            </a:r>
+          </a:p>
+        </p:txBody>
+      </p:sp>
+      <p:sp>
+        <p:nvSpPr>
+          <p:cNvPr id="5" name="Rectangle 4"/>
+          <p:cNvSpPr/>
+          <p:nvPr/>
+        </p:nvSpPr>
+        <p:spPr>
+          <a:xfrm>
+            <a:off x="457200" y="1005840"/>
+            <a:ext cx="1828800" cy="45720"/>
+          </a:xfrm>
+          <a:prstGeom prst="rect">
+            <a:avLst/>
+          </a:prstGeom>
+          <a:solidFill>
+            <a:srgbClr val="0066CC"/>
+          </a:solidFill>
+          <a:ln>
+            <a:noFill/>
+          </a:ln>
+        </p:spPr>
+        <p:style>
+          <a:lnRef idx="1">
+            <a:schemeClr val="accent1"/>
+          </a:lnRef>
+          <a:fillRef idx="3">
+            <a:schemeClr val="accent1"/>
+          </a:fillRef>
+          <a:effectRef idx="2">
+            <a:schemeClr val="accent1"/>
+          </a:effectRef>
+          <a:fontRef idx="minor">
+            <a:schemeClr val="lt1"/>
+          </a:fontRef>
+        </p:style>
+        <p:txBody>
+          <a:bodyPr rtlCol="0" anchor="ctr"/>
+          <a:lstStyle/>
+          <a:p>
+            <a:pPr algn="ctr"/>
+          </a:p>
+        </p:txBody>
+      </p:sp>
+      <p:sp>
+        <p:nvSpPr>
+          <p:cNvPr id="6" name="TextBox 5"/>
+          <p:cNvSpPr txBox="1"/>
+          <p:nvPr/>
+        </p:nvSpPr>
+        <p:spPr>
+          <a:xfrm>
+            <a:off x="640080" y="1371600"/>
+            <a:ext cx="10789920" cy="4572000"/>
+          </a:xfrm>
+          <a:prstGeom prst="rect">
+            <a:avLst/>
+          </a:prstGeom>
+          <a:noFill/>
+        </p:spPr>
+        <p:txBody>
+          <a:bodyPr wrap="square">
+            <a:spAutoFit/>
+          </a:bodyPr>
+          <a:lstStyle/>
           <a:p>
             <a:pPr>
               <a:spcAft>
-                <a:spcPts val="200"/>
+                <a:spcPts val="800"/>
               </a:spcAft>
-              <a:defRPr sz="1600">
-                <a:solidFill>
-                  <a:srgbClr val="595959"/>
-                </a:solidFill>
-                <a:latin typeface="Courier New"/>
-              </a:defRPr>
-            </a:pPr>
-            <a:r>
-              <a:t>fruits = ['apple', 'banana', 'cherry']</a:t>
+              <a:defRPr sz="2000" b="1">
+                <a:solidFill>
+                  <a:srgbClr val="333333"/>
+                </a:solidFill>
+              </a:defRPr>
+            </a:pPr>
+            <a:r>
+              <a:t>sort() - Sort in place</a:t>
             </a:r>
           </a:p>
           <a:p>
             <a:pPr>
               <a:spcAft>
-                <a:spcPts val="200"/>
+                <a:spcPts val="800"/>
               </a:spcAft>
-              <a:defRPr sz="1600">
-                <a:solidFill>
-                  <a:srgbClr val="595959"/>
-                </a:solidFill>
-                <a:latin typeface="Courier New"/>
-              </a:defRPr>
-            </a:pPr>
-            <a:r>
-              <a:t>for fruit in fruits:</a:t>
+              <a:defRPr sz="2000" b="1">
+                <a:solidFill>
+                  <a:srgbClr val="333333"/>
+                </a:solidFill>
+              </a:defRPr>
+            </a:pPr>
+            <a:r>
+              <a:t>reverse() - Reverse the order</a:t>
             </a:r>
           </a:p>
           <a:p>
             <a:pPr>
               <a:spcAft>
-                <a:spcPts val="200"/>
+                <a:spcPts val="800"/>
               </a:spcAft>
-              <a:defRPr sz="1600">
-                <a:solidFill>
-                  <a:srgbClr val="595959"/>
-                </a:solidFill>
-                <a:latin typeface="Courier New"/>
-              </a:defRPr>
-            </a:pPr>
-            <a:r>
-              <a:t>    print(fruit)</a:t>
-            </a:r>
-          </a:p>
-          <a:p>
-            <a:pPr>
-              <a:spcAft>
-                <a:spcPts val="200"/>
-              </a:spcAft>
-              <a:defRPr sz="1600">
-                <a:solidFill>
-                  <a:srgbClr val="595959"/>
-                </a:solidFill>
-                <a:latin typeface="Courier New"/>
-              </a:defRPr>
-            </a:pPr>
-            <a:r>
-              <a:t># apple</a:t>
-            </a:r>
-          </a:p>
-          <a:p>
-            <a:pPr>
-              <a:spcAft>
-                <a:spcPts val="200"/>
-              </a:spcAft>
-              <a:defRPr sz="1600">
-                <a:solidFill>
-                  <a:srgbClr val="595959"/>
-                </a:solidFill>
-                <a:latin typeface="Courier New"/>
-              </a:defRPr>
-            </a:pPr>
-            <a:r>
-              <a:t># banana</a:t>
-            </a:r>
-          </a:p>
-          <a:p>
-            <a:pPr>
-              <a:spcAft>
-                <a:spcPts val="200"/>
-              </a:spcAft>
-              <a:defRPr sz="1600">
-                <a:solidFill>
-                  <a:srgbClr val="595959"/>
-                </a:solidFill>
-                <a:latin typeface="Courier New"/>
-              </a:defRPr>
-            </a:pPr>
-            <a:r>
-              <a:t># cherry</a:t>
-            </a:r>
-          </a:p>
-          <a:p>
-            <a:pPr>
-              <a:spcAft>
-                <a:spcPts val="200"/>
-              </a:spcAft>
-              <a:defRPr sz="1600">
-                <a:solidFill>
-                  <a:srgbClr val="595959"/>
-                </a:solidFill>
-                <a:latin typeface="Courier New"/>
-              </a:defRPr>
-            </a:pPr>
-          </a:p>
-          <a:p>
-            <a:pPr>
-              <a:spcAft>
-                <a:spcPts val="200"/>
-              </a:spcAft>
-              <a:defRPr sz="1600">
-                <a:solidFill>
-                  <a:srgbClr val="595959"/>
-                </a:solidFill>
-                <a:latin typeface="Courier New"/>
-              </a:defRPr>
-            </a:pPr>
-            <a:r>
-              <a:t># Process each item</a:t>
-            </a:r>
-          </a:p>
-          <a:p>
-            <a:pPr>
-              <a:spcAft>
-                <a:spcPts val="200"/>
-              </a:spcAft>
-              <a:defRPr sz="1600">
-                <a:solidFill>
-                  <a:srgbClr val="595959"/>
-                </a:solidFill>
-                <a:latin typeface="Courier New"/>
-              </a:defRPr>
-            </a:pPr>
-            <a:r>
-              <a:t>numbers = [1, 2, 3, 4, 5]</a:t>
-            </a:r>
-          </a:p>
-          <a:p>
-            <a:pPr>
-              <a:spcAft>
-                <a:spcPts val="200"/>
-              </a:spcAft>
-              <a:defRPr sz="1600">
-                <a:solidFill>
-                  <a:srgbClr val="595959"/>
-                </a:solidFill>
-                <a:latin typeface="Courier New"/>
-              </a:defRPr>
-            </a:pPr>
-            <a:r>
-              <a:t>total = 0</a:t>
-            </a:r>
-          </a:p>
-          <a:p>
-            <a:pPr>
-              <a:spcAft>
-                <a:spcPts val="200"/>
-              </a:spcAft>
-              <a:defRPr sz="1600">
-                <a:solidFill>
-                  <a:srgbClr val="595959"/>
-                </a:solidFill>
-                <a:latin typeface="Courier New"/>
-              </a:defRPr>
-            </a:pPr>
-            <a:r>
-              <a:t>for num in numbers:</a:t>
-            </a:r>
-          </a:p>
-          <a:p>
-            <a:pPr>
-              <a:spcAft>
-                <a:spcPts val="200"/>
-              </a:spcAft>
-              <a:defRPr sz="1600">
-                <a:solidFill>
-                  <a:srgbClr val="595959"/>
-                </a:solidFill>
-                <a:latin typeface="Courier New"/>
-              </a:defRPr>
-            </a:pPr>
-            <a:r>
-              <a:t>    total += num</a:t>
-            </a:r>
-          </a:p>
-          <a:p>
-            <a:pPr>
-              <a:spcAft>
-                <a:spcPts val="200"/>
-              </a:spcAft>
-              <a:defRPr sz="1600">
-                <a:solidFill>
-                  <a:srgbClr val="595959"/>
-                </a:solidFill>
-                <a:latin typeface="Courier New"/>
-              </a:defRPr>
-            </a:pPr>
-            <a:r>
-              <a:t>print(f"Sum: {total}")  # Sum: 15</a:t>
-            </a:r>
-          </a:p>
-          <a:p>
-            <a:pPr>
-              <a:spcAft>
-                <a:spcPts val="200"/>
-              </a:spcAft>
-              <a:defRPr sz="1600">
-                <a:solidFill>
-                  <a:srgbClr val="595959"/>
-                </a:solidFill>
-                <a:latin typeface="Courier New"/>
-              </a:defRPr>
-            </a:pPr>
-          </a:p>
-          <a:p>
-            <a:pPr>
-              <a:spcAft>
-                <a:spcPts val="200"/>
-              </a:spcAft>
-              <a:defRPr sz="1600">
-                <a:solidFill>
-                  <a:srgbClr val="595959"/>
-                </a:solidFill>
-                <a:latin typeface="Courier New"/>
-              </a:defRPr>
-            </a:pPr>
-            <a:r>
-              <a:t># List comprehension for transformation</a:t>
-            </a:r>
-          </a:p>
-          <a:p>
-            <a:pPr>
-              <a:spcAft>
-                <a:spcPts val="200"/>
-              </a:spcAft>
-              <a:defRPr sz="1600">
-                <a:solidFill>
-                  <a:srgbClr val="595959"/>
-                </a:solidFill>
-                <a:latin typeface="Courier New"/>
-              </a:defRPr>
-            </a:pPr>
-            <a:r>
-              <a:t>squared = [x**2 for x in numbers]</a:t>
-            </a:r>
-          </a:p>
-          <a:p>
-            <a:pPr>
-              <a:spcAft>
-                <a:spcPts val="200"/>
-              </a:spcAft>
-              <a:defRPr sz="1600">
-                <a:solidFill>
-                  <a:srgbClr val="595959"/>
-                </a:solidFill>
-                <a:latin typeface="Courier New"/>
-              </a:defRPr>
-            </a:pPr>
-            <a:r>
-              <a:t>print(squared)  # [1, 4, 9, 16, 25]</a:t>
+              <a:defRPr sz="2000" b="1">
+                <a:solidFill>
+                  <a:srgbClr val="333333"/>
+                </a:solidFill>
+              </a:defRPr>
+            </a:pPr>
+            <a:r>
+              <a:t>sorted() - Return sorted copy (doesn't modify original)</a:t>
             </a:r>
           </a:p>
         </p:txBody>
@@ -3684,14 +3515,6 @@
 <file path=ppt/slides/slide11.xml><?xml version="1.0" encoding="utf-8"?>
 <p:sld xmlns:a="http://schemas.openxmlformats.org/drawingml/2006/main" xmlns:p="http://schemas.openxmlformats.org/presentationml/2006/main" xmlns:r="http://schemas.openxmlformats.org/officeDocument/2006/relationships">
   <p:cSld>
-    <p:bg>
-      <p:bgPr>
-        <a:solidFill>
-          <a:srgbClr val="FFFFFF"/>
-        </a:solidFill>
-        <a:effectLst/>
-      </p:bgPr>
-    </p:bg>
     <p:spTree>
       <p:nvGrpSpPr>
         <p:cNvPr id="1" name=""/>
@@ -3708,13 +3531,13 @@
         <p:spPr>
           <a:xfrm>
             <a:off x="0" y="0"/>
-            <a:ext cx="9144000" cy="914400"/>
+            <a:ext cx="12191695" cy="6858000"/>
           </a:xfrm>
           <a:prstGeom prst="rect">
             <a:avLst/>
           </a:prstGeom>
           <a:solidFill>
-            <a:srgbClr val="29629B"/>
+            <a:srgbClr val="FFFFFF"/>
           </a:solidFill>
           <a:ln>
             <a:noFill/>
@@ -3744,95 +3567,23 @@
       </p:sp>
       <p:sp>
         <p:nvSpPr>
-          <p:cNvPr id="3" name="TextBox 2"/>
-          <p:cNvSpPr txBox="1"/>
-          <p:nvPr/>
-        </p:nvSpPr>
-        <p:spPr>
-          <a:xfrm>
-            <a:off x="457200" y="137160"/>
-            <a:ext cx="8229600" cy="640080"/>
-          </a:xfrm>
-          <a:prstGeom prst="rect">
-            <a:avLst/>
-          </a:prstGeom>
-          <a:noFill/>
-        </p:spPr>
-        <p:txBody>
-          <a:bodyPr wrap="none">
-            <a:spAutoFit/>
-          </a:bodyPr>
-          <a:lstStyle/>
-          <a:p>
-            <a:pPr>
-              <a:defRPr sz="4000" b="1">
-                <a:solidFill>
-                  <a:srgbClr val="FFFFFF"/>
-                </a:solidFill>
-              </a:defRPr>
-            </a:pPr>
-            <a:r>
-              <a:t>Using enumerate()</a:t>
-            </a:r>
-          </a:p>
-        </p:txBody>
-      </p:sp>
-      <p:sp>
-        <p:nvSpPr>
-          <p:cNvPr id="4" name="TextBox 3"/>
-          <p:cNvSpPr txBox="1"/>
-          <p:nvPr/>
-        </p:nvSpPr>
-        <p:spPr>
-          <a:xfrm>
-            <a:off x="640080" y="1371600"/>
-            <a:ext cx="7863840" cy="914400"/>
-          </a:xfrm>
-          <a:prstGeom prst="rect">
-            <a:avLst/>
-          </a:prstGeom>
-          <a:noFill/>
-        </p:spPr>
-        <p:txBody>
-          <a:bodyPr wrap="square">
-            <a:spAutoFit/>
-          </a:bodyPr>
-          <a:lstStyle/>
-          <a:p>
-            <a:pPr>
-              <a:defRPr sz="1800">
-                <a:solidFill>
-                  <a:srgbClr val="595959"/>
-                </a:solidFill>
-              </a:defRPr>
-            </a:pPr>
-            <a:r>
-              <a:t>Get both index and value when looping</a:t>
-            </a:r>
-          </a:p>
-        </p:txBody>
-      </p:sp>
-      <p:sp>
-        <p:nvSpPr>
-          <p:cNvPr id="5" name="Rectangle 4"/>
+          <p:cNvPr id="3" name="Rectangle 2"/>
           <p:cNvSpPr/>
           <p:nvPr/>
         </p:nvSpPr>
         <p:spPr>
           <a:xfrm>
-            <a:off x="640080" y="2468880"/>
-            <a:ext cx="7863840" cy="4389120"/>
+            <a:off x="0" y="0"/>
+            <a:ext cx="12191695" cy="137160"/>
           </a:xfrm>
           <a:prstGeom prst="rect">
             <a:avLst/>
           </a:prstGeom>
           <a:solidFill>
-            <a:srgbClr val="F8F9FA"/>
+            <a:srgbClr val="0066CC"/>
           </a:solidFill>
-          <a:ln w="25400">
-            <a:solidFill>
-              <a:srgbClr val="6497CA"/>
-            </a:solidFill>
+          <a:ln>
+            <a:noFill/>
           </a:ln>
         </p:spPr>
         <p:style>
@@ -3859,14 +3610,14 @@
       </p:sp>
       <p:sp>
         <p:nvSpPr>
-          <p:cNvPr id="6" name="TextBox 5"/>
+          <p:cNvPr id="4" name="TextBox 3"/>
           <p:cNvSpPr txBox="1"/>
           <p:nvPr/>
         </p:nvSpPr>
         <p:spPr>
           <a:xfrm>
-            <a:off x="914400" y="2651760"/>
-            <a:ext cx="7315200" cy="4023359"/>
+            <a:off x="457200" y="365760"/>
+            <a:ext cx="10972800" cy="731520"/>
           </a:xfrm>
           <a:prstGeom prst="rect">
             <a:avLst/>
@@ -3880,297 +3631,140 @@
           <a:lstStyle/>
           <a:p>
             <a:pPr>
-              <a:spcAft>
-                <a:spcPts val="200"/>
-              </a:spcAft>
-              <a:defRPr sz="1600">
-                <a:solidFill>
-                  <a:srgbClr val="595959"/>
-                </a:solidFill>
-                <a:latin typeface="Courier New"/>
-              </a:defRPr>
-            </a:pPr>
-            <a:r>
-              <a:t># enumerate() gives index and value</a:t>
-            </a:r>
-          </a:p>
+              <a:defRPr sz="4000" b="1">
+                <a:solidFill>
+                  <a:srgbClr val="003366"/>
+                </a:solidFill>
+              </a:defRPr>
+            </a:pPr>
+            <a:r>
+              <a:t>Getting Information ℹ️</a:t>
+            </a:r>
+          </a:p>
+        </p:txBody>
+      </p:sp>
+      <p:sp>
+        <p:nvSpPr>
+          <p:cNvPr id="5" name="Rectangle 4"/>
+          <p:cNvSpPr/>
+          <p:nvPr/>
+        </p:nvSpPr>
+        <p:spPr>
+          <a:xfrm>
+            <a:off x="457200" y="1005840"/>
+            <a:ext cx="1828800" cy="45720"/>
+          </a:xfrm>
+          <a:prstGeom prst="rect">
+            <a:avLst/>
+          </a:prstGeom>
+          <a:solidFill>
+            <a:srgbClr val="0066CC"/>
+          </a:solidFill>
+          <a:ln>
+            <a:noFill/>
+          </a:ln>
+        </p:spPr>
+        <p:style>
+          <a:lnRef idx="1">
+            <a:schemeClr val="accent1"/>
+          </a:lnRef>
+          <a:fillRef idx="3">
+            <a:schemeClr val="accent1"/>
+          </a:fillRef>
+          <a:effectRef idx="2">
+            <a:schemeClr val="accent1"/>
+          </a:effectRef>
+          <a:fontRef idx="minor">
+            <a:schemeClr val="lt1"/>
+          </a:fontRef>
+        </p:style>
+        <p:txBody>
+          <a:bodyPr rtlCol="0" anchor="ctr"/>
+          <a:lstStyle/>
+          <a:p>
+            <a:pPr algn="ctr"/>
+          </a:p>
+        </p:txBody>
+      </p:sp>
+      <p:sp>
+        <p:nvSpPr>
+          <p:cNvPr id="6" name="TextBox 5"/>
+          <p:cNvSpPr txBox="1"/>
+          <p:nvPr/>
+        </p:nvSpPr>
+        <p:spPr>
+          <a:xfrm>
+            <a:off x="640080" y="1371600"/>
+            <a:ext cx="10789920" cy="4572000"/>
+          </a:xfrm>
+          <a:prstGeom prst="rect">
+            <a:avLst/>
+          </a:prstGeom>
+          <a:noFill/>
+        </p:spPr>
+        <p:txBody>
+          <a:bodyPr wrap="square">
+            <a:spAutoFit/>
+          </a:bodyPr>
+          <a:lstStyle/>
           <a:p>
             <a:pPr>
               <a:spcAft>
-                <a:spcPts val="200"/>
+                <a:spcPts val="800"/>
               </a:spcAft>
-              <a:defRPr sz="1600">
-                <a:solidFill>
-                  <a:srgbClr val="595959"/>
-                </a:solidFill>
-                <a:latin typeface="Courier New"/>
-              </a:defRPr>
-            </a:pPr>
-            <a:r>
-              <a:t>fruits = ['apple', 'banana', 'cherry']</a:t>
+              <a:defRPr sz="2000" b="1">
+                <a:solidFill>
+                  <a:srgbClr val="333333"/>
+                </a:solidFill>
+              </a:defRPr>
+            </a:pPr>
+            <a:r>
+              <a:t>len() - Get list length</a:t>
             </a:r>
           </a:p>
           <a:p>
             <a:pPr>
               <a:spcAft>
-                <a:spcPts val="200"/>
+                <a:spcPts val="800"/>
               </a:spcAft>
-              <a:defRPr sz="1600">
-                <a:solidFill>
-                  <a:srgbClr val="595959"/>
-                </a:solidFill>
-                <a:latin typeface="Courier New"/>
-              </a:defRPr>
-            </a:pPr>
+              <a:defRPr sz="2000" b="1">
+                <a:solidFill>
+                  <a:srgbClr val="333333"/>
+                </a:solidFill>
+              </a:defRPr>
+            </a:pPr>
+            <a:r>
+              <a:t>count() - Count occurrences</a:t>
+            </a:r>
           </a:p>
           <a:p>
             <a:pPr>
               <a:spcAft>
-                <a:spcPts val="200"/>
+                <a:spcPts val="800"/>
               </a:spcAft>
-              <a:defRPr sz="1600">
-                <a:solidFill>
-                  <a:srgbClr val="595959"/>
-                </a:solidFill>
-                <a:latin typeface="Courier New"/>
-              </a:defRPr>
-            </a:pPr>
-            <a:r>
-              <a:t>for index, fruit in enumerate(fruits):</a:t>
+              <a:defRPr sz="2000" b="1">
+                <a:solidFill>
+                  <a:srgbClr val="333333"/>
+                </a:solidFill>
+              </a:defRPr>
+            </a:pPr>
+            <a:r>
+              <a:t>index() - Find position</a:t>
             </a:r>
           </a:p>
           <a:p>
             <a:pPr>
               <a:spcAft>
-                <a:spcPts val="200"/>
+                <a:spcPts val="800"/>
               </a:spcAft>
-              <a:defRPr sz="1600">
-                <a:solidFill>
-                  <a:srgbClr val="595959"/>
-                </a:solidFill>
-                <a:latin typeface="Courier New"/>
-              </a:defRPr>
-            </a:pPr>
-            <a:r>
-              <a:t>    print(f"{index}: {fruit}")</a:t>
-            </a:r>
-          </a:p>
-          <a:p>
-            <a:pPr>
-              <a:spcAft>
-                <a:spcPts val="200"/>
-              </a:spcAft>
-              <a:defRPr sz="1600">
-                <a:solidFill>
-                  <a:srgbClr val="595959"/>
-                </a:solidFill>
-                <a:latin typeface="Courier New"/>
-              </a:defRPr>
-            </a:pPr>
-            <a:r>
-              <a:t># 0: apple</a:t>
-            </a:r>
-          </a:p>
-          <a:p>
-            <a:pPr>
-              <a:spcAft>
-                <a:spcPts val="200"/>
-              </a:spcAft>
-              <a:defRPr sz="1600">
-                <a:solidFill>
-                  <a:srgbClr val="595959"/>
-                </a:solidFill>
-                <a:latin typeface="Courier New"/>
-              </a:defRPr>
-            </a:pPr>
-            <a:r>
-              <a:t># 1: banana</a:t>
-            </a:r>
-          </a:p>
-          <a:p>
-            <a:pPr>
-              <a:spcAft>
-                <a:spcPts val="200"/>
-              </a:spcAft>
-              <a:defRPr sz="1600">
-                <a:solidFill>
-                  <a:srgbClr val="595959"/>
-                </a:solidFill>
-                <a:latin typeface="Courier New"/>
-              </a:defRPr>
-            </a:pPr>
-            <a:r>
-              <a:t># 2: cherry</a:t>
-            </a:r>
-          </a:p>
-          <a:p>
-            <a:pPr>
-              <a:spcAft>
-                <a:spcPts val="200"/>
-              </a:spcAft>
-              <a:defRPr sz="1600">
-                <a:solidFill>
-                  <a:srgbClr val="595959"/>
-                </a:solidFill>
-                <a:latin typeface="Courier New"/>
-              </a:defRPr>
-            </a:pPr>
-          </a:p>
-          <a:p>
-            <a:pPr>
-              <a:spcAft>
-                <a:spcPts val="200"/>
-              </a:spcAft>
-              <a:defRPr sz="1600">
-                <a:solidFill>
-                  <a:srgbClr val="595959"/>
-                </a:solidFill>
-                <a:latin typeface="Courier New"/>
-              </a:defRPr>
-            </a:pPr>
-            <a:r>
-              <a:t># Start counting from 1</a:t>
-            </a:r>
-          </a:p>
-          <a:p>
-            <a:pPr>
-              <a:spcAft>
-                <a:spcPts val="200"/>
-              </a:spcAft>
-              <a:defRPr sz="1600">
-                <a:solidFill>
-                  <a:srgbClr val="595959"/>
-                </a:solidFill>
-                <a:latin typeface="Courier New"/>
-              </a:defRPr>
-            </a:pPr>
-            <a:r>
-              <a:t>for num, fruit in enumerate(fruits, 1):</a:t>
-            </a:r>
-          </a:p>
-          <a:p>
-            <a:pPr>
-              <a:spcAft>
-                <a:spcPts val="200"/>
-              </a:spcAft>
-              <a:defRPr sz="1600">
-                <a:solidFill>
-                  <a:srgbClr val="595959"/>
-                </a:solidFill>
-                <a:latin typeface="Courier New"/>
-              </a:defRPr>
-            </a:pPr>
-            <a:r>
-              <a:t>    print(f"{num}. {fruit}")</a:t>
-            </a:r>
-          </a:p>
-          <a:p>
-            <a:pPr>
-              <a:spcAft>
-                <a:spcPts val="200"/>
-              </a:spcAft>
-              <a:defRPr sz="1600">
-                <a:solidFill>
-                  <a:srgbClr val="595959"/>
-                </a:solidFill>
-                <a:latin typeface="Courier New"/>
-              </a:defRPr>
-            </a:pPr>
-            <a:r>
-              <a:t># 1. apple</a:t>
-            </a:r>
-          </a:p>
-          <a:p>
-            <a:pPr>
-              <a:spcAft>
-                <a:spcPts val="200"/>
-              </a:spcAft>
-              <a:defRPr sz="1600">
-                <a:solidFill>
-                  <a:srgbClr val="595959"/>
-                </a:solidFill>
-                <a:latin typeface="Courier New"/>
-              </a:defRPr>
-            </a:pPr>
-            <a:r>
-              <a:t># 2. banana</a:t>
-            </a:r>
-          </a:p>
-          <a:p>
-            <a:pPr>
-              <a:spcAft>
-                <a:spcPts val="200"/>
-              </a:spcAft>
-              <a:defRPr sz="1600">
-                <a:solidFill>
-                  <a:srgbClr val="595959"/>
-                </a:solidFill>
-                <a:latin typeface="Courier New"/>
-              </a:defRPr>
-            </a:pPr>
-            <a:r>
-              <a:t># 3. cherry</a:t>
-            </a:r>
-          </a:p>
-          <a:p>
-            <a:pPr>
-              <a:spcAft>
-                <a:spcPts val="200"/>
-              </a:spcAft>
-              <a:defRPr sz="1600">
-                <a:solidFill>
-                  <a:srgbClr val="595959"/>
-                </a:solidFill>
-                <a:latin typeface="Courier New"/>
-              </a:defRPr>
-            </a:pPr>
-          </a:p>
-          <a:p>
-            <a:pPr>
-              <a:spcAft>
-                <a:spcPts val="200"/>
-              </a:spcAft>
-              <a:defRPr sz="1600">
-                <a:solidFill>
-                  <a:srgbClr val="595959"/>
-                </a:solidFill>
-                <a:latin typeface="Courier New"/>
-              </a:defRPr>
-            </a:pPr>
-            <a:r>
-              <a:t># Useful for modifying list during iteration</a:t>
-            </a:r>
-          </a:p>
-          <a:p>
-            <a:pPr>
-              <a:spcAft>
-                <a:spcPts val="200"/>
-              </a:spcAft>
-              <a:defRPr sz="1600">
-                <a:solidFill>
-                  <a:srgbClr val="595959"/>
-                </a:solidFill>
-                <a:latin typeface="Courier New"/>
-              </a:defRPr>
-            </a:pPr>
-            <a:r>
-              <a:t>for i, fruit in enumerate(fruits):</a:t>
-            </a:r>
-          </a:p>
-          <a:p>
-            <a:pPr>
-              <a:spcAft>
-                <a:spcPts val="200"/>
-              </a:spcAft>
-              <a:defRPr sz="1600">
-                <a:solidFill>
-                  <a:srgbClr val="595959"/>
-                </a:solidFill>
-                <a:latin typeface="Courier New"/>
-              </a:defRPr>
-            </a:pPr>
-            <a:r>
-              <a:t>    fruits[i] = fruit.upper()</a:t>
+              <a:defRPr sz="2000" b="1">
+                <a:solidFill>
+                  <a:srgbClr val="333333"/>
+                </a:solidFill>
+              </a:defRPr>
+            </a:pPr>
+            <a:r>
+              <a:t>in operator - Check membership</a:t>
             </a:r>
           </a:p>
         </p:txBody>
@@ -4186,14 +3780,6 @@
 <file path=ppt/slides/slide12.xml><?xml version="1.0" encoding="utf-8"?>
 <p:sld xmlns:a="http://schemas.openxmlformats.org/drawingml/2006/main" xmlns:p="http://schemas.openxmlformats.org/presentationml/2006/main" xmlns:r="http://schemas.openxmlformats.org/officeDocument/2006/relationships">
   <p:cSld>
-    <p:bg>
-      <p:bgPr>
-        <a:solidFill>
-          <a:srgbClr val="FFFFFF"/>
-        </a:solidFill>
-        <a:effectLst/>
-      </p:bgPr>
-    </p:bg>
     <p:spTree>
       <p:nvGrpSpPr>
         <p:cNvPr id="1" name=""/>
@@ -4210,13 +3796,13 @@
         <p:spPr>
           <a:xfrm>
             <a:off x="0" y="0"/>
-            <a:ext cx="9144000" cy="914400"/>
+            <a:ext cx="12191695" cy="6858000"/>
           </a:xfrm>
           <a:prstGeom prst="rect">
             <a:avLst/>
           </a:prstGeom>
           <a:solidFill>
-            <a:srgbClr val="29629B"/>
+            <a:srgbClr val="FFFFFF"/>
           </a:solidFill>
           <a:ln>
             <a:noFill/>
@@ -4246,95 +3832,23 @@
       </p:sp>
       <p:sp>
         <p:nvSpPr>
-          <p:cNvPr id="3" name="TextBox 2"/>
-          <p:cNvSpPr txBox="1"/>
-          <p:nvPr/>
-        </p:nvSpPr>
-        <p:spPr>
-          <a:xfrm>
-            <a:off x="457200" y="137160"/>
-            <a:ext cx="8229600" cy="640080"/>
-          </a:xfrm>
-          <a:prstGeom prst="rect">
-            <a:avLst/>
-          </a:prstGeom>
-          <a:noFill/>
-        </p:spPr>
-        <p:txBody>
-          <a:bodyPr wrap="none">
-            <a:spAutoFit/>
-          </a:bodyPr>
-          <a:lstStyle/>
-          <a:p>
-            <a:pPr>
-              <a:defRPr sz="4000" b="1">
-                <a:solidFill>
-                  <a:srgbClr val="FFFFFF"/>
-                </a:solidFill>
-              </a:defRPr>
-            </a:pPr>
-            <a:r>
-              <a:t>List Operations</a:t>
-            </a:r>
-          </a:p>
-        </p:txBody>
-      </p:sp>
-      <p:sp>
-        <p:nvSpPr>
-          <p:cNvPr id="4" name="TextBox 3"/>
-          <p:cNvSpPr txBox="1"/>
-          <p:nvPr/>
-        </p:nvSpPr>
-        <p:spPr>
-          <a:xfrm>
-            <a:off x="640080" y="1371600"/>
-            <a:ext cx="7863840" cy="914400"/>
-          </a:xfrm>
-          <a:prstGeom prst="rect">
-            <a:avLst/>
-          </a:prstGeom>
-          <a:noFill/>
-        </p:spPr>
-        <p:txBody>
-          <a:bodyPr wrap="square">
-            <a:spAutoFit/>
-          </a:bodyPr>
-          <a:lstStyle/>
-          <a:p>
-            <a:pPr>
-              <a:defRPr sz="1800">
-                <a:solidFill>
-                  <a:srgbClr val="595959"/>
-                </a:solidFill>
-              </a:defRPr>
-            </a:pPr>
-            <a:r>
-              <a:t>Common operations with lists</a:t>
-            </a:r>
-          </a:p>
-        </p:txBody>
-      </p:sp>
-      <p:sp>
-        <p:nvSpPr>
-          <p:cNvPr id="5" name="Rectangle 4"/>
+          <p:cNvPr id="3" name="Rectangle 2"/>
           <p:cNvSpPr/>
           <p:nvPr/>
         </p:nvSpPr>
         <p:spPr>
           <a:xfrm>
-            <a:off x="640080" y="2468880"/>
-            <a:ext cx="7863840" cy="4389120"/>
+            <a:off x="0" y="0"/>
+            <a:ext cx="12191695" cy="137160"/>
           </a:xfrm>
           <a:prstGeom prst="rect">
             <a:avLst/>
           </a:prstGeom>
           <a:solidFill>
-            <a:srgbClr val="F8F9FA"/>
+            <a:srgbClr val="0066CC"/>
           </a:solidFill>
-          <a:ln w="25400">
-            <a:solidFill>
-              <a:srgbClr val="6497CA"/>
-            </a:solidFill>
+          <a:ln>
+            <a:noFill/>
           </a:ln>
         </p:spPr>
         <p:style>
@@ -4361,14 +3875,14 @@
       </p:sp>
       <p:sp>
         <p:nvSpPr>
-          <p:cNvPr id="6" name="TextBox 5"/>
+          <p:cNvPr id="4" name="TextBox 3"/>
           <p:cNvSpPr txBox="1"/>
           <p:nvPr/>
         </p:nvSpPr>
         <p:spPr>
           <a:xfrm>
-            <a:off x="914400" y="2651760"/>
-            <a:ext cx="7315200" cy="4023359"/>
+            <a:off x="457200" y="365760"/>
+            <a:ext cx="10972800" cy="731520"/>
           </a:xfrm>
           <a:prstGeom prst="rect">
             <a:avLst/>
@@ -4382,281 +3896,140 @@
           <a:lstStyle/>
           <a:p>
             <a:pPr>
-              <a:spcAft>
-                <a:spcPts val="200"/>
-              </a:spcAft>
-              <a:defRPr sz="1600">
-                <a:solidFill>
-                  <a:srgbClr val="595959"/>
-                </a:solidFill>
-                <a:latin typeface="Courier New"/>
-              </a:defRPr>
-            </a:pPr>
-            <a:r>
-              <a:t># Concatenation with +</a:t>
-            </a:r>
-          </a:p>
+              <a:defRPr sz="4000" b="1">
+                <a:solidFill>
+                  <a:srgbClr val="003366"/>
+                </a:solidFill>
+              </a:defRPr>
+            </a:pPr>
+            <a:r>
+              <a:t>Iterating Through Lists 🔄</a:t>
+            </a:r>
+          </a:p>
+        </p:txBody>
+      </p:sp>
+      <p:sp>
+        <p:nvSpPr>
+          <p:cNvPr id="5" name="Rectangle 4"/>
+          <p:cNvSpPr/>
+          <p:nvPr/>
+        </p:nvSpPr>
+        <p:spPr>
+          <a:xfrm>
+            <a:off x="457200" y="1005840"/>
+            <a:ext cx="1828800" cy="45720"/>
+          </a:xfrm>
+          <a:prstGeom prst="rect">
+            <a:avLst/>
+          </a:prstGeom>
+          <a:solidFill>
+            <a:srgbClr val="0066CC"/>
+          </a:solidFill>
+          <a:ln>
+            <a:noFill/>
+          </a:ln>
+        </p:spPr>
+        <p:style>
+          <a:lnRef idx="1">
+            <a:schemeClr val="accent1"/>
+          </a:lnRef>
+          <a:fillRef idx="3">
+            <a:schemeClr val="accent1"/>
+          </a:fillRef>
+          <a:effectRef idx="2">
+            <a:schemeClr val="accent1"/>
+          </a:effectRef>
+          <a:fontRef idx="minor">
+            <a:schemeClr val="lt1"/>
+          </a:fontRef>
+        </p:style>
+        <p:txBody>
+          <a:bodyPr rtlCol="0" anchor="ctr"/>
+          <a:lstStyle/>
+          <a:p>
+            <a:pPr algn="ctr"/>
+          </a:p>
+        </p:txBody>
+      </p:sp>
+      <p:sp>
+        <p:nvSpPr>
+          <p:cNvPr id="6" name="TextBox 5"/>
+          <p:cNvSpPr txBox="1"/>
+          <p:nvPr/>
+        </p:nvSpPr>
+        <p:spPr>
+          <a:xfrm>
+            <a:off x="640080" y="1371600"/>
+            <a:ext cx="10789920" cy="4572000"/>
+          </a:xfrm>
+          <a:prstGeom prst="rect">
+            <a:avLst/>
+          </a:prstGeom>
+          <a:noFill/>
+        </p:spPr>
+        <p:txBody>
+          <a:bodyPr wrap="square">
+            <a:spAutoFit/>
+          </a:bodyPr>
+          <a:lstStyle/>
           <a:p>
             <a:pPr>
               <a:spcAft>
-                <a:spcPts val="200"/>
+                <a:spcPts val="800"/>
               </a:spcAft>
-              <a:defRPr sz="1600">
-                <a:solidFill>
-                  <a:srgbClr val="595959"/>
-                </a:solidFill>
-                <a:latin typeface="Courier New"/>
-              </a:defRPr>
-            </a:pPr>
-            <a:r>
-              <a:t>list1 = [1, 2, 3]</a:t>
+              <a:defRPr sz="2000" b="1">
+                <a:solidFill>
+                  <a:srgbClr val="333333"/>
+                </a:solidFill>
+              </a:defRPr>
+            </a:pPr>
+            <a:r>
+              <a:t>Use for loops to process each item</a:t>
             </a:r>
           </a:p>
           <a:p>
             <a:pPr>
               <a:spcAft>
-                <a:spcPts val="200"/>
+                <a:spcPts val="800"/>
               </a:spcAft>
-              <a:defRPr sz="1600">
-                <a:solidFill>
-                  <a:srgbClr val="595959"/>
-                </a:solidFill>
-                <a:latin typeface="Courier New"/>
-              </a:defRPr>
-            </a:pPr>
-            <a:r>
-              <a:t>list2 = [4, 5, 6]</a:t>
+              <a:defRPr sz="2000" b="1">
+                <a:solidFill>
+                  <a:srgbClr val="333333"/>
+                </a:solidFill>
+              </a:defRPr>
+            </a:pPr>
+            <a:r>
+              <a:t>Basic Loop</a:t>
             </a:r>
           </a:p>
           <a:p>
             <a:pPr>
               <a:spcAft>
-                <a:spcPts val="200"/>
+                <a:spcPts val="800"/>
               </a:spcAft>
-              <a:defRPr sz="1600">
-                <a:solidFill>
-                  <a:srgbClr val="595959"/>
-                </a:solidFill>
-                <a:latin typeface="Courier New"/>
-              </a:defRPr>
-            </a:pPr>
-            <a:r>
-              <a:t>combined = list1 + list2</a:t>
+              <a:defRPr sz="2000" b="1">
+                <a:solidFill>
+                  <a:srgbClr val="333333"/>
+                </a:solidFill>
+              </a:defRPr>
+            </a:pPr>
+            <a:r>
+              <a:t>Loop with Index</a:t>
             </a:r>
           </a:p>
           <a:p>
             <a:pPr>
               <a:spcAft>
-                <a:spcPts val="200"/>
+                <a:spcPts val="800"/>
               </a:spcAft>
-              <a:defRPr sz="1600">
-                <a:solidFill>
-                  <a:srgbClr val="595959"/>
-                </a:solidFill>
-                <a:latin typeface="Courier New"/>
-              </a:defRPr>
-            </a:pPr>
-            <a:r>
-              <a:t>print(combined)  # [1, 2, 3, 4, 5, 6]</a:t>
-            </a:r>
-          </a:p>
-          <a:p>
-            <a:pPr>
-              <a:spcAft>
-                <a:spcPts val="200"/>
-              </a:spcAft>
-              <a:defRPr sz="1600">
-                <a:solidFill>
-                  <a:srgbClr val="595959"/>
-                </a:solidFill>
-                <a:latin typeface="Courier New"/>
-              </a:defRPr>
-            </a:pPr>
-          </a:p>
-          <a:p>
-            <a:pPr>
-              <a:spcAft>
-                <a:spcPts val="200"/>
-              </a:spcAft>
-              <a:defRPr sz="1600">
-                <a:solidFill>
-                  <a:srgbClr val="595959"/>
-                </a:solidFill>
-                <a:latin typeface="Courier New"/>
-              </a:defRPr>
-            </a:pPr>
-            <a:r>
-              <a:t># Repetition with *</a:t>
-            </a:r>
-          </a:p>
-          <a:p>
-            <a:pPr>
-              <a:spcAft>
-                <a:spcPts val="200"/>
-              </a:spcAft>
-              <a:defRPr sz="1600">
-                <a:solidFill>
-                  <a:srgbClr val="595959"/>
-                </a:solidFill>
-                <a:latin typeface="Courier New"/>
-              </a:defRPr>
-            </a:pPr>
-            <a:r>
-              <a:t>pattern = ['A', 'B']</a:t>
-            </a:r>
-          </a:p>
-          <a:p>
-            <a:pPr>
-              <a:spcAft>
-                <a:spcPts val="200"/>
-              </a:spcAft>
-              <a:defRPr sz="1600">
-                <a:solidFill>
-                  <a:srgbClr val="595959"/>
-                </a:solidFill>
-                <a:latin typeface="Courier New"/>
-              </a:defRPr>
-            </a:pPr>
-            <a:r>
-              <a:t>repeated = pattern * 3</a:t>
-            </a:r>
-          </a:p>
-          <a:p>
-            <a:pPr>
-              <a:spcAft>
-                <a:spcPts val="200"/>
-              </a:spcAft>
-              <a:defRPr sz="1600">
-                <a:solidFill>
-                  <a:srgbClr val="595959"/>
-                </a:solidFill>
-                <a:latin typeface="Courier New"/>
-              </a:defRPr>
-            </a:pPr>
-            <a:r>
-              <a:t>print(repeated)  # ['A', 'B', 'A', 'B', 'A', 'B']</a:t>
-            </a:r>
-          </a:p>
-          <a:p>
-            <a:pPr>
-              <a:spcAft>
-                <a:spcPts val="200"/>
-              </a:spcAft>
-              <a:defRPr sz="1600">
-                <a:solidFill>
-                  <a:srgbClr val="595959"/>
-                </a:solidFill>
-                <a:latin typeface="Courier New"/>
-              </a:defRPr>
-            </a:pPr>
-          </a:p>
-          <a:p>
-            <a:pPr>
-              <a:spcAft>
-                <a:spcPts val="200"/>
-              </a:spcAft>
-              <a:defRPr sz="1600">
-                <a:solidFill>
-                  <a:srgbClr val="595959"/>
-                </a:solidFill>
-                <a:latin typeface="Courier New"/>
-              </a:defRPr>
-            </a:pPr>
-            <a:r>
-              <a:t># Comparison operators</a:t>
-            </a:r>
-          </a:p>
-          <a:p>
-            <a:pPr>
-              <a:spcAft>
-                <a:spcPts val="200"/>
-              </a:spcAft>
-              <a:defRPr sz="1600">
-                <a:solidFill>
-                  <a:srgbClr val="595959"/>
-                </a:solidFill>
-                <a:latin typeface="Courier New"/>
-              </a:defRPr>
-            </a:pPr>
-            <a:r>
-              <a:t>print([1, 2, 3] == [1, 2, 3])  # True</a:t>
-            </a:r>
-          </a:p>
-          <a:p>
-            <a:pPr>
-              <a:spcAft>
-                <a:spcPts val="200"/>
-              </a:spcAft>
-              <a:defRPr sz="1600">
-                <a:solidFill>
-                  <a:srgbClr val="595959"/>
-                </a:solidFill>
-                <a:latin typeface="Courier New"/>
-              </a:defRPr>
-            </a:pPr>
-            <a:r>
-              <a:t>print([1, 2, 3] &lt; [1, 2, 4])   # True (lexicographic)</a:t>
-            </a:r>
-          </a:p>
-          <a:p>
-            <a:pPr>
-              <a:spcAft>
-                <a:spcPts val="200"/>
-              </a:spcAft>
-              <a:defRPr sz="1600">
-                <a:solidFill>
-                  <a:srgbClr val="595959"/>
-                </a:solidFill>
-                <a:latin typeface="Courier New"/>
-              </a:defRPr>
-            </a:pPr>
-          </a:p>
-          <a:p>
-            <a:pPr>
-              <a:spcAft>
-                <a:spcPts val="200"/>
-              </a:spcAft>
-              <a:defRPr sz="1600">
-                <a:solidFill>
-                  <a:srgbClr val="595959"/>
-                </a:solidFill>
-                <a:latin typeface="Courier New"/>
-              </a:defRPr>
-            </a:pPr>
-            <a:r>
-              <a:t># List unpacking</a:t>
-            </a:r>
-          </a:p>
-          <a:p>
-            <a:pPr>
-              <a:spcAft>
-                <a:spcPts val="200"/>
-              </a:spcAft>
-              <a:defRPr sz="1600">
-                <a:solidFill>
-                  <a:srgbClr val="595959"/>
-                </a:solidFill>
-                <a:latin typeface="Courier New"/>
-              </a:defRPr>
-            </a:pPr>
-            <a:r>
-              <a:t>a, b, c = [1, 2, 3]</a:t>
-            </a:r>
-          </a:p>
-          <a:p>
-            <a:pPr>
-              <a:spcAft>
-                <a:spcPts val="200"/>
-              </a:spcAft>
-              <a:defRPr sz="1600">
-                <a:solidFill>
-                  <a:srgbClr val="595959"/>
-                </a:solidFill>
-                <a:latin typeface="Courier New"/>
-              </a:defRPr>
-            </a:pPr>
-            <a:r>
-              <a:t>print(a, b, c)  # 1 2 3</a:t>
+              <a:defRPr sz="2000" b="1">
+                <a:solidFill>
+                  <a:srgbClr val="333333"/>
+                </a:solidFill>
+              </a:defRPr>
+            </a:pPr>
+            <a:r>
+              <a:t>Loop with enumerate()</a:t>
             </a:r>
           </a:p>
         </p:txBody>
@@ -4672,14 +4045,6 @@
 <file path=ppt/slides/slide13.xml><?xml version="1.0" encoding="utf-8"?>
 <p:sld xmlns:a="http://schemas.openxmlformats.org/drawingml/2006/main" xmlns:p="http://schemas.openxmlformats.org/presentationml/2006/main" xmlns:r="http://schemas.openxmlformats.org/officeDocument/2006/relationships">
   <p:cSld>
-    <p:bg>
-      <p:bgPr>
-        <a:solidFill>
-          <a:srgbClr val="FFFFFF"/>
-        </a:solidFill>
-        <a:effectLst/>
-      </p:bgPr>
-    </p:bg>
     <p:spTree>
       <p:nvGrpSpPr>
         <p:cNvPr id="1" name=""/>
@@ -4696,13 +4061,13 @@
         <p:spPr>
           <a:xfrm>
             <a:off x="0" y="0"/>
-            <a:ext cx="9144000" cy="914400"/>
+            <a:ext cx="12191695" cy="6858000"/>
           </a:xfrm>
           <a:prstGeom prst="rect">
             <a:avLst/>
           </a:prstGeom>
           <a:solidFill>
-            <a:srgbClr val="29629B"/>
+            <a:srgbClr val="FFFFFF"/>
           </a:solidFill>
           <a:ln>
             <a:noFill/>
@@ -4732,95 +4097,23 @@
       </p:sp>
       <p:sp>
         <p:nvSpPr>
-          <p:cNvPr id="3" name="TextBox 2"/>
-          <p:cNvSpPr txBox="1"/>
-          <p:nvPr/>
-        </p:nvSpPr>
-        <p:spPr>
-          <a:xfrm>
-            <a:off x="457200" y="137160"/>
-            <a:ext cx="8229600" cy="640080"/>
-          </a:xfrm>
-          <a:prstGeom prst="rect">
-            <a:avLst/>
-          </a:prstGeom>
-          <a:noFill/>
-        </p:spPr>
-        <p:txBody>
-          <a:bodyPr wrap="none">
-            <a:spAutoFit/>
-          </a:bodyPr>
-          <a:lstStyle/>
-          <a:p>
-            <a:pPr>
-              <a:defRPr sz="4000" b="1">
-                <a:solidFill>
-                  <a:srgbClr val="FFFFFF"/>
-                </a:solidFill>
-              </a:defRPr>
-            </a:pPr>
-            <a:r>
-              <a:t>List Comprehensions</a:t>
-            </a:r>
-          </a:p>
-        </p:txBody>
-      </p:sp>
-      <p:sp>
-        <p:nvSpPr>
-          <p:cNvPr id="4" name="TextBox 3"/>
-          <p:cNvSpPr txBox="1"/>
-          <p:nvPr/>
-        </p:nvSpPr>
-        <p:spPr>
-          <a:xfrm>
-            <a:off x="640080" y="1371600"/>
-            <a:ext cx="7863840" cy="914400"/>
-          </a:xfrm>
-          <a:prstGeom prst="rect">
-            <a:avLst/>
-          </a:prstGeom>
-          <a:noFill/>
-        </p:spPr>
-        <p:txBody>
-          <a:bodyPr wrap="square">
-            <a:spAutoFit/>
-          </a:bodyPr>
-          <a:lstStyle/>
-          <a:p>
-            <a:pPr>
-              <a:defRPr sz="1800">
-                <a:solidFill>
-                  <a:srgbClr val="595959"/>
-                </a:solidFill>
-              </a:defRPr>
-            </a:pPr>
-            <a:r>
-              <a:t>Create new lists in a single line</a:t>
-            </a:r>
-          </a:p>
-        </p:txBody>
-      </p:sp>
-      <p:sp>
-        <p:nvSpPr>
-          <p:cNvPr id="5" name="Rectangle 4"/>
+          <p:cNvPr id="3" name="Rectangle 2"/>
           <p:cNvSpPr/>
           <p:nvPr/>
         </p:nvSpPr>
         <p:spPr>
           <a:xfrm>
-            <a:off x="640080" y="2468880"/>
-            <a:ext cx="7863840" cy="4389120"/>
+            <a:off x="0" y="0"/>
+            <a:ext cx="12191695" cy="137160"/>
           </a:xfrm>
           <a:prstGeom prst="rect">
             <a:avLst/>
           </a:prstGeom>
           <a:solidFill>
-            <a:srgbClr val="F8F9FA"/>
+            <a:srgbClr val="0066CC"/>
           </a:solidFill>
-          <a:ln w="25400">
-            <a:solidFill>
-              <a:srgbClr val="6497CA"/>
-            </a:solidFill>
+          <a:ln>
+            <a:noFill/>
           </a:ln>
         </p:spPr>
         <p:style>
@@ -4847,14 +4140,14 @@
       </p:sp>
       <p:sp>
         <p:nvSpPr>
-          <p:cNvPr id="6" name="TextBox 5"/>
+          <p:cNvPr id="4" name="TextBox 3"/>
           <p:cNvSpPr txBox="1"/>
           <p:nvPr/>
         </p:nvSpPr>
         <p:spPr>
           <a:xfrm>
-            <a:off x="914400" y="2651760"/>
-            <a:ext cx="7315200" cy="4023359"/>
+            <a:off x="457200" y="365760"/>
+            <a:ext cx="10972800" cy="731520"/>
           </a:xfrm>
           <a:prstGeom prst="rect">
             <a:avLst/>
@@ -4868,262 +4161,125 @@
           <a:lstStyle/>
           <a:p>
             <a:pPr>
-              <a:spcAft>
-                <a:spcPts val="200"/>
-              </a:spcAft>
-              <a:defRPr sz="1600">
-                <a:solidFill>
-                  <a:srgbClr val="595959"/>
-                </a:solidFill>
-                <a:latin typeface="Courier New"/>
-              </a:defRPr>
-            </a:pPr>
-            <a:r>
-              <a:t># Basic syntax: [expression for item in iterable]</a:t>
-            </a:r>
-          </a:p>
+              <a:defRPr sz="4000" b="1">
+                <a:solidFill>
+                  <a:srgbClr val="003366"/>
+                </a:solidFill>
+              </a:defRPr>
+            </a:pPr>
+            <a:r>
+              <a:t>List Operations 🔧</a:t>
+            </a:r>
+          </a:p>
+        </p:txBody>
+      </p:sp>
+      <p:sp>
+        <p:nvSpPr>
+          <p:cNvPr id="5" name="Rectangle 4"/>
+          <p:cNvSpPr/>
+          <p:nvPr/>
+        </p:nvSpPr>
+        <p:spPr>
+          <a:xfrm>
+            <a:off x="457200" y="1005840"/>
+            <a:ext cx="1828800" cy="45720"/>
+          </a:xfrm>
+          <a:prstGeom prst="rect">
+            <a:avLst/>
+          </a:prstGeom>
+          <a:solidFill>
+            <a:srgbClr val="0066CC"/>
+          </a:solidFill>
+          <a:ln>
+            <a:noFill/>
+          </a:ln>
+        </p:spPr>
+        <p:style>
+          <a:lnRef idx="1">
+            <a:schemeClr val="accent1"/>
+          </a:lnRef>
+          <a:fillRef idx="3">
+            <a:schemeClr val="accent1"/>
+          </a:fillRef>
+          <a:effectRef idx="2">
+            <a:schemeClr val="accent1"/>
+          </a:effectRef>
+          <a:fontRef idx="minor">
+            <a:schemeClr val="lt1"/>
+          </a:fontRef>
+        </p:style>
+        <p:txBody>
+          <a:bodyPr rtlCol="0" anchor="ctr"/>
+          <a:lstStyle/>
+          <a:p>
+            <a:pPr algn="ctr"/>
+          </a:p>
+        </p:txBody>
+      </p:sp>
+      <p:sp>
+        <p:nvSpPr>
+          <p:cNvPr id="6" name="TextBox 5"/>
+          <p:cNvSpPr txBox="1"/>
+          <p:nvPr/>
+        </p:nvSpPr>
+        <p:spPr>
+          <a:xfrm>
+            <a:off x="640080" y="1371600"/>
+            <a:ext cx="10789920" cy="4572000"/>
+          </a:xfrm>
+          <a:prstGeom prst="rect">
+            <a:avLst/>
+          </a:prstGeom>
+          <a:noFill/>
+        </p:spPr>
+        <p:txBody>
+          <a:bodyPr wrap="square">
+            <a:spAutoFit/>
+          </a:bodyPr>
+          <a:lstStyle/>
           <a:p>
             <a:pPr>
               <a:spcAft>
-                <a:spcPts val="200"/>
+                <a:spcPts val="800"/>
               </a:spcAft>
-              <a:defRPr sz="1600">
-                <a:solidFill>
-                  <a:srgbClr val="595959"/>
-                </a:solidFill>
-                <a:latin typeface="Courier New"/>
-              </a:defRPr>
-            </a:pPr>
+              <a:defRPr sz="2000" b="1">
+                <a:solidFill>
+                  <a:srgbClr val="333333"/>
+                </a:solidFill>
+              </a:defRPr>
+            </a:pPr>
+            <a:r>
+              <a:t>Concatenation (+)</a:t>
+            </a:r>
           </a:p>
           <a:p>
             <a:pPr>
               <a:spcAft>
-                <a:spcPts val="200"/>
+                <a:spcPts val="800"/>
               </a:spcAft>
-              <a:defRPr sz="1600">
-                <a:solidFill>
-                  <a:srgbClr val="595959"/>
-                </a:solidFill>
-                <a:latin typeface="Courier New"/>
-              </a:defRPr>
-            </a:pPr>
-            <a:r>
-              <a:t># Create list of squares</a:t>
+              <a:defRPr sz="2000" b="1">
+                <a:solidFill>
+                  <a:srgbClr val="333333"/>
+                </a:solidFill>
+              </a:defRPr>
+            </a:pPr>
+            <a:r>
+              <a:t>Repetition (*)</a:t>
             </a:r>
           </a:p>
           <a:p>
             <a:pPr>
               <a:spcAft>
-                <a:spcPts val="200"/>
+                <a:spcPts val="800"/>
               </a:spcAft>
-              <a:defRPr sz="1600">
-                <a:solidFill>
-                  <a:srgbClr val="595959"/>
-                </a:solidFill>
-                <a:latin typeface="Courier New"/>
-              </a:defRPr>
-            </a:pPr>
-            <a:r>
-              <a:t>squares = [x**2 for x in range(1, 6)]</a:t>
-            </a:r>
-          </a:p>
-          <a:p>
-            <a:pPr>
-              <a:spcAft>
-                <a:spcPts val="200"/>
-              </a:spcAft>
-              <a:defRPr sz="1600">
-                <a:solidFill>
-                  <a:srgbClr val="595959"/>
-                </a:solidFill>
-                <a:latin typeface="Courier New"/>
-              </a:defRPr>
-            </a:pPr>
-            <a:r>
-              <a:t>print(squares)  # [1, 4, 9, 16, 25]</a:t>
-            </a:r>
-          </a:p>
-          <a:p>
-            <a:pPr>
-              <a:spcAft>
-                <a:spcPts val="200"/>
-              </a:spcAft>
-              <a:defRPr sz="1600">
-                <a:solidFill>
-                  <a:srgbClr val="595959"/>
-                </a:solidFill>
-                <a:latin typeface="Courier New"/>
-              </a:defRPr>
-            </a:pPr>
-          </a:p>
-          <a:p>
-            <a:pPr>
-              <a:spcAft>
-                <a:spcPts val="200"/>
-              </a:spcAft>
-              <a:defRPr sz="1600">
-                <a:solidFill>
-                  <a:srgbClr val="595959"/>
-                </a:solidFill>
-                <a:latin typeface="Courier New"/>
-              </a:defRPr>
-            </a:pPr>
-            <a:r>
-              <a:t># Transform strings</a:t>
-            </a:r>
-          </a:p>
-          <a:p>
-            <a:pPr>
-              <a:spcAft>
-                <a:spcPts val="200"/>
-              </a:spcAft>
-              <a:defRPr sz="1600">
-                <a:solidFill>
-                  <a:srgbClr val="595959"/>
-                </a:solidFill>
-                <a:latin typeface="Courier New"/>
-              </a:defRPr>
-            </a:pPr>
-            <a:r>
-              <a:t>fruits = ['apple', 'banana', 'cherry']</a:t>
-            </a:r>
-          </a:p>
-          <a:p>
-            <a:pPr>
-              <a:spcAft>
-                <a:spcPts val="200"/>
-              </a:spcAft>
-              <a:defRPr sz="1600">
-                <a:solidFill>
-                  <a:srgbClr val="595959"/>
-                </a:solidFill>
-                <a:latin typeface="Courier New"/>
-              </a:defRPr>
-            </a:pPr>
-            <a:r>
-              <a:t>upper_fruits = [fruit.upper() for fruit in fruits]</a:t>
-            </a:r>
-          </a:p>
-          <a:p>
-            <a:pPr>
-              <a:spcAft>
-                <a:spcPts val="200"/>
-              </a:spcAft>
-              <a:defRPr sz="1600">
-                <a:solidFill>
-                  <a:srgbClr val="595959"/>
-                </a:solidFill>
-                <a:latin typeface="Courier New"/>
-              </a:defRPr>
-            </a:pPr>
-            <a:r>
-              <a:t>print(upper_fruits)  # ['APPLE', 'BANANA', 'CHERRY']</a:t>
-            </a:r>
-          </a:p>
-          <a:p>
-            <a:pPr>
-              <a:spcAft>
-                <a:spcPts val="200"/>
-              </a:spcAft>
-              <a:defRPr sz="1600">
-                <a:solidFill>
-                  <a:srgbClr val="595959"/>
-                </a:solidFill>
-                <a:latin typeface="Courier New"/>
-              </a:defRPr>
-            </a:pPr>
-          </a:p>
-          <a:p>
-            <a:pPr>
-              <a:spcAft>
-                <a:spcPts val="200"/>
-              </a:spcAft>
-              <a:defRPr sz="1600">
-                <a:solidFill>
-                  <a:srgbClr val="595959"/>
-                </a:solidFill>
-                <a:latin typeface="Courier New"/>
-              </a:defRPr>
-            </a:pPr>
-            <a:r>
-              <a:t># Perform calculations</a:t>
-            </a:r>
-          </a:p>
-          <a:p>
-            <a:pPr>
-              <a:spcAft>
-                <a:spcPts val="200"/>
-              </a:spcAft>
-              <a:defRPr sz="1600">
-                <a:solidFill>
-                  <a:srgbClr val="595959"/>
-                </a:solidFill>
-                <a:latin typeface="Courier New"/>
-              </a:defRPr>
-            </a:pPr>
-            <a:r>
-              <a:t>prices = [10, 20, 30, 40]</a:t>
-            </a:r>
-          </a:p>
-          <a:p>
-            <a:pPr>
-              <a:spcAft>
-                <a:spcPts val="200"/>
-              </a:spcAft>
-              <a:defRPr sz="1600">
-                <a:solidFill>
-                  <a:srgbClr val="595959"/>
-                </a:solidFill>
-                <a:latin typeface="Courier New"/>
-              </a:defRPr>
-            </a:pPr>
-            <a:r>
-              <a:t>with_tax = [price * 1.1 for price in prices]</a:t>
-            </a:r>
-          </a:p>
-          <a:p>
-            <a:pPr>
-              <a:spcAft>
-                <a:spcPts val="200"/>
-              </a:spcAft>
-              <a:defRPr sz="1600">
-                <a:solidFill>
-                  <a:srgbClr val="595959"/>
-                </a:solidFill>
-                <a:latin typeface="Courier New"/>
-              </a:defRPr>
-            </a:pPr>
-            <a:r>
-              <a:t>print(with_tax)  # [11.0, 22.0, 33.0, 44.0]</a:t>
-            </a:r>
-          </a:p>
-          <a:p>
-            <a:pPr>
-              <a:spcAft>
-                <a:spcPts val="200"/>
-              </a:spcAft>
-              <a:defRPr sz="1600">
-                <a:solidFill>
-                  <a:srgbClr val="595959"/>
-                </a:solidFill>
-                <a:latin typeface="Courier New"/>
-              </a:defRPr>
-            </a:pPr>
-          </a:p>
-          <a:p>
-            <a:pPr>
-              <a:spcAft>
-                <a:spcPts val="200"/>
-              </a:spcAft>
-              <a:defRPr sz="1600">
-                <a:solidFill>
-                  <a:srgbClr val="595959"/>
-                </a:solidFill>
-                <a:latin typeface="Courier New"/>
-              </a:defRPr>
-            </a:pPr>
-            <a:r>
-              <a:t># More concise than traditional loops!</a:t>
+              <a:defRPr sz="2000" b="1">
+                <a:solidFill>
+                  <a:srgbClr val="333333"/>
+                </a:solidFill>
+              </a:defRPr>
+            </a:pPr>
+            <a:r>
+              <a:t>Useful Functions</a:t>
             </a:r>
           </a:p>
         </p:txBody>
@@ -5139,14 +4295,6 @@
 <file path=ppt/slides/slide14.xml><?xml version="1.0" encoding="utf-8"?>
 <p:sld xmlns:a="http://schemas.openxmlformats.org/drawingml/2006/main" xmlns:p="http://schemas.openxmlformats.org/presentationml/2006/main" xmlns:r="http://schemas.openxmlformats.org/officeDocument/2006/relationships">
   <p:cSld>
-    <p:bg>
-      <p:bgPr>
-        <a:solidFill>
-          <a:srgbClr val="FFFFFF"/>
-        </a:solidFill>
-        <a:effectLst/>
-      </p:bgPr>
-    </p:bg>
     <p:spTree>
       <p:nvGrpSpPr>
         <p:cNvPr id="1" name=""/>
@@ -5163,13 +4311,13 @@
         <p:spPr>
           <a:xfrm>
             <a:off x="0" y="0"/>
-            <a:ext cx="9144000" cy="914400"/>
+            <a:ext cx="12191695" cy="6858000"/>
           </a:xfrm>
           <a:prstGeom prst="rect">
             <a:avLst/>
           </a:prstGeom>
           <a:solidFill>
-            <a:srgbClr val="29629B"/>
+            <a:srgbClr val="FFFFFF"/>
           </a:solidFill>
           <a:ln>
             <a:noFill/>
@@ -5199,95 +4347,23 @@
       </p:sp>
       <p:sp>
         <p:nvSpPr>
-          <p:cNvPr id="3" name="TextBox 2"/>
-          <p:cNvSpPr txBox="1"/>
-          <p:nvPr/>
-        </p:nvSpPr>
-        <p:spPr>
-          <a:xfrm>
-            <a:off x="457200" y="137160"/>
-            <a:ext cx="8229600" cy="640080"/>
-          </a:xfrm>
-          <a:prstGeom prst="rect">
-            <a:avLst/>
-          </a:prstGeom>
-          <a:noFill/>
-        </p:spPr>
-        <p:txBody>
-          <a:bodyPr wrap="none">
-            <a:spAutoFit/>
-          </a:bodyPr>
-          <a:lstStyle/>
-          <a:p>
-            <a:pPr>
-              <a:defRPr sz="4000" b="1">
-                <a:solidFill>
-                  <a:srgbClr val="FFFFFF"/>
-                </a:solidFill>
-              </a:defRPr>
-            </a:pPr>
-            <a:r>
-              <a:t>List Comprehensions with Conditions</a:t>
-            </a:r>
-          </a:p>
-        </p:txBody>
-      </p:sp>
-      <p:sp>
-        <p:nvSpPr>
-          <p:cNvPr id="4" name="TextBox 3"/>
-          <p:cNvSpPr txBox="1"/>
-          <p:nvPr/>
-        </p:nvSpPr>
-        <p:spPr>
-          <a:xfrm>
-            <a:off x="640080" y="1371600"/>
-            <a:ext cx="7863840" cy="914400"/>
-          </a:xfrm>
-          <a:prstGeom prst="rect">
-            <a:avLst/>
-          </a:prstGeom>
-          <a:noFill/>
-        </p:spPr>
-        <p:txBody>
-          <a:bodyPr wrap="square">
-            <a:spAutoFit/>
-          </a:bodyPr>
-          <a:lstStyle/>
-          <a:p>
-            <a:pPr>
-              <a:defRPr sz="1800">
-                <a:solidFill>
-                  <a:srgbClr val="595959"/>
-                </a:solidFill>
-              </a:defRPr>
-            </a:pPr>
-            <a:r>
-              <a:t>Filter items while creating lists</a:t>
-            </a:r>
-          </a:p>
-        </p:txBody>
-      </p:sp>
-      <p:sp>
-        <p:nvSpPr>
-          <p:cNvPr id="5" name="Rectangle 4"/>
+          <p:cNvPr id="3" name="Rectangle 2"/>
           <p:cNvSpPr/>
           <p:nvPr/>
         </p:nvSpPr>
         <p:spPr>
           <a:xfrm>
-            <a:off x="640080" y="2468880"/>
-            <a:ext cx="7863840" cy="4389120"/>
+            <a:off x="0" y="0"/>
+            <a:ext cx="12191695" cy="137160"/>
           </a:xfrm>
           <a:prstGeom prst="rect">
             <a:avLst/>
           </a:prstGeom>
           <a:solidFill>
-            <a:srgbClr val="F8F9FA"/>
+            <a:srgbClr val="0066CC"/>
           </a:solidFill>
-          <a:ln w="25400">
-            <a:solidFill>
-              <a:srgbClr val="6497CA"/>
-            </a:solidFill>
+          <a:ln>
+            <a:noFill/>
           </a:ln>
         </p:spPr>
         <p:style>
@@ -5314,14 +4390,14 @@
       </p:sp>
       <p:sp>
         <p:nvSpPr>
-          <p:cNvPr id="6" name="TextBox 5"/>
+          <p:cNvPr id="4" name="TextBox 3"/>
           <p:cNvSpPr txBox="1"/>
           <p:nvPr/>
         </p:nvSpPr>
         <p:spPr>
           <a:xfrm>
-            <a:off x="914400" y="2651760"/>
-            <a:ext cx="7315200" cy="4023359"/>
+            <a:off x="457200" y="365760"/>
+            <a:ext cx="10972800" cy="731520"/>
           </a:xfrm>
           <a:prstGeom prst="rect">
             <a:avLst/>
@@ -5335,262 +4411,155 @@
           <a:lstStyle/>
           <a:p>
             <a:pPr>
-              <a:spcAft>
-                <a:spcPts val="200"/>
-              </a:spcAft>
-              <a:defRPr sz="1600">
-                <a:solidFill>
-                  <a:srgbClr val="595959"/>
-                </a:solidFill>
-                <a:latin typeface="Courier New"/>
-              </a:defRPr>
-            </a:pPr>
-            <a:r>
-              <a:t># Filter with if condition</a:t>
-            </a:r>
-          </a:p>
+              <a:defRPr sz="4000" b="1">
+                <a:solidFill>
+                  <a:srgbClr val="003366"/>
+                </a:solidFill>
+              </a:defRPr>
+            </a:pPr>
+            <a:r>
+              <a:t>List Comprehensions</a:t>
+            </a:r>
+          </a:p>
+        </p:txBody>
+      </p:sp>
+      <p:sp>
+        <p:nvSpPr>
+          <p:cNvPr id="5" name="Rectangle 4"/>
+          <p:cNvSpPr/>
+          <p:nvPr/>
+        </p:nvSpPr>
+        <p:spPr>
+          <a:xfrm>
+            <a:off x="457200" y="1005840"/>
+            <a:ext cx="1828800" cy="45720"/>
+          </a:xfrm>
+          <a:prstGeom prst="rect">
+            <a:avLst/>
+          </a:prstGeom>
+          <a:solidFill>
+            <a:srgbClr val="0066CC"/>
+          </a:solidFill>
+          <a:ln>
+            <a:noFill/>
+          </a:ln>
+        </p:spPr>
+        <p:style>
+          <a:lnRef idx="1">
+            <a:schemeClr val="accent1"/>
+          </a:lnRef>
+          <a:fillRef idx="3">
+            <a:schemeClr val="accent1"/>
+          </a:fillRef>
+          <a:effectRef idx="2">
+            <a:schemeClr val="accent1"/>
+          </a:effectRef>
+          <a:fontRef idx="minor">
+            <a:schemeClr val="lt1"/>
+          </a:fontRef>
+        </p:style>
+        <p:txBody>
+          <a:bodyPr rtlCol="0" anchor="ctr"/>
+          <a:lstStyle/>
+          <a:p>
+            <a:pPr algn="ctr"/>
+          </a:p>
+        </p:txBody>
+      </p:sp>
+      <p:sp>
+        <p:nvSpPr>
+          <p:cNvPr id="6" name="TextBox 5"/>
+          <p:cNvSpPr txBox="1"/>
+          <p:nvPr/>
+        </p:nvSpPr>
+        <p:spPr>
+          <a:xfrm>
+            <a:off x="640080" y="1371600"/>
+            <a:ext cx="10789920" cy="4572000"/>
+          </a:xfrm>
+          <a:prstGeom prst="rect">
+            <a:avLst/>
+          </a:prstGeom>
+          <a:noFill/>
+        </p:spPr>
+        <p:txBody>
+          <a:bodyPr wrap="square">
+            <a:spAutoFit/>
+          </a:bodyPr>
+          <a:lstStyle/>
           <a:p>
             <a:pPr>
               <a:spcAft>
-                <a:spcPts val="200"/>
+                <a:spcPts val="800"/>
               </a:spcAft>
-              <a:defRPr sz="1600">
-                <a:solidFill>
-                  <a:srgbClr val="595959"/>
-                </a:solidFill>
-                <a:latin typeface="Courier New"/>
-              </a:defRPr>
-            </a:pPr>
-            <a:r>
-              <a:t>numbers = [1, 2, 3, 4, 5, 6, 7, 8, 9, 10]</a:t>
+              <a:defRPr sz="2000" b="1">
+                <a:solidFill>
+                  <a:srgbClr val="333333"/>
+                </a:solidFill>
+              </a:defRPr>
+            </a:pPr>
+            <a:r>
+              <a:t>Create lists in a single, elegant line</a:t>
             </a:r>
           </a:p>
           <a:p>
             <a:pPr>
               <a:spcAft>
-                <a:spcPts val="200"/>
+                <a:spcPts val="800"/>
               </a:spcAft>
-              <a:defRPr sz="1600">
-                <a:solidFill>
-                  <a:srgbClr val="595959"/>
-                </a:solidFill>
-                <a:latin typeface="Courier New"/>
-              </a:defRPr>
-            </a:pPr>
+              <a:defRPr sz="2000" b="1">
+                <a:solidFill>
+                  <a:srgbClr val="333333"/>
+                </a:solidFill>
+              </a:defRPr>
+            </a:pPr>
+            <a:r>
+              <a:t>Traditional Way</a:t>
+            </a:r>
           </a:p>
           <a:p>
             <a:pPr>
               <a:spcAft>
-                <a:spcPts val="200"/>
+                <a:spcPts val="800"/>
               </a:spcAft>
-              <a:defRPr sz="1600">
-                <a:solidFill>
-                  <a:srgbClr val="595959"/>
-                </a:solidFill>
-                <a:latin typeface="Courier New"/>
-              </a:defRPr>
-            </a:pPr>
-            <a:r>
-              <a:t># Only even numbers</a:t>
+              <a:defRPr sz="2000" b="1">
+                <a:solidFill>
+                  <a:srgbClr val="333333"/>
+                </a:solidFill>
+              </a:defRPr>
+            </a:pPr>
+            <a:r>
+              <a:t>List Comprehension Way</a:t>
             </a:r>
           </a:p>
           <a:p>
             <a:pPr>
               <a:spcAft>
-                <a:spcPts val="200"/>
+                <a:spcPts val="800"/>
               </a:spcAft>
-              <a:defRPr sz="1600">
-                <a:solidFill>
-                  <a:srgbClr val="595959"/>
-                </a:solidFill>
-                <a:latin typeface="Courier New"/>
-              </a:defRPr>
-            </a:pPr>
-            <a:r>
-              <a:t>evens = [x for x in numbers if x % 2 == 0]</a:t>
+              <a:defRPr sz="2000" b="1">
+                <a:solidFill>
+                  <a:srgbClr val="333333"/>
+                </a:solidFill>
+              </a:defRPr>
+            </a:pPr>
+            <a:r>
+              <a:t>With Condition</a:t>
             </a:r>
           </a:p>
           <a:p>
             <a:pPr>
               <a:spcAft>
-                <a:spcPts val="200"/>
+                <a:spcPts val="800"/>
               </a:spcAft>
-              <a:defRPr sz="1600">
-                <a:solidFill>
-                  <a:srgbClr val="595959"/>
-                </a:solidFill>
-                <a:latin typeface="Courier New"/>
-              </a:defRPr>
-            </a:pPr>
-            <a:r>
-              <a:t>print(evens)  # [2, 4, 6, 8, 10]</a:t>
-            </a:r>
-          </a:p>
-          <a:p>
-            <a:pPr>
-              <a:spcAft>
-                <a:spcPts val="200"/>
-              </a:spcAft>
-              <a:defRPr sz="1600">
-                <a:solidFill>
-                  <a:srgbClr val="595959"/>
-                </a:solidFill>
-                <a:latin typeface="Courier New"/>
-              </a:defRPr>
-            </a:pPr>
-          </a:p>
-          <a:p>
-            <a:pPr>
-              <a:spcAft>
-                <a:spcPts val="200"/>
-              </a:spcAft>
-              <a:defRPr sz="1600">
-                <a:solidFill>
-                  <a:srgbClr val="595959"/>
-                </a:solidFill>
-                <a:latin typeface="Courier New"/>
-              </a:defRPr>
-            </a:pPr>
-            <a:r>
-              <a:t># Only numbers &gt; 5</a:t>
-            </a:r>
-          </a:p>
-          <a:p>
-            <a:pPr>
-              <a:spcAft>
-                <a:spcPts val="200"/>
-              </a:spcAft>
-              <a:defRPr sz="1600">
-                <a:solidFill>
-                  <a:srgbClr val="595959"/>
-                </a:solidFill>
-                <a:latin typeface="Courier New"/>
-              </a:defRPr>
-            </a:pPr>
-            <a:r>
-              <a:t>large = [x for x in numbers if x &gt; 5]</a:t>
-            </a:r>
-          </a:p>
-          <a:p>
-            <a:pPr>
-              <a:spcAft>
-                <a:spcPts val="200"/>
-              </a:spcAft>
-              <a:defRPr sz="1600">
-                <a:solidFill>
-                  <a:srgbClr val="595959"/>
-                </a:solidFill>
-                <a:latin typeface="Courier New"/>
-              </a:defRPr>
-            </a:pPr>
-            <a:r>
-              <a:t>print(large)  # [6, 7, 8, 9, 10]</a:t>
-            </a:r>
-          </a:p>
-          <a:p>
-            <a:pPr>
-              <a:spcAft>
-                <a:spcPts val="200"/>
-              </a:spcAft>
-              <a:defRPr sz="1600">
-                <a:solidFill>
-                  <a:srgbClr val="595959"/>
-                </a:solidFill>
-                <a:latin typeface="Courier New"/>
-              </a:defRPr>
-            </a:pPr>
-          </a:p>
-          <a:p>
-            <a:pPr>
-              <a:spcAft>
-                <a:spcPts val="200"/>
-              </a:spcAft>
-              <a:defRPr sz="1600">
-                <a:solidFill>
-                  <a:srgbClr val="595959"/>
-                </a:solidFill>
-                <a:latin typeface="Courier New"/>
-              </a:defRPr>
-            </a:pPr>
-            <a:r>
-              <a:t># Transform AND filter</a:t>
-            </a:r>
-          </a:p>
-          <a:p>
-            <a:pPr>
-              <a:spcAft>
-                <a:spcPts val="200"/>
-              </a:spcAft>
-              <a:defRPr sz="1600">
-                <a:solidFill>
-                  <a:srgbClr val="595959"/>
-                </a:solidFill>
-                <a:latin typeface="Courier New"/>
-              </a:defRPr>
-            </a:pPr>
-            <a:r>
-              <a:t>doubled_evens = [x * 2 for x in numbers if x % 2 == 0]</a:t>
-            </a:r>
-          </a:p>
-          <a:p>
-            <a:pPr>
-              <a:spcAft>
-                <a:spcPts val="200"/>
-              </a:spcAft>
-              <a:defRPr sz="1600">
-                <a:solidFill>
-                  <a:srgbClr val="595959"/>
-                </a:solidFill>
-                <a:latin typeface="Courier New"/>
-              </a:defRPr>
-            </a:pPr>
-            <a:r>
-              <a:t>print(doubled_evens)  # [4, 8, 12, 16, 20]</a:t>
-            </a:r>
-          </a:p>
-          <a:p>
-            <a:pPr>
-              <a:spcAft>
-                <a:spcPts val="200"/>
-              </a:spcAft>
-              <a:defRPr sz="1600">
-                <a:solidFill>
-                  <a:srgbClr val="595959"/>
-                </a:solidFill>
-                <a:latin typeface="Courier New"/>
-              </a:defRPr>
-            </a:pPr>
-          </a:p>
-          <a:p>
-            <a:pPr>
-              <a:spcAft>
-                <a:spcPts val="200"/>
-              </a:spcAft>
-              <a:defRPr sz="1600">
-                <a:solidFill>
-                  <a:srgbClr val="595959"/>
-                </a:solidFill>
-                <a:latin typeface="Courier New"/>
-              </a:defRPr>
-            </a:pPr>
-            <a:r>
-              <a:t># Conditional expression</a:t>
-            </a:r>
-          </a:p>
-          <a:p>
-            <a:pPr>
-              <a:spcAft>
-                <a:spcPts val="200"/>
-              </a:spcAft>
-              <a:defRPr sz="1600">
-                <a:solidFill>
-                  <a:srgbClr val="595959"/>
-                </a:solidFill>
-                <a:latin typeface="Courier New"/>
-              </a:defRPr>
-            </a:pPr>
-            <a:r>
-              <a:t>labels = ['even' if x % 2 == 0 else 'odd' for x in numbers]</a:t>
+              <a:defRPr sz="2000" b="1">
+                <a:solidFill>
+                  <a:srgbClr val="333333"/>
+                </a:solidFill>
+              </a:defRPr>
+            </a:pPr>
+            <a:r>
+              <a:t>💡 Benefits:More concise, faster, and Pythonic!</a:t>
             </a:r>
           </a:p>
         </p:txBody>
@@ -5606,14 +4575,6 @@
 <file path=ppt/slides/slide15.xml><?xml version="1.0" encoding="utf-8"?>
 <p:sld xmlns:a="http://schemas.openxmlformats.org/drawingml/2006/main" xmlns:p="http://schemas.openxmlformats.org/presentationml/2006/main" xmlns:r="http://schemas.openxmlformats.org/officeDocument/2006/relationships">
   <p:cSld>
-    <p:bg>
-      <p:bgPr>
-        <a:solidFill>
-          <a:srgbClr val="FFFFFF"/>
-        </a:solidFill>
-        <a:effectLst/>
-      </p:bgPr>
-    </p:bg>
     <p:spTree>
       <p:nvGrpSpPr>
         <p:cNvPr id="1" name=""/>
@@ -5630,13 +4591,13 @@
         <p:spPr>
           <a:xfrm>
             <a:off x="0" y="0"/>
-            <a:ext cx="9144000" cy="914400"/>
+            <a:ext cx="12191695" cy="6858000"/>
           </a:xfrm>
           <a:prstGeom prst="rect">
             <a:avLst/>
           </a:prstGeom>
           <a:solidFill>
-            <a:srgbClr val="29629B"/>
+            <a:srgbClr val="FFFFFF"/>
           </a:solidFill>
           <a:ln>
             <a:noFill/>
@@ -5666,95 +4627,23 @@
       </p:sp>
       <p:sp>
         <p:nvSpPr>
-          <p:cNvPr id="3" name="TextBox 2"/>
-          <p:cNvSpPr txBox="1"/>
-          <p:nvPr/>
-        </p:nvSpPr>
-        <p:spPr>
-          <a:xfrm>
-            <a:off x="457200" y="137160"/>
-            <a:ext cx="8229600" cy="640080"/>
-          </a:xfrm>
-          <a:prstGeom prst="rect">
-            <a:avLst/>
-          </a:prstGeom>
-          <a:noFill/>
-        </p:spPr>
-        <p:txBody>
-          <a:bodyPr wrap="none">
-            <a:spAutoFit/>
-          </a:bodyPr>
-          <a:lstStyle/>
-          <a:p>
-            <a:pPr>
-              <a:defRPr sz="4000" b="1">
-                <a:solidFill>
-                  <a:srgbClr val="FFFFFF"/>
-                </a:solidFill>
-              </a:defRPr>
-            </a:pPr>
-            <a:r>
-              <a:t>Real-World Example: Grade Manager</a:t>
-            </a:r>
-          </a:p>
-        </p:txBody>
-      </p:sp>
-      <p:sp>
-        <p:nvSpPr>
-          <p:cNvPr id="4" name="TextBox 3"/>
-          <p:cNvSpPr txBox="1"/>
-          <p:nvPr/>
-        </p:nvSpPr>
-        <p:spPr>
-          <a:xfrm>
-            <a:off x="640080" y="1371600"/>
-            <a:ext cx="7863840" cy="914400"/>
-          </a:xfrm>
-          <a:prstGeom prst="rect">
-            <a:avLst/>
-          </a:prstGeom>
-          <a:noFill/>
-        </p:spPr>
-        <p:txBody>
-          <a:bodyPr wrap="square">
-            <a:spAutoFit/>
-          </a:bodyPr>
-          <a:lstStyle/>
-          <a:p>
-            <a:pPr>
-              <a:defRPr sz="1800">
-                <a:solidFill>
-                  <a:srgbClr val="595959"/>
-                </a:solidFill>
-              </a:defRPr>
-            </a:pPr>
-            <a:r>
-              <a:t>Managing student grades with lists</a:t>
-            </a:r>
-          </a:p>
-        </p:txBody>
-      </p:sp>
-      <p:sp>
-        <p:nvSpPr>
-          <p:cNvPr id="5" name="Rectangle 4"/>
+          <p:cNvPr id="3" name="Rectangle 2"/>
           <p:cNvSpPr/>
           <p:nvPr/>
         </p:nvSpPr>
         <p:spPr>
           <a:xfrm>
-            <a:off x="640080" y="2468880"/>
-            <a:ext cx="7863840" cy="4389120"/>
+            <a:off x="0" y="0"/>
+            <a:ext cx="12191695" cy="137160"/>
           </a:xfrm>
           <a:prstGeom prst="rect">
             <a:avLst/>
           </a:prstGeom>
           <a:solidFill>
-            <a:srgbClr val="F8F9FA"/>
+            <a:srgbClr val="0066CC"/>
           </a:solidFill>
-          <a:ln w="25400">
-            <a:solidFill>
-              <a:srgbClr val="6497CA"/>
-            </a:solidFill>
+          <a:ln>
+            <a:noFill/>
           </a:ln>
         </p:spPr>
         <p:style>
@@ -5781,14 +4670,14 @@
       </p:sp>
       <p:sp>
         <p:nvSpPr>
-          <p:cNvPr id="6" name="TextBox 5"/>
+          <p:cNvPr id="4" name="TextBox 3"/>
           <p:cNvSpPr txBox="1"/>
           <p:nvPr/>
         </p:nvSpPr>
         <p:spPr>
           <a:xfrm>
-            <a:off x="914400" y="2651760"/>
-            <a:ext cx="7315200" cy="4023359"/>
+            <a:off x="457200" y="365760"/>
+            <a:ext cx="10972800" cy="731520"/>
           </a:xfrm>
           <a:prstGeom prst="rect">
             <a:avLst/>
@@ -5802,327 +4691,58 @@
           <a:lstStyle/>
           <a:p>
             <a:pPr>
-              <a:spcAft>
-                <a:spcPts val="200"/>
-              </a:spcAft>
-              <a:defRPr sz="1600">
-                <a:solidFill>
-                  <a:srgbClr val="595959"/>
-                </a:solidFill>
-                <a:latin typeface="Courier New"/>
-              </a:defRPr>
-            </a:pPr>
-            <a:r>
-              <a:t># Grade management system</a:t>
-            </a:r>
-          </a:p>
-          <a:p>
-            <a:pPr>
-              <a:spcAft>
-                <a:spcPts val="200"/>
-              </a:spcAft>
-              <a:defRPr sz="1600">
-                <a:solidFill>
-                  <a:srgbClr val="595959"/>
-                </a:solidFill>
-                <a:latin typeface="Courier New"/>
-              </a:defRPr>
-            </a:pPr>
-            <a:r>
-              <a:t>grades = []</a:t>
-            </a:r>
-          </a:p>
-          <a:p>
-            <a:pPr>
-              <a:spcAft>
-                <a:spcPts val="200"/>
-              </a:spcAft>
-              <a:defRPr sz="1600">
-                <a:solidFill>
-                  <a:srgbClr val="595959"/>
-                </a:solidFill>
-                <a:latin typeface="Courier New"/>
-              </a:defRPr>
-            </a:pPr>
-          </a:p>
-          <a:p>
-            <a:pPr>
-              <a:spcAft>
-                <a:spcPts val="200"/>
-              </a:spcAft>
-              <a:defRPr sz="1600">
-                <a:solidFill>
-                  <a:srgbClr val="595959"/>
-                </a:solidFill>
-                <a:latin typeface="Courier New"/>
-              </a:defRPr>
-            </a:pPr>
-            <a:r>
-              <a:t># Add grades</a:t>
-            </a:r>
-          </a:p>
-          <a:p>
-            <a:pPr>
-              <a:spcAft>
-                <a:spcPts val="200"/>
-              </a:spcAft>
-              <a:defRPr sz="1600">
-                <a:solidFill>
-                  <a:srgbClr val="595959"/>
-                </a:solidFill>
-                <a:latin typeface="Courier New"/>
-              </a:defRPr>
-            </a:pPr>
-            <a:r>
-              <a:t>grades.append(85)</a:t>
-            </a:r>
-          </a:p>
-          <a:p>
-            <a:pPr>
-              <a:spcAft>
-                <a:spcPts val="200"/>
-              </a:spcAft>
-              <a:defRPr sz="1600">
-                <a:solidFill>
-                  <a:srgbClr val="595959"/>
-                </a:solidFill>
-                <a:latin typeface="Courier New"/>
-              </a:defRPr>
-            </a:pPr>
-            <a:r>
-              <a:t>grades.append(92)</a:t>
-            </a:r>
-          </a:p>
-          <a:p>
-            <a:pPr>
-              <a:spcAft>
-                <a:spcPts val="200"/>
-              </a:spcAft>
-              <a:defRPr sz="1600">
-                <a:solidFill>
-                  <a:srgbClr val="595959"/>
-                </a:solidFill>
-                <a:latin typeface="Courier New"/>
-              </a:defRPr>
-            </a:pPr>
-            <a:r>
-              <a:t>grades.append(78)</a:t>
-            </a:r>
-          </a:p>
-          <a:p>
-            <a:pPr>
-              <a:spcAft>
-                <a:spcPts val="200"/>
-              </a:spcAft>
-              <a:defRPr sz="1600">
-                <a:solidFill>
-                  <a:srgbClr val="595959"/>
-                </a:solidFill>
-                <a:latin typeface="Courier New"/>
-              </a:defRPr>
-            </a:pPr>
-            <a:r>
-              <a:t>grades.extend([88, 95, 72])</a:t>
-            </a:r>
-          </a:p>
-          <a:p>
-            <a:pPr>
-              <a:spcAft>
-                <a:spcPts val="200"/>
-              </a:spcAft>
-              <a:defRPr sz="1600">
-                <a:solidFill>
-                  <a:srgbClr val="595959"/>
-                </a:solidFill>
-                <a:latin typeface="Courier New"/>
-              </a:defRPr>
-            </a:pPr>
-          </a:p>
-          <a:p>
-            <a:pPr>
-              <a:spcAft>
-                <a:spcPts val="200"/>
-              </a:spcAft>
-              <a:defRPr sz="1600">
-                <a:solidFill>
-                  <a:srgbClr val="595959"/>
-                </a:solidFill>
-                <a:latin typeface="Courier New"/>
-              </a:defRPr>
-            </a:pPr>
-            <a:r>
-              <a:t># Calculate statistics</a:t>
-            </a:r>
-          </a:p>
-          <a:p>
-            <a:pPr>
-              <a:spcAft>
-                <a:spcPts val="200"/>
-              </a:spcAft>
-              <a:defRPr sz="1600">
-                <a:solidFill>
-                  <a:srgbClr val="595959"/>
-                </a:solidFill>
-                <a:latin typeface="Courier New"/>
-              </a:defRPr>
-            </a:pPr>
-            <a:r>
-              <a:t>average = sum(grades) / len(grades)</a:t>
-            </a:r>
-          </a:p>
-          <a:p>
-            <a:pPr>
-              <a:spcAft>
-                <a:spcPts val="200"/>
-              </a:spcAft>
-              <a:defRPr sz="1600">
-                <a:solidFill>
-                  <a:srgbClr val="595959"/>
-                </a:solidFill>
-                <a:latin typeface="Courier New"/>
-              </a:defRPr>
-            </a:pPr>
-            <a:r>
-              <a:t>highest = max(grades)</a:t>
-            </a:r>
-          </a:p>
-          <a:p>
-            <a:pPr>
-              <a:spcAft>
-                <a:spcPts val="200"/>
-              </a:spcAft>
-              <a:defRPr sz="1600">
-                <a:solidFill>
-                  <a:srgbClr val="595959"/>
-                </a:solidFill>
-                <a:latin typeface="Courier New"/>
-              </a:defRPr>
-            </a:pPr>
-            <a:r>
-              <a:t>lowest = min(grades)</a:t>
-            </a:r>
-          </a:p>
-          <a:p>
-            <a:pPr>
-              <a:spcAft>
-                <a:spcPts val="200"/>
-              </a:spcAft>
-              <a:defRPr sz="1600">
-                <a:solidFill>
-                  <a:srgbClr val="595959"/>
-                </a:solidFill>
-                <a:latin typeface="Courier New"/>
-              </a:defRPr>
-            </a:pPr>
-          </a:p>
-          <a:p>
-            <a:pPr>
-              <a:spcAft>
-                <a:spcPts val="200"/>
-              </a:spcAft>
-              <a:defRPr sz="1600">
-                <a:solidFill>
-                  <a:srgbClr val="595959"/>
-                </a:solidFill>
-                <a:latin typeface="Courier New"/>
-              </a:defRPr>
-            </a:pPr>
-            <a:r>
-              <a:t>print(f"Average: {average:.1f}")  # Average: 85.0</a:t>
-            </a:r>
-          </a:p>
-          <a:p>
-            <a:pPr>
-              <a:spcAft>
-                <a:spcPts val="200"/>
-              </a:spcAft>
-              <a:defRPr sz="1600">
-                <a:solidFill>
-                  <a:srgbClr val="595959"/>
-                </a:solidFill>
-                <a:latin typeface="Courier New"/>
-              </a:defRPr>
-            </a:pPr>
-            <a:r>
-              <a:t>print(f"Highest: {highest}")      # Highest: 95</a:t>
-            </a:r>
-          </a:p>
-          <a:p>
-            <a:pPr>
-              <a:spcAft>
-                <a:spcPts val="200"/>
-              </a:spcAft>
-              <a:defRPr sz="1600">
-                <a:solidFill>
-                  <a:srgbClr val="595959"/>
-                </a:solidFill>
-                <a:latin typeface="Courier New"/>
-              </a:defRPr>
-            </a:pPr>
-            <a:r>
-              <a:t>print(f"Lowest: {lowest}")        # Lowest: 72</a:t>
-            </a:r>
-          </a:p>
-          <a:p>
-            <a:pPr>
-              <a:spcAft>
-                <a:spcPts val="200"/>
-              </a:spcAft>
-              <a:defRPr sz="1600">
-                <a:solidFill>
-                  <a:srgbClr val="595959"/>
-                </a:solidFill>
-                <a:latin typeface="Courier New"/>
-              </a:defRPr>
-            </a:pPr>
-          </a:p>
-          <a:p>
-            <a:pPr>
-              <a:spcAft>
-                <a:spcPts val="200"/>
-              </a:spcAft>
-              <a:defRPr sz="1600">
-                <a:solidFill>
-                  <a:srgbClr val="595959"/>
-                </a:solidFill>
-                <a:latin typeface="Courier New"/>
-              </a:defRPr>
-            </a:pPr>
-            <a:r>
-              <a:t># Find grades above average</a:t>
-            </a:r>
-          </a:p>
-          <a:p>
-            <a:pPr>
-              <a:spcAft>
-                <a:spcPts val="200"/>
-              </a:spcAft>
-              <a:defRPr sz="1600">
-                <a:solidFill>
-                  <a:srgbClr val="595959"/>
-                </a:solidFill>
-                <a:latin typeface="Courier New"/>
-              </a:defRPr>
-            </a:pPr>
-            <a:r>
-              <a:t>above_avg = [g for g in grades if g &gt; average]</a:t>
-            </a:r>
-          </a:p>
-          <a:p>
-            <a:pPr>
-              <a:spcAft>
-                <a:spcPts val="200"/>
-              </a:spcAft>
-              <a:defRPr sz="1600">
-                <a:solidFill>
-                  <a:srgbClr val="595959"/>
-                </a:solidFill>
-                <a:latin typeface="Courier New"/>
-              </a:defRPr>
-            </a:pPr>
-            <a:r>
-              <a:t>print(f"Above average: {above_avg}")</a:t>
-            </a:r>
+              <a:defRPr sz="4000" b="1">
+                <a:solidFill>
+                  <a:srgbClr val="003366"/>
+                </a:solidFill>
+              </a:defRPr>
+            </a:pPr>
+            <a:r>
+              <a:t>Real-World: Grade Manager 📚</a:t>
+            </a:r>
+          </a:p>
+        </p:txBody>
+      </p:sp>
+      <p:sp>
+        <p:nvSpPr>
+          <p:cNvPr id="5" name="Rectangle 4"/>
+          <p:cNvSpPr/>
+          <p:nvPr/>
+        </p:nvSpPr>
+        <p:spPr>
+          <a:xfrm>
+            <a:off x="457200" y="1005840"/>
+            <a:ext cx="1828800" cy="45720"/>
+          </a:xfrm>
+          <a:prstGeom prst="rect">
+            <a:avLst/>
+          </a:prstGeom>
+          <a:solidFill>
+            <a:srgbClr val="0066CC"/>
+          </a:solidFill>
+          <a:ln>
+            <a:noFill/>
+          </a:ln>
+        </p:spPr>
+        <p:style>
+          <a:lnRef idx="1">
+            <a:schemeClr val="accent1"/>
+          </a:lnRef>
+          <a:fillRef idx="3">
+            <a:schemeClr val="accent1"/>
+          </a:fillRef>
+          <a:effectRef idx="2">
+            <a:schemeClr val="accent1"/>
+          </a:effectRef>
+          <a:fontRef idx="minor">
+            <a:schemeClr val="lt1"/>
+          </a:fontRef>
+        </p:style>
+        <p:txBody>
+          <a:bodyPr rtlCol="0" anchor="ctr"/>
+          <a:lstStyle/>
+          <a:p>
+            <a:pPr algn="ctr"/>
           </a:p>
         </p:txBody>
       </p:sp>
@@ -6137,14 +4757,6 @@
 <file path=ppt/slides/slide16.xml><?xml version="1.0" encoding="utf-8"?>
 <p:sld xmlns:a="http://schemas.openxmlformats.org/drawingml/2006/main" xmlns:p="http://schemas.openxmlformats.org/presentationml/2006/main" xmlns:r="http://schemas.openxmlformats.org/officeDocument/2006/relationships">
   <p:cSld>
-    <p:bg>
-      <p:bgPr>
-        <a:solidFill>
-          <a:srgbClr val="FFFFFF"/>
-        </a:solidFill>
-        <a:effectLst/>
-      </p:bgPr>
-    </p:bg>
     <p:spTree>
       <p:nvGrpSpPr>
         <p:cNvPr id="1" name=""/>
@@ -6161,13 +4773,13 @@
         <p:spPr>
           <a:xfrm>
             <a:off x="0" y="0"/>
-            <a:ext cx="9144000" cy="914400"/>
+            <a:ext cx="12191695" cy="6858000"/>
           </a:xfrm>
           <a:prstGeom prst="rect">
             <a:avLst/>
           </a:prstGeom>
           <a:solidFill>
-            <a:srgbClr val="29629B"/>
+            <a:srgbClr val="FFFFFF"/>
           </a:solidFill>
           <a:ln>
             <a:noFill/>
@@ -6197,95 +4809,23 @@
       </p:sp>
       <p:sp>
         <p:nvSpPr>
-          <p:cNvPr id="3" name="TextBox 2"/>
-          <p:cNvSpPr txBox="1"/>
-          <p:nvPr/>
-        </p:nvSpPr>
-        <p:spPr>
-          <a:xfrm>
-            <a:off x="457200" y="137160"/>
-            <a:ext cx="8229600" cy="640080"/>
-          </a:xfrm>
-          <a:prstGeom prst="rect">
-            <a:avLst/>
-          </a:prstGeom>
-          <a:noFill/>
-        </p:spPr>
-        <p:txBody>
-          <a:bodyPr wrap="none">
-            <a:spAutoFit/>
-          </a:bodyPr>
-          <a:lstStyle/>
-          <a:p>
-            <a:pPr>
-              <a:defRPr sz="4000" b="1">
-                <a:solidFill>
-                  <a:srgbClr val="FFFFFF"/>
-                </a:solidFill>
-              </a:defRPr>
-            </a:pPr>
-            <a:r>
-              <a:t>Real-World Example: Shopping Cart</a:t>
-            </a:r>
-          </a:p>
-        </p:txBody>
-      </p:sp>
-      <p:sp>
-        <p:nvSpPr>
-          <p:cNvPr id="4" name="TextBox 3"/>
-          <p:cNvSpPr txBox="1"/>
-          <p:nvPr/>
-        </p:nvSpPr>
-        <p:spPr>
-          <a:xfrm>
-            <a:off x="640080" y="1371600"/>
-            <a:ext cx="7863840" cy="914400"/>
-          </a:xfrm>
-          <a:prstGeom prst="rect">
-            <a:avLst/>
-          </a:prstGeom>
-          <a:noFill/>
-        </p:spPr>
-        <p:txBody>
-          <a:bodyPr wrap="square">
-            <a:spAutoFit/>
-          </a:bodyPr>
-          <a:lstStyle/>
-          <a:p>
-            <a:pPr>
-              <a:defRPr sz="1800">
-                <a:solidFill>
-                  <a:srgbClr val="595959"/>
-                </a:solidFill>
-              </a:defRPr>
-            </a:pPr>
-            <a:r>
-              <a:t>Building a shopping cart with lists</a:t>
-            </a:r>
-          </a:p>
-        </p:txBody>
-      </p:sp>
-      <p:sp>
-        <p:nvSpPr>
-          <p:cNvPr id="5" name="Rectangle 4"/>
+          <p:cNvPr id="3" name="Rectangle 2"/>
           <p:cNvSpPr/>
           <p:nvPr/>
         </p:nvSpPr>
         <p:spPr>
           <a:xfrm>
-            <a:off x="640080" y="2468880"/>
-            <a:ext cx="7863840" cy="4389120"/>
+            <a:off x="0" y="0"/>
+            <a:ext cx="12191695" cy="137160"/>
           </a:xfrm>
           <a:prstGeom prst="rect">
             <a:avLst/>
           </a:prstGeom>
           <a:solidFill>
-            <a:srgbClr val="F8F9FA"/>
+            <a:srgbClr val="0066CC"/>
           </a:solidFill>
-          <a:ln w="25400">
-            <a:solidFill>
-              <a:srgbClr val="6497CA"/>
-            </a:solidFill>
+          <a:ln>
+            <a:noFill/>
           </a:ln>
         </p:spPr>
         <p:style>
@@ -6312,14 +4852,14 @@
       </p:sp>
       <p:sp>
         <p:nvSpPr>
-          <p:cNvPr id="6" name="TextBox 5"/>
+          <p:cNvPr id="4" name="TextBox 3"/>
           <p:cNvSpPr txBox="1"/>
           <p:nvPr/>
         </p:nvSpPr>
         <p:spPr>
           <a:xfrm>
-            <a:off x="914400" y="2651760"/>
-            <a:ext cx="7315200" cy="4023359"/>
+            <a:off x="457200" y="365760"/>
+            <a:ext cx="10972800" cy="731520"/>
           </a:xfrm>
           <a:prstGeom prst="rect">
             <a:avLst/>
@@ -6333,279 +4873,58 @@
           <a:lstStyle/>
           <a:p>
             <a:pPr>
-              <a:spcAft>
-                <a:spcPts val="200"/>
-              </a:spcAft>
-              <a:defRPr sz="1600">
-                <a:solidFill>
-                  <a:srgbClr val="595959"/>
-                </a:solidFill>
-                <a:latin typeface="Courier New"/>
-              </a:defRPr>
-            </a:pPr>
-            <a:r>
-              <a:t># Shopping cart system</a:t>
-            </a:r>
-          </a:p>
-          <a:p>
-            <a:pPr>
-              <a:spcAft>
-                <a:spcPts val="200"/>
-              </a:spcAft>
-              <a:defRPr sz="1600">
-                <a:solidFill>
-                  <a:srgbClr val="595959"/>
-                </a:solidFill>
-                <a:latin typeface="Courier New"/>
-              </a:defRPr>
-            </a:pPr>
-            <a:r>
-              <a:t>cart = []</a:t>
-            </a:r>
-          </a:p>
-          <a:p>
-            <a:pPr>
-              <a:spcAft>
-                <a:spcPts val="200"/>
-              </a:spcAft>
-              <a:defRPr sz="1600">
-                <a:solidFill>
-                  <a:srgbClr val="595959"/>
-                </a:solidFill>
-                <a:latin typeface="Courier New"/>
-              </a:defRPr>
-            </a:pPr>
-          </a:p>
-          <a:p>
-            <a:pPr>
-              <a:spcAft>
-                <a:spcPts val="200"/>
-              </a:spcAft>
-              <a:defRPr sz="1600">
-                <a:solidFill>
-                  <a:srgbClr val="595959"/>
-                </a:solidFill>
-                <a:latin typeface="Courier New"/>
-              </a:defRPr>
-            </a:pPr>
-            <a:r>
-              <a:t># Add items</a:t>
-            </a:r>
-          </a:p>
-          <a:p>
-            <a:pPr>
-              <a:spcAft>
-                <a:spcPts val="200"/>
-              </a:spcAft>
-              <a:defRPr sz="1600">
-                <a:solidFill>
-                  <a:srgbClr val="595959"/>
-                </a:solidFill>
-                <a:latin typeface="Courier New"/>
-              </a:defRPr>
-            </a:pPr>
-            <a:r>
-              <a:t>cart.append({'name': 'Laptop', 'price': 999.99, 'qty': 1})</a:t>
-            </a:r>
-          </a:p>
-          <a:p>
-            <a:pPr>
-              <a:spcAft>
-                <a:spcPts val="200"/>
-              </a:spcAft>
-              <a:defRPr sz="1600">
-                <a:solidFill>
-                  <a:srgbClr val="595959"/>
-                </a:solidFill>
-                <a:latin typeface="Courier New"/>
-              </a:defRPr>
-            </a:pPr>
-            <a:r>
-              <a:t>cart.append({'name': 'Mouse', 'price': 29.99, 'qty': 2})</a:t>
-            </a:r>
-          </a:p>
-          <a:p>
-            <a:pPr>
-              <a:spcAft>
-                <a:spcPts val="200"/>
-              </a:spcAft>
-              <a:defRPr sz="1600">
-                <a:solidFill>
-                  <a:srgbClr val="595959"/>
-                </a:solidFill>
-                <a:latin typeface="Courier New"/>
-              </a:defRPr>
-            </a:pPr>
-            <a:r>
-              <a:t>cart.append({'name': 'Keyboard', 'price': 79.99, 'qty': 1})</a:t>
-            </a:r>
-          </a:p>
-          <a:p>
-            <a:pPr>
-              <a:spcAft>
-                <a:spcPts val="200"/>
-              </a:spcAft>
-              <a:defRPr sz="1600">
-                <a:solidFill>
-                  <a:srgbClr val="595959"/>
-                </a:solidFill>
-                <a:latin typeface="Courier New"/>
-              </a:defRPr>
-            </a:pPr>
-          </a:p>
-          <a:p>
-            <a:pPr>
-              <a:spcAft>
-                <a:spcPts val="200"/>
-              </a:spcAft>
-              <a:defRPr sz="1600">
-                <a:solidFill>
-                  <a:srgbClr val="595959"/>
-                </a:solidFill>
-                <a:latin typeface="Courier New"/>
-              </a:defRPr>
-            </a:pPr>
-            <a:r>
-              <a:t># Calculate total</a:t>
-            </a:r>
-          </a:p>
-          <a:p>
-            <a:pPr>
-              <a:spcAft>
-                <a:spcPts val="200"/>
-              </a:spcAft>
-              <a:defRPr sz="1600">
-                <a:solidFill>
-                  <a:srgbClr val="595959"/>
-                </a:solidFill>
-                <a:latin typeface="Courier New"/>
-              </a:defRPr>
-            </a:pPr>
-            <a:r>
-              <a:t>total = sum(item['price'] * item['qty'] for item in cart)</a:t>
-            </a:r>
-          </a:p>
-          <a:p>
-            <a:pPr>
-              <a:spcAft>
-                <a:spcPts val="200"/>
-              </a:spcAft>
-              <a:defRPr sz="1600">
-                <a:solidFill>
-                  <a:srgbClr val="595959"/>
-                </a:solidFill>
-                <a:latin typeface="Courier New"/>
-              </a:defRPr>
-            </a:pPr>
-            <a:r>
-              <a:t>print(f"Total: ${total:.2f}")  # Total: $1139.96</a:t>
-            </a:r>
-          </a:p>
-          <a:p>
-            <a:pPr>
-              <a:spcAft>
-                <a:spcPts val="200"/>
-              </a:spcAft>
-              <a:defRPr sz="1600">
-                <a:solidFill>
-                  <a:srgbClr val="595959"/>
-                </a:solidFill>
-                <a:latin typeface="Courier New"/>
-              </a:defRPr>
-            </a:pPr>
-          </a:p>
-          <a:p>
-            <a:pPr>
-              <a:spcAft>
-                <a:spcPts val="200"/>
-              </a:spcAft>
-              <a:defRPr sz="1600">
-                <a:solidFill>
-                  <a:srgbClr val="595959"/>
-                </a:solidFill>
-                <a:latin typeface="Courier New"/>
-              </a:defRPr>
-            </a:pPr>
-            <a:r>
-              <a:t># List all items</a:t>
-            </a:r>
-          </a:p>
-          <a:p>
-            <a:pPr>
-              <a:spcAft>
-                <a:spcPts val="200"/>
-              </a:spcAft>
-              <a:defRPr sz="1600">
-                <a:solidFill>
-                  <a:srgbClr val="595959"/>
-                </a:solidFill>
-                <a:latin typeface="Courier New"/>
-              </a:defRPr>
-            </a:pPr>
-            <a:r>
-              <a:t>for i, item in enumerate(cart, 1):</a:t>
-            </a:r>
-          </a:p>
-          <a:p>
-            <a:pPr>
-              <a:spcAft>
-                <a:spcPts val="200"/>
-              </a:spcAft>
-              <a:defRPr sz="1600">
-                <a:solidFill>
-                  <a:srgbClr val="595959"/>
-                </a:solidFill>
-                <a:latin typeface="Courier New"/>
-              </a:defRPr>
-            </a:pPr>
-            <a:r>
-              <a:t>    print(f"{i}. {item['name']} x{item['qty']} - ${item['price']}")</a:t>
-            </a:r>
-          </a:p>
-          <a:p>
-            <a:pPr>
-              <a:spcAft>
-                <a:spcPts val="200"/>
-              </a:spcAft>
-              <a:defRPr sz="1600">
-                <a:solidFill>
-                  <a:srgbClr val="595959"/>
-                </a:solidFill>
-                <a:latin typeface="Courier New"/>
-              </a:defRPr>
-            </a:pPr>
-          </a:p>
-          <a:p>
-            <a:pPr>
-              <a:spcAft>
-                <a:spcPts val="200"/>
-              </a:spcAft>
-              <a:defRPr sz="1600">
-                <a:solidFill>
-                  <a:srgbClr val="595959"/>
-                </a:solidFill>
-                <a:latin typeface="Courier New"/>
-              </a:defRPr>
-            </a:pPr>
-            <a:r>
-              <a:t># Remove item</a:t>
-            </a:r>
-          </a:p>
-          <a:p>
-            <a:pPr>
-              <a:spcAft>
-                <a:spcPts val="200"/>
-              </a:spcAft>
-              <a:defRPr sz="1600">
-                <a:solidFill>
-                  <a:srgbClr val="595959"/>
-                </a:solidFill>
-                <a:latin typeface="Courier New"/>
-              </a:defRPr>
-            </a:pPr>
-            <a:r>
-              <a:t>cart.pop(1)  # Remove mouse</a:t>
-            </a:r>
+              <a:defRPr sz="4000" b="1">
+                <a:solidFill>
+                  <a:srgbClr val="003366"/>
+                </a:solidFill>
+              </a:defRPr>
+            </a:pPr>
+            <a:r>
+              <a:t>Real-World: Shopping Cart</a:t>
+            </a:r>
+          </a:p>
+        </p:txBody>
+      </p:sp>
+      <p:sp>
+        <p:nvSpPr>
+          <p:cNvPr id="5" name="Rectangle 4"/>
+          <p:cNvSpPr/>
+          <p:nvPr/>
+        </p:nvSpPr>
+        <p:spPr>
+          <a:xfrm>
+            <a:off x="457200" y="1005840"/>
+            <a:ext cx="1828800" cy="45720"/>
+          </a:xfrm>
+          <a:prstGeom prst="rect">
+            <a:avLst/>
+          </a:prstGeom>
+          <a:solidFill>
+            <a:srgbClr val="0066CC"/>
+          </a:solidFill>
+          <a:ln>
+            <a:noFill/>
+          </a:ln>
+        </p:spPr>
+        <p:style>
+          <a:lnRef idx="1">
+            <a:schemeClr val="accent1"/>
+          </a:lnRef>
+          <a:fillRef idx="3">
+            <a:schemeClr val="accent1"/>
+          </a:fillRef>
+          <a:effectRef idx="2">
+            <a:schemeClr val="accent1"/>
+          </a:effectRef>
+          <a:fontRef idx="minor">
+            <a:schemeClr val="lt1"/>
+          </a:fontRef>
+        </p:style>
+        <p:txBody>
+          <a:bodyPr rtlCol="0" anchor="ctr"/>
+          <a:lstStyle/>
+          <a:p>
+            <a:pPr algn="ctr"/>
           </a:p>
         </p:txBody>
       </p:sp>
@@ -6620,14 +4939,6 @@
 <file path=ppt/slides/slide17.xml><?xml version="1.0" encoding="utf-8"?>
 <p:sld xmlns:a="http://schemas.openxmlformats.org/drawingml/2006/main" xmlns:p="http://schemas.openxmlformats.org/presentationml/2006/main" xmlns:r="http://schemas.openxmlformats.org/officeDocument/2006/relationships">
   <p:cSld>
-    <p:bg>
-      <p:bgPr>
-        <a:solidFill>
-          <a:srgbClr val="FFFFFF"/>
-        </a:solidFill>
-        <a:effectLst/>
-      </p:bgPr>
-    </p:bg>
     <p:spTree>
       <p:nvGrpSpPr>
         <p:cNvPr id="1" name=""/>
@@ -6644,13 +4955,13 @@
         <p:spPr>
           <a:xfrm>
             <a:off x="0" y="0"/>
-            <a:ext cx="9144000" cy="914400"/>
+            <a:ext cx="12191695" cy="6858000"/>
           </a:xfrm>
           <a:prstGeom prst="rect">
             <a:avLst/>
           </a:prstGeom>
           <a:solidFill>
-            <a:srgbClr val="29629B"/>
+            <a:srgbClr val="FFFFFF"/>
           </a:solidFill>
           <a:ln>
             <a:noFill/>
@@ -6680,14 +4991,57 @@
       </p:sp>
       <p:sp>
         <p:nvSpPr>
-          <p:cNvPr id="3" name="TextBox 2"/>
+          <p:cNvPr id="3" name="Rectangle 2"/>
+          <p:cNvSpPr/>
+          <p:nvPr/>
+        </p:nvSpPr>
+        <p:spPr>
+          <a:xfrm>
+            <a:off x="0" y="0"/>
+            <a:ext cx="12191695" cy="137160"/>
+          </a:xfrm>
+          <a:prstGeom prst="rect">
+            <a:avLst/>
+          </a:prstGeom>
+          <a:solidFill>
+            <a:srgbClr val="0066CC"/>
+          </a:solidFill>
+          <a:ln>
+            <a:noFill/>
+          </a:ln>
+        </p:spPr>
+        <p:style>
+          <a:lnRef idx="1">
+            <a:schemeClr val="accent1"/>
+          </a:lnRef>
+          <a:fillRef idx="3">
+            <a:schemeClr val="accent1"/>
+          </a:fillRef>
+          <a:effectRef idx="2">
+            <a:schemeClr val="accent1"/>
+          </a:effectRef>
+          <a:fontRef idx="minor">
+            <a:schemeClr val="lt1"/>
+          </a:fontRef>
+        </p:style>
+        <p:txBody>
+          <a:bodyPr rtlCol="0" anchor="ctr"/>
+          <a:lstStyle/>
+          <a:p>
+            <a:pPr algn="ctr"/>
+          </a:p>
+        </p:txBody>
+      </p:sp>
+      <p:sp>
+        <p:nvSpPr>
+          <p:cNvPr id="4" name="TextBox 3"/>
           <p:cNvSpPr txBox="1"/>
           <p:nvPr/>
         </p:nvSpPr>
         <p:spPr>
           <a:xfrm>
-            <a:off x="457200" y="137160"/>
-            <a:ext cx="8229600" cy="640080"/>
+            <a:off x="457200" y="365760"/>
+            <a:ext cx="10972800" cy="731520"/>
           </a:xfrm>
           <a:prstGeom prst="rect">
             <a:avLst/>
@@ -6703,26 +5057,69 @@
             <a:pPr>
               <a:defRPr sz="4000" b="1">
                 <a:solidFill>
-                  <a:srgbClr val="FFFFFF"/>
-                </a:solidFill>
-              </a:defRPr>
-            </a:pPr>
-            <a:r>
-              <a:t>Common Patterns and Best Practices</a:t>
-            </a:r>
-          </a:p>
-        </p:txBody>
-      </p:sp>
-      <p:sp>
-        <p:nvSpPr>
-          <p:cNvPr id="4" name="TextBox 3"/>
+                  <a:srgbClr val="003366"/>
+                </a:solidFill>
+              </a:defRPr>
+            </a:pPr>
+            <a:r>
+              <a:t>Common List Patterns 💡</a:t>
+            </a:r>
+          </a:p>
+        </p:txBody>
+      </p:sp>
+      <p:sp>
+        <p:nvSpPr>
+          <p:cNvPr id="5" name="Rectangle 4"/>
+          <p:cNvSpPr/>
+          <p:nvPr/>
+        </p:nvSpPr>
+        <p:spPr>
+          <a:xfrm>
+            <a:off x="457200" y="1005840"/>
+            <a:ext cx="1828800" cy="45720"/>
+          </a:xfrm>
+          <a:prstGeom prst="rect">
+            <a:avLst/>
+          </a:prstGeom>
+          <a:solidFill>
+            <a:srgbClr val="0066CC"/>
+          </a:solidFill>
+          <a:ln>
+            <a:noFill/>
+          </a:ln>
+        </p:spPr>
+        <p:style>
+          <a:lnRef idx="1">
+            <a:schemeClr val="accent1"/>
+          </a:lnRef>
+          <a:fillRef idx="3">
+            <a:schemeClr val="accent1"/>
+          </a:fillRef>
+          <a:effectRef idx="2">
+            <a:schemeClr val="accent1"/>
+          </a:effectRef>
+          <a:fontRef idx="minor">
+            <a:schemeClr val="lt1"/>
+          </a:fontRef>
+        </p:style>
+        <p:txBody>
+          <a:bodyPr rtlCol="0" anchor="ctr"/>
+          <a:lstStyle/>
+          <a:p>
+            <a:pPr algn="ctr"/>
+          </a:p>
+        </p:txBody>
+      </p:sp>
+      <p:sp>
+        <p:nvSpPr>
+          <p:cNvPr id="6" name="TextBox 5"/>
           <p:cNvSpPr txBox="1"/>
           <p:nvPr/>
         </p:nvSpPr>
         <p:spPr>
           <a:xfrm>
             <a:off x="640080" y="1371600"/>
-            <a:ext cx="7863840" cy="5029200"/>
+            <a:ext cx="10789920" cy="4572000"/>
           </a:xfrm>
           <a:prstGeom prst="rect">
             <a:avLst/>
@@ -6737,199 +5134,91 @@
           <a:p>
             <a:pPr>
               <a:spcAft>
-                <a:spcPts val="1200"/>
+                <a:spcPts val="800"/>
               </a:spcAft>
-              <a:defRPr sz="2000">
-                <a:solidFill>
-                  <a:srgbClr val="595959"/>
-                </a:solidFill>
-              </a:defRPr>
-            </a:pPr>
-            <a:r>
-              <a:t>Use list comprehensions for simple transformations</a:t>
+              <a:defRPr sz="2000" b="1">
+                <a:solidFill>
+                  <a:srgbClr val="333333"/>
+                </a:solidFill>
+              </a:defRPr>
+            </a:pPr>
+            <a:r>
+              <a:t>Copy a List</a:t>
             </a:r>
           </a:p>
           <a:p>
             <a:pPr>
               <a:spcAft>
-                <a:spcPts val="1200"/>
+                <a:spcPts val="800"/>
               </a:spcAft>
-              <a:defRPr sz="2000">
-                <a:solidFill>
-                  <a:srgbClr val="595959"/>
-                </a:solidFill>
-              </a:defRPr>
-            </a:pPr>
-            <a:r>
-              <a:t>• More readable and often faster than loops</a:t>
+              <a:defRPr sz="2000" b="1">
+                <a:solidFill>
+                  <a:srgbClr val="333333"/>
+                </a:solidFill>
+              </a:defRPr>
+            </a:pPr>
+            <a:r>
+              <a:t>Filter Items</a:t>
             </a:r>
           </a:p>
           <a:p>
             <a:pPr>
               <a:spcAft>
-                <a:spcPts val="1200"/>
+                <a:spcPts val="800"/>
               </a:spcAft>
-              <a:defRPr sz="2000">
-                <a:solidFill>
-                  <a:srgbClr val="595959"/>
-                </a:solidFill>
-              </a:defRPr>
-            </a:pPr>
+              <a:defRPr sz="2000" b="1">
+                <a:solidFill>
+                  <a:srgbClr val="333333"/>
+                </a:solidFill>
+              </a:defRPr>
+            </a:pPr>
+            <a:r>
+              <a:t>Transform Items</a:t>
+            </a:r>
           </a:p>
           <a:p>
             <a:pPr>
               <a:spcAft>
-                <a:spcPts val="1200"/>
+                <a:spcPts val="800"/>
               </a:spcAft>
-              <a:defRPr sz="2000">
-                <a:solidFill>
-                  <a:srgbClr val="595959"/>
-                </a:solidFill>
-              </a:defRPr>
-            </a:pPr>
-            <a:r>
-              <a:t>Check if list is empty: if my_list: or if not my_list:</a:t>
+              <a:defRPr sz="2000" b="1">
+                <a:solidFill>
+                  <a:srgbClr val="333333"/>
+                </a:solidFill>
+              </a:defRPr>
+            </a:pPr>
+            <a:r>
+              <a:t>Remove Duplicates</a:t>
             </a:r>
           </a:p>
           <a:p>
             <a:pPr>
               <a:spcAft>
-                <a:spcPts val="1200"/>
+                <a:spcPts val="800"/>
               </a:spcAft>
-              <a:defRPr sz="2000">
-                <a:solidFill>
-                  <a:srgbClr val="595959"/>
-                </a:solidFill>
-              </a:defRPr>
-            </a:pPr>
-            <a:r>
-              <a:t>• Pythonic way to check for empty lists</a:t>
+              <a:defRPr sz="2000" b="1">
+                <a:solidFill>
+                  <a:srgbClr val="333333"/>
+                </a:solidFill>
+              </a:defRPr>
+            </a:pPr>
+            <a:r>
+              <a:t>Check if Empty</a:t>
             </a:r>
           </a:p>
           <a:p>
             <a:pPr>
               <a:spcAft>
-                <a:spcPts val="1200"/>
+                <a:spcPts val="800"/>
               </a:spcAft>
-              <a:defRPr sz="2000">
-                <a:solidFill>
-                  <a:srgbClr val="595959"/>
-                </a:solidFill>
-              </a:defRPr>
-            </a:pPr>
-          </a:p>
-          <a:p>
-            <a:pPr>
-              <a:spcAft>
-                <a:spcPts val="1200"/>
-              </a:spcAft>
-              <a:defRPr sz="2000">
-                <a:solidFill>
-                  <a:srgbClr val="595959"/>
-                </a:solidFill>
-              </a:defRPr>
-            </a:pPr>
-            <a:r>
-              <a:t>Use enumerate() when you need both index and value</a:t>
-            </a:r>
-          </a:p>
-          <a:p>
-            <a:pPr>
-              <a:spcAft>
-                <a:spcPts val="1200"/>
-              </a:spcAft>
-              <a:defRPr sz="2000">
-                <a:solidFill>
-                  <a:srgbClr val="595959"/>
-                </a:solidFill>
-              </a:defRPr>
-            </a:pPr>
-            <a:r>
-              <a:t>• Better than range(len(list))</a:t>
-            </a:r>
-          </a:p>
-          <a:p>
-            <a:pPr>
-              <a:spcAft>
-                <a:spcPts val="1200"/>
-              </a:spcAft>
-              <a:defRPr sz="2000">
-                <a:solidFill>
-                  <a:srgbClr val="595959"/>
-                </a:solidFill>
-              </a:defRPr>
-            </a:pPr>
-          </a:p>
-          <a:p>
-            <a:pPr>
-              <a:spcAft>
-                <a:spcPts val="1200"/>
-              </a:spcAft>
-              <a:defRPr sz="2000">
-                <a:solidFill>
-                  <a:srgbClr val="595959"/>
-                </a:solidFill>
-              </a:defRPr>
-            </a:pPr>
-            <a:r>
-              <a:t>Make a copy with my_list.copy() or my_list[:]</a:t>
-            </a:r>
-          </a:p>
-          <a:p>
-            <a:pPr>
-              <a:spcAft>
-                <a:spcPts val="1200"/>
-              </a:spcAft>
-              <a:defRPr sz="2000">
-                <a:solidFill>
-                  <a:srgbClr val="595959"/>
-                </a:solidFill>
-              </a:defRPr>
-            </a:pPr>
-            <a:r>
-              <a:t>• Avoid unexpected modifications to original list</a:t>
-            </a:r>
-          </a:p>
-          <a:p>
-            <a:pPr>
-              <a:spcAft>
-                <a:spcPts val="1200"/>
-              </a:spcAft>
-              <a:defRPr sz="2000">
-                <a:solidFill>
-                  <a:srgbClr val="595959"/>
-                </a:solidFill>
-              </a:defRPr>
-            </a:pPr>
-          </a:p>
-          <a:p>
-            <a:pPr>
-              <a:spcAft>
-                <a:spcPts val="1200"/>
-              </a:spcAft>
-              <a:defRPr sz="2000">
-                <a:solidFill>
-                  <a:srgbClr val="595959"/>
-                </a:solidFill>
-              </a:defRPr>
-            </a:pPr>
-            <a:r>
-              <a:t>Use in operator for membership testing</a:t>
-            </a:r>
-          </a:p>
-          <a:p>
-            <a:pPr>
-              <a:spcAft>
-                <a:spcPts val="1200"/>
-              </a:spcAft>
-              <a:defRPr sz="2000">
-                <a:solidFill>
-                  <a:srgbClr val="595959"/>
-                </a:solidFill>
-              </a:defRPr>
-            </a:pPr>
-            <a:r>
-              <a:t>• Clear and efficient: if item in my_list:</a:t>
+              <a:defRPr sz="2000" b="1">
+                <a:solidFill>
+                  <a:srgbClr val="333333"/>
+                </a:solidFill>
+              </a:defRPr>
+            </a:pPr>
+            <a:r>
+              <a:t>Join to String</a:t>
             </a:r>
           </a:p>
         </p:txBody>
@@ -6945,14 +5234,6 @@
 <file path=ppt/slides/slide18.xml><?xml version="1.0" encoding="utf-8"?>
 <p:sld xmlns:a="http://schemas.openxmlformats.org/drawingml/2006/main" xmlns:p="http://schemas.openxmlformats.org/presentationml/2006/main" xmlns:r="http://schemas.openxmlformats.org/officeDocument/2006/relationships">
   <p:cSld>
-    <p:bg>
-      <p:bgPr>
-        <a:solidFill>
-          <a:srgbClr val="FFFFFF"/>
-        </a:solidFill>
-        <a:effectLst/>
-      </p:bgPr>
-    </p:bg>
     <p:spTree>
       <p:nvGrpSpPr>
         <p:cNvPr id="1" name=""/>
@@ -6969,13 +5250,13 @@
         <p:spPr>
           <a:xfrm>
             <a:off x="0" y="0"/>
-            <a:ext cx="9144000" cy="914400"/>
+            <a:ext cx="12191695" cy="6858000"/>
           </a:xfrm>
           <a:prstGeom prst="rect">
             <a:avLst/>
           </a:prstGeom>
           <a:solidFill>
-            <a:srgbClr val="29629B"/>
+            <a:srgbClr val="0066CC"/>
           </a:solidFill>
           <a:ln>
             <a:noFill/>
@@ -7011,8 +5292,8 @@
         </p:nvSpPr>
         <p:spPr>
           <a:xfrm>
-            <a:off x="457200" y="137160"/>
-            <a:ext cx="8229600" cy="640080"/>
+            <a:off x="914400" y="2286000"/>
+            <a:ext cx="10360152" cy="1371600"/>
           </a:xfrm>
           <a:prstGeom prst="rect">
             <a:avLst/>
@@ -7025,15 +5306,15 @@
           </a:bodyPr>
           <a:lstStyle/>
           <a:p>
-            <a:pPr>
-              <a:defRPr sz="4000" b="1">
+            <a:pPr algn="ctr">
+              <a:defRPr sz="4800" b="1">
                 <a:solidFill>
                   <a:srgbClr val="FFFFFF"/>
                 </a:solidFill>
               </a:defRPr>
             </a:pPr>
             <a:r>
-              <a:t>When to Use Lists</a:t>
+              <a:t>Best Practices ⭐</a:t>
             </a:r>
           </a:p>
         </p:txBody>
@@ -7046,8 +5327,8 @@
         </p:nvSpPr>
         <p:spPr>
           <a:xfrm>
-            <a:off x="640080" y="1371600"/>
-            <a:ext cx="7863840" cy="5029200"/>
+            <a:off x="914400" y="3840480"/>
+            <a:ext cx="10360152" cy="914400"/>
           </a:xfrm>
           <a:prstGeom prst="rect">
             <a:avLst/>
@@ -7055,197 +5336,20 @@
           <a:noFill/>
         </p:spPr>
         <p:txBody>
-          <a:bodyPr wrap="square">
+          <a:bodyPr wrap="none">
             <a:spAutoFit/>
           </a:bodyPr>
           <a:lstStyle/>
           <a:p>
-            <a:pPr>
-              <a:spcAft>
-                <a:spcPts val="1200"/>
-              </a:spcAft>
-              <a:defRPr sz="2000">
-                <a:solidFill>
-                  <a:srgbClr val="595959"/>
-                </a:solidFill>
-              </a:defRPr>
-            </a:pPr>
-            <a:r>
-              <a:t>Perfect for:</a:t>
-            </a:r>
-          </a:p>
-          <a:p>
-            <a:pPr>
-              <a:spcAft>
-                <a:spcPts val="1200"/>
-              </a:spcAft>
-              <a:defRPr sz="2000">
-                <a:solidFill>
-                  <a:srgbClr val="595959"/>
-                </a:solidFill>
-              </a:defRPr>
-            </a:pPr>
-            <a:r>
-              <a:t>• Ordered collections where sequence matters</a:t>
-            </a:r>
-          </a:p>
-          <a:p>
-            <a:pPr>
-              <a:spcAft>
-                <a:spcPts val="1200"/>
-              </a:spcAft>
-              <a:defRPr sz="2000">
-                <a:solidFill>
-                  <a:srgbClr val="595959"/>
-                </a:solidFill>
-              </a:defRPr>
-            </a:pPr>
-            <a:r>
-              <a:t>• Collections that need to change (add/remove items)</a:t>
-            </a:r>
-          </a:p>
-          <a:p>
-            <a:pPr>
-              <a:spcAft>
-                <a:spcPts val="1200"/>
-              </a:spcAft>
-              <a:defRPr sz="2000">
-                <a:solidFill>
-                  <a:srgbClr val="595959"/>
-                </a:solidFill>
-              </a:defRPr>
-            </a:pPr>
-            <a:r>
-              <a:t>• Items that may contain duplicates</a:t>
-            </a:r>
-          </a:p>
-          <a:p>
-            <a:pPr>
-              <a:spcAft>
-                <a:spcPts val="1200"/>
-              </a:spcAft>
-              <a:defRPr sz="2000">
-                <a:solidFill>
-                  <a:srgbClr val="595959"/>
-                </a:solidFill>
-              </a:defRPr>
-            </a:pPr>
-            <a:r>
-              <a:t>• Storing similar items (homogeneous data)</a:t>
-            </a:r>
-          </a:p>
-          <a:p>
-            <a:pPr>
-              <a:spcAft>
-                <a:spcPts val="1200"/>
-              </a:spcAft>
-              <a:defRPr sz="2000">
-                <a:solidFill>
-                  <a:srgbClr val="595959"/>
-                </a:solidFill>
-              </a:defRPr>
-            </a:pPr>
-          </a:p>
-          <a:p>
-            <a:pPr>
-              <a:spcAft>
-                <a:spcPts val="1200"/>
-              </a:spcAft>
-              <a:defRPr sz="2000">
-                <a:solidFill>
-                  <a:srgbClr val="595959"/>
-                </a:solidFill>
-              </a:defRPr>
-            </a:pPr>
-            <a:r>
-              <a:t>Consider alternatives when:</a:t>
-            </a:r>
-          </a:p>
-          <a:p>
-            <a:pPr>
-              <a:spcAft>
-                <a:spcPts val="1200"/>
-              </a:spcAft>
-              <a:defRPr sz="2000">
-                <a:solidFill>
-                  <a:srgbClr val="595959"/>
-                </a:solidFill>
-              </a:defRPr>
-            </a:pPr>
-            <a:r>
-              <a:t>• You need unique items only → use sets</a:t>
-            </a:r>
-          </a:p>
-          <a:p>
-            <a:pPr>
-              <a:spcAft>
-                <a:spcPts val="1200"/>
-              </a:spcAft>
-              <a:defRPr sz="2000">
-                <a:solidFill>
-                  <a:srgbClr val="595959"/>
-                </a:solidFill>
-              </a:defRPr>
-            </a:pPr>
-            <a:r>
-              <a:t>• You need key-value pairs → use dictionaries</a:t>
-            </a:r>
-          </a:p>
-          <a:p>
-            <a:pPr>
-              <a:spcAft>
-                <a:spcPts val="1200"/>
-              </a:spcAft>
-              <a:defRPr sz="2000">
-                <a:solidFill>
-                  <a:srgbClr val="595959"/>
-                </a:solidFill>
-              </a:defRPr>
-            </a:pPr>
-            <a:r>
-              <a:t>• Data should not change → use tuples</a:t>
-            </a:r>
-          </a:p>
-          <a:p>
-            <a:pPr>
-              <a:spcAft>
-                <a:spcPts val="1200"/>
-              </a:spcAft>
-              <a:defRPr sz="2000">
-                <a:solidFill>
-                  <a:srgbClr val="595959"/>
-                </a:solidFill>
-              </a:defRPr>
-            </a:pPr>
-            <a:r>
-              <a:t>• You need fast lookups by value → use sets/dicts</a:t>
-            </a:r>
-          </a:p>
-          <a:p>
-            <a:pPr>
-              <a:spcAft>
-                <a:spcPts val="1200"/>
-              </a:spcAft>
-              <a:defRPr sz="2000">
-                <a:solidFill>
-                  <a:srgbClr val="595959"/>
-                </a:solidFill>
-              </a:defRPr>
-            </a:pPr>
-          </a:p>
-          <a:p>
-            <a:pPr>
-              <a:spcAft>
-                <a:spcPts val="1200"/>
-              </a:spcAft>
-              <a:defRPr sz="2000">
-                <a:solidFill>
-                  <a:srgbClr val="595959"/>
-                </a:solidFill>
-              </a:defRPr>
-            </a:pPr>
-            <a:r>
-              <a:t>Lists are versatile and often the right choice!</a:t>
+            <a:pPr algn="ctr">
+              <a:defRPr sz="2400">
+                <a:solidFill>
+                  <a:srgbClr val="FFFFFF"/>
+                </a:solidFill>
+              </a:defRPr>
+            </a:pPr>
+            <a:r>
+              <a:t>✓ DO</a:t>
             </a:r>
           </a:p>
         </p:txBody>
@@ -7261,14 +5365,6 @@
 <file path=ppt/slides/slide19.xml><?xml version="1.0" encoding="utf-8"?>
 <p:sld xmlns:a="http://schemas.openxmlformats.org/drawingml/2006/main" xmlns:p="http://schemas.openxmlformats.org/presentationml/2006/main" xmlns:r="http://schemas.openxmlformats.org/officeDocument/2006/relationships">
   <p:cSld>
-    <p:bg>
-      <p:bgPr>
-        <a:solidFill>
-          <a:srgbClr val="29629B"/>
-        </a:solidFill>
-        <a:effectLst/>
-      </p:bgPr>
-    </p:bg>
     <p:spTree>
       <p:nvGrpSpPr>
         <p:cNvPr id="1" name=""/>
@@ -7278,14 +5374,57 @@
       <p:grpSpPr/>
       <p:sp>
         <p:nvSpPr>
-          <p:cNvPr id="2" name="TextBox 1"/>
+          <p:cNvPr id="2" name="Rectangle 1"/>
+          <p:cNvSpPr/>
+          <p:nvPr/>
+        </p:nvSpPr>
+        <p:spPr>
+          <a:xfrm>
+            <a:off x="0" y="0"/>
+            <a:ext cx="12191695" cy="6858000"/>
+          </a:xfrm>
+          <a:prstGeom prst="rect">
+            <a:avLst/>
+          </a:prstGeom>
+          <a:solidFill>
+            <a:srgbClr val="F0F8FF"/>
+          </a:solidFill>
+          <a:ln>
+            <a:noFill/>
+          </a:ln>
+        </p:spPr>
+        <p:style>
+          <a:lnRef idx="1">
+            <a:schemeClr val="accent1"/>
+          </a:lnRef>
+          <a:fillRef idx="3">
+            <a:schemeClr val="accent1"/>
+          </a:fillRef>
+          <a:effectRef idx="2">
+            <a:schemeClr val="accent1"/>
+          </a:effectRef>
+          <a:fontRef idx="minor">
+            <a:schemeClr val="lt1"/>
+          </a:fontRef>
+        </p:style>
+        <p:txBody>
+          <a:bodyPr rtlCol="0" anchor="ctr"/>
+          <a:lstStyle/>
+          <a:p>
+            <a:pPr algn="ctr"/>
+          </a:p>
+        </p:txBody>
+      </p:sp>
+      <p:sp>
+        <p:nvSpPr>
+          <p:cNvPr id="3" name="TextBox 2"/>
           <p:cNvSpPr txBox="1"/>
           <p:nvPr/>
         </p:nvSpPr>
         <p:spPr>
           <a:xfrm>
             <a:off x="914400" y="1828800"/>
-            <a:ext cx="7315200" cy="1097280"/>
+            <a:ext cx="10360152" cy="1371600"/>
           </a:xfrm>
           <a:prstGeom prst="rect">
             <a:avLst/>
@@ -7299,28 +5438,28 @@
           <a:lstStyle/>
           <a:p>
             <a:pPr algn="ctr">
-              <a:defRPr sz="6000" b="1">
-                <a:solidFill>
-                  <a:srgbClr val="FFFFFF"/>
-                </a:solidFill>
-              </a:defRPr>
-            </a:pPr>
-            <a:r>
-              <a:t>Practice Time!</a:t>
-            </a:r>
-          </a:p>
-        </p:txBody>
-      </p:sp>
-      <p:sp>
-        <p:nvSpPr>
-          <p:cNvPr id="3" name="TextBox 2"/>
+              <a:defRPr sz="5400" b="1">
+                <a:solidFill>
+                  <a:srgbClr val="003366"/>
+                </a:solidFill>
+              </a:defRPr>
+            </a:pPr>
+            <a:r>
+              <a:t>Time to Practice!</a:t>
+            </a:r>
+          </a:p>
+        </p:txBody>
+      </p:sp>
+      <p:sp>
+        <p:nvSpPr>
+          <p:cNvPr id="4" name="TextBox 3"/>
           <p:cNvSpPr txBox="1"/>
           <p:nvPr/>
         </p:nvSpPr>
         <p:spPr>
           <a:xfrm>
-            <a:off x="914400" y="3200400"/>
-            <a:ext cx="7315200" cy="1828800"/>
+            <a:off x="914400" y="3657600"/>
+            <a:ext cx="10360152" cy="548640"/>
           </a:xfrm>
           <a:prstGeom prst="rect">
             <a:avLst/>
@@ -7328,53 +5467,55 @@
           <a:noFill/>
         </p:spPr>
         <p:txBody>
-          <a:bodyPr wrap="square">
+          <a:bodyPr wrap="none">
             <a:spAutoFit/>
           </a:bodyPr>
           <a:lstStyle/>
           <a:p>
             <a:pPr algn="ctr">
-              <a:spcAft>
-                <a:spcPts val="1000"/>
-              </a:spcAft>
-              <a:defRPr sz="2600">
-                <a:solidFill>
-                  <a:srgbClr val="ADCCEB"/>
-                </a:solidFill>
-              </a:defRPr>
-            </a:pPr>
-            <a:r>
-              <a:t>Try the exercises in your practice notebook</a:t>
-            </a:r>
-          </a:p>
+              <a:defRPr sz="2800">
+                <a:solidFill>
+                  <a:srgbClr val="4682B4"/>
+                </a:solidFill>
+              </a:defRPr>
+            </a:pPr>
+            <a:r>
+              <a:t>Open the practice notebook and master lists</a:t>
+            </a:r>
+          </a:p>
+        </p:txBody>
+      </p:sp>
+      <p:sp>
+        <p:nvSpPr>
+          <p:cNvPr id="5" name="TextBox 4"/>
+          <p:cNvSpPr txBox="1"/>
+          <p:nvPr/>
+        </p:nvSpPr>
+        <p:spPr>
+          <a:xfrm>
+            <a:off x="914400" y="4297680"/>
+            <a:ext cx="10360152" cy="548640"/>
+          </a:xfrm>
+          <a:prstGeom prst="rect">
+            <a:avLst/>
+          </a:prstGeom>
+          <a:noFill/>
+        </p:spPr>
+        <p:txBody>
+          <a:bodyPr wrap="none">
+            <a:spAutoFit/>
+          </a:bodyPr>
+          <a:lstStyle/>
           <a:p>
             <a:pPr algn="ctr">
-              <a:spcAft>
-                <a:spcPts val="1000"/>
-              </a:spcAft>
-              <a:defRPr sz="2600">
-                <a:solidFill>
-                  <a:srgbClr val="ADCCEB"/>
-                </a:solidFill>
-              </a:defRPr>
-            </a:pPr>
-            <a:r>
-              <a:t>Experiment with different list operations</a:t>
-            </a:r>
-          </a:p>
-          <a:p>
-            <a:pPr algn="ctr">
-              <a:spcAft>
-                <a:spcPts val="1000"/>
-              </a:spcAft>
-              <a:defRPr sz="2600">
-                <a:solidFill>
-                  <a:srgbClr val="ADCCEB"/>
-                </a:solidFill>
-              </a:defRPr>
-            </a:pPr>
-            <a:r>
-              <a:t>Build something creative!</a:t>
+              <a:defRPr sz="2800">
+                <a:solidFill>
+                  <a:srgbClr val="4682B4"/>
+                </a:solidFill>
+              </a:defRPr>
+            </a:pPr>
+            <a:r>
+              <a:t>Lists are powerful - let's build amazing things!</a:t>
             </a:r>
           </a:p>
         </p:txBody>
@@ -7390,14 +5531,6 @@
 <file path=ppt/slides/slide2.xml><?xml version="1.0" encoding="utf-8"?>
 <p:sld xmlns:a="http://schemas.openxmlformats.org/drawingml/2006/main" xmlns:p="http://schemas.openxmlformats.org/presentationml/2006/main" xmlns:r="http://schemas.openxmlformats.org/officeDocument/2006/relationships">
   <p:cSld>
-    <p:bg>
-      <p:bgPr>
-        <a:solidFill>
-          <a:srgbClr val="FFFFFF"/>
-        </a:solidFill>
-        <a:effectLst/>
-      </p:bgPr>
-    </p:bg>
     <p:spTree>
       <p:nvGrpSpPr>
         <p:cNvPr id="1" name=""/>
@@ -7414,13 +5547,13 @@
         <p:spPr>
           <a:xfrm>
             <a:off x="0" y="0"/>
-            <a:ext cx="9144000" cy="914400"/>
+            <a:ext cx="12191695" cy="6858000"/>
           </a:xfrm>
           <a:prstGeom prst="rect">
             <a:avLst/>
           </a:prstGeom>
           <a:solidFill>
-            <a:srgbClr val="29629B"/>
+            <a:srgbClr val="FFFFFF"/>
           </a:solidFill>
           <a:ln>
             <a:noFill/>
@@ -7450,14 +5583,57 @@
       </p:sp>
       <p:sp>
         <p:nvSpPr>
-          <p:cNvPr id="3" name="TextBox 2"/>
+          <p:cNvPr id="3" name="Rectangle 2"/>
+          <p:cNvSpPr/>
+          <p:nvPr/>
+        </p:nvSpPr>
+        <p:spPr>
+          <a:xfrm>
+            <a:off x="0" y="0"/>
+            <a:ext cx="12191695" cy="137160"/>
+          </a:xfrm>
+          <a:prstGeom prst="rect">
+            <a:avLst/>
+          </a:prstGeom>
+          <a:solidFill>
+            <a:srgbClr val="0066CC"/>
+          </a:solidFill>
+          <a:ln>
+            <a:noFill/>
+          </a:ln>
+        </p:spPr>
+        <p:style>
+          <a:lnRef idx="1">
+            <a:schemeClr val="accent1"/>
+          </a:lnRef>
+          <a:fillRef idx="3">
+            <a:schemeClr val="accent1"/>
+          </a:fillRef>
+          <a:effectRef idx="2">
+            <a:schemeClr val="accent1"/>
+          </a:effectRef>
+          <a:fontRef idx="minor">
+            <a:schemeClr val="lt1"/>
+          </a:fontRef>
+        </p:style>
+        <p:txBody>
+          <a:bodyPr rtlCol="0" anchor="ctr"/>
+          <a:lstStyle/>
+          <a:p>
+            <a:pPr algn="ctr"/>
+          </a:p>
+        </p:txBody>
+      </p:sp>
+      <p:sp>
+        <p:nvSpPr>
+          <p:cNvPr id="4" name="TextBox 3"/>
           <p:cNvSpPr txBox="1"/>
           <p:nvPr/>
         </p:nvSpPr>
         <p:spPr>
           <a:xfrm>
-            <a:off x="457200" y="137160"/>
-            <a:ext cx="8229600" cy="640080"/>
+            <a:off x="457200" y="365760"/>
+            <a:ext cx="10972800" cy="731520"/>
           </a:xfrm>
           <a:prstGeom prst="rect">
             <a:avLst/>
@@ -7473,26 +5649,69 @@
             <a:pPr>
               <a:defRPr sz="4000" b="1">
                 <a:solidFill>
-                  <a:srgbClr val="FFFFFF"/>
-                </a:solidFill>
-              </a:defRPr>
-            </a:pPr>
-            <a:r>
-              <a:t>What Are Lists?</a:t>
-            </a:r>
-          </a:p>
-        </p:txBody>
-      </p:sp>
-      <p:sp>
-        <p:nvSpPr>
-          <p:cNvPr id="4" name="TextBox 3"/>
+                  <a:srgbClr val="003366"/>
+                </a:solidFill>
+              </a:defRPr>
+            </a:pPr>
+            <a:r>
+              <a:t>What Are Lists? 📋</a:t>
+            </a:r>
+          </a:p>
+        </p:txBody>
+      </p:sp>
+      <p:sp>
+        <p:nvSpPr>
+          <p:cNvPr id="5" name="Rectangle 4"/>
+          <p:cNvSpPr/>
+          <p:nvPr/>
+        </p:nvSpPr>
+        <p:spPr>
+          <a:xfrm>
+            <a:off x="457200" y="1005840"/>
+            <a:ext cx="1828800" cy="45720"/>
+          </a:xfrm>
+          <a:prstGeom prst="rect">
+            <a:avLst/>
+          </a:prstGeom>
+          <a:solidFill>
+            <a:srgbClr val="0066CC"/>
+          </a:solidFill>
+          <a:ln>
+            <a:noFill/>
+          </a:ln>
+        </p:spPr>
+        <p:style>
+          <a:lnRef idx="1">
+            <a:schemeClr val="accent1"/>
+          </a:lnRef>
+          <a:fillRef idx="3">
+            <a:schemeClr val="accent1"/>
+          </a:fillRef>
+          <a:effectRef idx="2">
+            <a:schemeClr val="accent1"/>
+          </a:effectRef>
+          <a:fontRef idx="minor">
+            <a:schemeClr val="lt1"/>
+          </a:fontRef>
+        </p:style>
+        <p:txBody>
+          <a:bodyPr rtlCol="0" anchor="ctr"/>
+          <a:lstStyle/>
+          <a:p>
+            <a:pPr algn="ctr"/>
+          </a:p>
+        </p:txBody>
+      </p:sp>
+      <p:sp>
+        <p:nvSpPr>
+          <p:cNvPr id="6" name="TextBox 5"/>
           <p:cNvSpPr txBox="1"/>
           <p:nvPr/>
         </p:nvSpPr>
         <p:spPr>
           <a:xfrm>
             <a:off x="640080" y="1371600"/>
-            <a:ext cx="7863840" cy="5029200"/>
+            <a:ext cx="10789920" cy="4572000"/>
           </a:xfrm>
           <a:prstGeom prst="rect">
             <a:avLst/>
@@ -7507,148 +5726,61 @@
           <a:p>
             <a:pPr>
               <a:spcAft>
-                <a:spcPts val="1200"/>
+                <a:spcPts val="800"/>
               </a:spcAft>
-              <a:defRPr sz="2000">
-                <a:solidFill>
-                  <a:srgbClr val="595959"/>
-                </a:solidFill>
-              </a:defRPr>
-            </a:pPr>
-            <a:r>
-              <a:t>A list is a collection of items in a particular order</a:t>
+              <a:defRPr sz="2000" b="1">
+                <a:solidFill>
+                  <a:srgbClr val="333333"/>
+                </a:solidFill>
+              </a:defRPr>
+            </a:pPr>
+            <a:r>
+              <a:t>A list is a collection of items stored in a single variable</a:t>
             </a:r>
           </a:p>
           <a:p>
             <a:pPr>
               <a:spcAft>
-                <a:spcPts val="1200"/>
+                <a:spcPts val="800"/>
               </a:spcAft>
-              <a:defRPr sz="2000">
-                <a:solidFill>
-                  <a:srgbClr val="595959"/>
-                </a:solidFill>
-              </a:defRPr>
-            </a:pPr>
-            <a:r>
-              <a:t>Lists can contain any type of data: numbers, strings, objects, even other lists</a:t>
+              <a:defRPr sz="2000" b="1">
+                <a:solidFill>
+                  <a:srgbClr val="333333"/>
+                </a:solidFill>
+              </a:defRPr>
+            </a:pPr>
+            <a:r>
+              <a:t>Without Lists</a:t>
             </a:r>
           </a:p>
           <a:p>
             <a:pPr>
               <a:spcAft>
-                <a:spcPts val="1200"/>
+                <a:spcPts val="800"/>
               </a:spcAft>
-              <a:defRPr sz="2000">
-                <a:solidFill>
-                  <a:srgbClr val="595959"/>
-                </a:solidFill>
-              </a:defRPr>
-            </a:pPr>
-            <a:r>
-              <a:t>Lists are mutable - you can change their contents after creation</a:t>
+              <a:defRPr sz="2000" b="1">
+                <a:solidFill>
+                  <a:srgbClr val="333333"/>
+                </a:solidFill>
+              </a:defRPr>
+            </a:pPr>
+            <a:r>
+              <a:t>With Lists 🎉</a:t>
             </a:r>
           </a:p>
           <a:p>
             <a:pPr>
               <a:spcAft>
-                <a:spcPts val="1200"/>
+                <a:spcPts val="800"/>
               </a:spcAft>
-              <a:defRPr sz="2000">
-                <a:solidFill>
-                  <a:srgbClr val="595959"/>
-                </a:solidFill>
-              </a:defRPr>
-            </a:pPr>
-            <a:r>
-              <a:t>Lists maintain the order of items</a:t>
-            </a:r>
-          </a:p>
-          <a:p>
-            <a:pPr>
-              <a:spcAft>
-                <a:spcPts val="1200"/>
-              </a:spcAft>
-              <a:defRPr sz="2000">
-                <a:solidFill>
-                  <a:srgbClr val="595959"/>
-                </a:solidFill>
-              </a:defRPr>
-            </a:pPr>
-          </a:p>
-          <a:p>
-            <a:pPr>
-              <a:spcAft>
-                <a:spcPts val="1200"/>
-              </a:spcAft>
-              <a:defRPr sz="2000">
-                <a:solidFill>
-                  <a:srgbClr val="595959"/>
-                </a:solidFill>
-              </a:defRPr>
-            </a:pPr>
-            <a:r>
-              <a:t>Why Use Lists?</a:t>
-            </a:r>
-          </a:p>
-          <a:p>
-            <a:pPr>
-              <a:spcAft>
-                <a:spcPts val="1200"/>
-              </a:spcAft>
-              <a:defRPr sz="2000">
-                <a:solidFill>
-                  <a:srgbClr val="595959"/>
-                </a:solidFill>
-              </a:defRPr>
-            </a:pPr>
-            <a:r>
-              <a:t>• Store related data together (e.g., names, scores, products)</a:t>
-            </a:r>
-          </a:p>
-          <a:p>
-            <a:pPr>
-              <a:spcAft>
-                <a:spcPts val="1200"/>
-              </a:spcAft>
-              <a:defRPr sz="2000">
-                <a:solidFill>
-                  <a:srgbClr val="595959"/>
-                </a:solidFill>
-              </a:defRPr>
-            </a:pPr>
-            <a:r>
-              <a:t>• Process multiple items efficiently with loops</a:t>
-            </a:r>
-          </a:p>
-          <a:p>
-            <a:pPr>
-              <a:spcAft>
-                <a:spcPts val="1200"/>
-              </a:spcAft>
-              <a:defRPr sz="2000">
-                <a:solidFill>
-                  <a:srgbClr val="595959"/>
-                </a:solidFill>
-              </a:defRPr>
-            </a:pPr>
-            <a:r>
-              <a:t>• Organize and manage collections dynamically</a:t>
-            </a:r>
-          </a:p>
-          <a:p>
-            <a:pPr>
-              <a:spcAft>
-                <a:spcPts val="1200"/>
-              </a:spcAft>
-              <a:defRPr sz="2000">
-                <a:solidFill>
-                  <a:srgbClr val="595959"/>
-                </a:solidFill>
-              </a:defRPr>
-            </a:pPr>
-            <a:r>
-              <a:t>• One of Python's most versatile data structures</a:t>
+              <a:defRPr sz="2000" b="1">
+                <a:solidFill>
+                  <a:srgbClr val="333333"/>
+                </a:solidFill>
+              </a:defRPr>
+            </a:pPr>
+            <a:r>
+              <a:t>Lists make managing multiple items easy!</a:t>
             </a:r>
           </a:p>
         </p:txBody>
@@ -7664,14 +5796,6 @@
 <file path=ppt/slides/slide3.xml><?xml version="1.0" encoding="utf-8"?>
 <p:sld xmlns:a="http://schemas.openxmlformats.org/drawingml/2006/main" xmlns:p="http://schemas.openxmlformats.org/presentationml/2006/main" xmlns:r="http://schemas.openxmlformats.org/officeDocument/2006/relationships">
   <p:cSld>
-    <p:bg>
-      <p:bgPr>
-        <a:solidFill>
-          <a:srgbClr val="FFFFFF"/>
-        </a:solidFill>
-        <a:effectLst/>
-      </p:bgPr>
-    </p:bg>
     <p:spTree>
       <p:nvGrpSpPr>
         <p:cNvPr id="1" name=""/>
@@ -7688,13 +5812,13 @@
         <p:spPr>
           <a:xfrm>
             <a:off x="0" y="0"/>
-            <a:ext cx="9144000" cy="914400"/>
+            <a:ext cx="12191695" cy="6858000"/>
           </a:xfrm>
           <a:prstGeom prst="rect">
             <a:avLst/>
           </a:prstGeom>
           <a:solidFill>
-            <a:srgbClr val="29629B"/>
+            <a:srgbClr val="FFFFFF"/>
           </a:solidFill>
           <a:ln>
             <a:noFill/>
@@ -7724,95 +5848,23 @@
       </p:sp>
       <p:sp>
         <p:nvSpPr>
-          <p:cNvPr id="3" name="TextBox 2"/>
-          <p:cNvSpPr txBox="1"/>
-          <p:nvPr/>
-        </p:nvSpPr>
-        <p:spPr>
-          <a:xfrm>
-            <a:off x="457200" y="137160"/>
-            <a:ext cx="8229600" cy="640080"/>
-          </a:xfrm>
-          <a:prstGeom prst="rect">
-            <a:avLst/>
-          </a:prstGeom>
-          <a:noFill/>
-        </p:spPr>
-        <p:txBody>
-          <a:bodyPr wrap="none">
-            <a:spAutoFit/>
-          </a:bodyPr>
-          <a:lstStyle/>
-          <a:p>
-            <a:pPr>
-              <a:defRPr sz="4000" b="1">
-                <a:solidFill>
-                  <a:srgbClr val="FFFFFF"/>
-                </a:solidFill>
-              </a:defRPr>
-            </a:pPr>
-            <a:r>
-              <a:t>Creating Lists</a:t>
-            </a:r>
-          </a:p>
-        </p:txBody>
-      </p:sp>
-      <p:sp>
-        <p:nvSpPr>
-          <p:cNvPr id="4" name="TextBox 3"/>
-          <p:cNvSpPr txBox="1"/>
-          <p:nvPr/>
-        </p:nvSpPr>
-        <p:spPr>
-          <a:xfrm>
-            <a:off x="640080" y="1371600"/>
-            <a:ext cx="7863840" cy="914400"/>
-          </a:xfrm>
-          <a:prstGeom prst="rect">
-            <a:avLst/>
-          </a:prstGeom>
-          <a:noFill/>
-        </p:spPr>
-        <p:txBody>
-          <a:bodyPr wrap="square">
-            <a:spAutoFit/>
-          </a:bodyPr>
-          <a:lstStyle/>
-          <a:p>
-            <a:pPr>
-              <a:defRPr sz="1800">
-                <a:solidFill>
-                  <a:srgbClr val="595959"/>
-                </a:solidFill>
-              </a:defRPr>
-            </a:pPr>
-            <a:r>
-              <a:t>Lists are created using square brackets [ ]</a:t>
-            </a:r>
-          </a:p>
-        </p:txBody>
-      </p:sp>
-      <p:sp>
-        <p:nvSpPr>
-          <p:cNvPr id="5" name="Rectangle 4"/>
+          <p:cNvPr id="3" name="Rectangle 2"/>
           <p:cNvSpPr/>
           <p:nvPr/>
         </p:nvSpPr>
         <p:spPr>
           <a:xfrm>
-            <a:off x="640080" y="2468880"/>
-            <a:ext cx="7863840" cy="4389120"/>
+            <a:off x="0" y="0"/>
+            <a:ext cx="12191695" cy="137160"/>
           </a:xfrm>
           <a:prstGeom prst="rect">
             <a:avLst/>
           </a:prstGeom>
           <a:solidFill>
-            <a:srgbClr val="F8F9FA"/>
+            <a:srgbClr val="0066CC"/>
           </a:solidFill>
-          <a:ln w="25400">
-            <a:solidFill>
-              <a:srgbClr val="6497CA"/>
-            </a:solidFill>
+          <a:ln>
+            <a:noFill/>
           </a:ln>
         </p:spPr>
         <p:style>
@@ -7839,14 +5891,14 @@
       </p:sp>
       <p:sp>
         <p:nvSpPr>
-          <p:cNvPr id="6" name="TextBox 5"/>
+          <p:cNvPr id="4" name="TextBox 3"/>
           <p:cNvSpPr txBox="1"/>
           <p:nvPr/>
         </p:nvSpPr>
         <p:spPr>
           <a:xfrm>
-            <a:off x="914400" y="2651760"/>
-            <a:ext cx="7315200" cy="4023359"/>
+            <a:off x="457200" y="365760"/>
+            <a:ext cx="10972800" cy="731520"/>
           </a:xfrm>
           <a:prstGeom prst="rect">
             <a:avLst/>
@@ -7860,259 +5912,215 @@
           <a:lstStyle/>
           <a:p>
             <a:pPr>
-              <a:spcAft>
-                <a:spcPts val="200"/>
-              </a:spcAft>
-              <a:defRPr sz="1600">
-                <a:solidFill>
-                  <a:srgbClr val="595959"/>
-                </a:solidFill>
-                <a:latin typeface="Courier New"/>
-              </a:defRPr>
-            </a:pPr>
-            <a:r>
-              <a:t># Empty list</a:t>
-            </a:r>
-          </a:p>
+              <a:defRPr sz="4000" b="1">
+                <a:solidFill>
+                  <a:srgbClr val="003366"/>
+                </a:solidFill>
+              </a:defRPr>
+            </a:pPr>
+            <a:r>
+              <a:t>Why Use Lists? 🤔</a:t>
+            </a:r>
+          </a:p>
+        </p:txBody>
+      </p:sp>
+      <p:sp>
+        <p:nvSpPr>
+          <p:cNvPr id="5" name="Rectangle 4"/>
+          <p:cNvSpPr/>
+          <p:nvPr/>
+        </p:nvSpPr>
+        <p:spPr>
+          <a:xfrm>
+            <a:off x="457200" y="1005840"/>
+            <a:ext cx="1828800" cy="45720"/>
+          </a:xfrm>
+          <a:prstGeom prst="rect">
+            <a:avLst/>
+          </a:prstGeom>
+          <a:solidFill>
+            <a:srgbClr val="0066CC"/>
+          </a:solidFill>
+          <a:ln>
+            <a:noFill/>
+          </a:ln>
+        </p:spPr>
+        <p:style>
+          <a:lnRef idx="1">
+            <a:schemeClr val="accent1"/>
+          </a:lnRef>
+          <a:fillRef idx="3">
+            <a:schemeClr val="accent1"/>
+          </a:fillRef>
+          <a:effectRef idx="2">
+            <a:schemeClr val="accent1"/>
+          </a:effectRef>
+          <a:fontRef idx="minor">
+            <a:schemeClr val="lt1"/>
+          </a:fontRef>
+        </p:style>
+        <p:txBody>
+          <a:bodyPr rtlCol="0" anchor="ctr"/>
+          <a:lstStyle/>
+          <a:p>
+            <a:pPr algn="ctr"/>
+          </a:p>
+        </p:txBody>
+      </p:sp>
+      <p:sp>
+        <p:nvSpPr>
+          <p:cNvPr id="6" name="TextBox 5"/>
+          <p:cNvSpPr txBox="1"/>
+          <p:nvPr/>
+        </p:nvSpPr>
+        <p:spPr>
+          <a:xfrm>
+            <a:off x="640080" y="1371600"/>
+            <a:ext cx="10789920" cy="4572000"/>
+          </a:xfrm>
+          <a:prstGeom prst="rect">
+            <a:avLst/>
+          </a:prstGeom>
+          <a:noFill/>
+        </p:spPr>
+        <p:txBody>
+          <a:bodyPr wrap="square">
+            <a:spAutoFit/>
+          </a:bodyPr>
+          <a:lstStyle/>
           <a:p>
             <a:pPr>
               <a:spcAft>
-                <a:spcPts val="200"/>
+                <a:spcPts val="800"/>
               </a:spcAft>
-              <a:defRPr sz="1600">
-                <a:solidFill>
-                  <a:srgbClr val="595959"/>
-                </a:solidFill>
-                <a:latin typeface="Courier New"/>
-              </a:defRPr>
-            </a:pPr>
-            <a:r>
-              <a:t>my_list = []</a:t>
+              <a:defRPr sz="2000" b="1">
+                <a:solidFill>
+                  <a:srgbClr val="333333"/>
+                </a:solidFill>
+              </a:defRPr>
+            </a:pPr>
+            <a:r>
+              <a:t>Organization</a:t>
             </a:r>
           </a:p>
           <a:p>
             <a:pPr>
               <a:spcAft>
-                <a:spcPts val="200"/>
+                <a:spcPts val="800"/>
               </a:spcAft>
-              <a:defRPr sz="1600">
-                <a:solidFill>
-                  <a:srgbClr val="595959"/>
-                </a:solidFill>
-                <a:latin typeface="Courier New"/>
-              </a:defRPr>
-            </a:pPr>
+              <a:defRPr sz="2000" b="1">
+                <a:solidFill>
+                  <a:srgbClr val="333333"/>
+                </a:solidFill>
+              </a:defRPr>
+            </a:pPr>
+            <a:r>
+              <a:t>Keep related data together in one place</a:t>
+            </a:r>
           </a:p>
           <a:p>
             <a:pPr>
               <a:spcAft>
-                <a:spcPts val="200"/>
+                <a:spcPts val="800"/>
               </a:spcAft>
-              <a:defRPr sz="1600">
-                <a:solidFill>
-                  <a:srgbClr val="595959"/>
-                </a:solidFill>
-                <a:latin typeface="Courier New"/>
-              </a:defRPr>
-            </a:pPr>
-            <a:r>
-              <a:t># List with numbers</a:t>
+              <a:defRPr sz="2000" b="1">
+                <a:solidFill>
+                  <a:srgbClr val="333333"/>
+                </a:solidFill>
+              </a:defRPr>
+            </a:pPr>
+            <a:r>
+              <a:t>Flexibility</a:t>
             </a:r>
           </a:p>
           <a:p>
             <a:pPr>
               <a:spcAft>
-                <a:spcPts val="200"/>
+                <a:spcPts val="800"/>
               </a:spcAft>
-              <a:defRPr sz="1600">
-                <a:solidFill>
-                  <a:srgbClr val="595959"/>
-                </a:solidFill>
-                <a:latin typeface="Courier New"/>
-              </a:defRPr>
-            </a:pPr>
-            <a:r>
-              <a:t>numbers = [1, 2, 3, 4, 5]</a:t>
+              <a:defRPr sz="2000" b="1">
+                <a:solidFill>
+                  <a:srgbClr val="333333"/>
+                </a:solidFill>
+              </a:defRPr>
+            </a:pPr>
+            <a:r>
+              <a:t>Add, remove, or modify items anytime</a:t>
             </a:r>
           </a:p>
           <a:p>
             <a:pPr>
               <a:spcAft>
-                <a:spcPts val="200"/>
+                <a:spcPts val="800"/>
               </a:spcAft>
-              <a:defRPr sz="1600">
-                <a:solidFill>
-                  <a:srgbClr val="595959"/>
-                </a:solidFill>
-                <a:latin typeface="Courier New"/>
-              </a:defRPr>
-            </a:pPr>
+              <a:defRPr sz="2000" b="1">
+                <a:solidFill>
+                  <a:srgbClr val="333333"/>
+                </a:solidFill>
+              </a:defRPr>
+            </a:pPr>
+            <a:r>
+              <a:t>Iteration</a:t>
+            </a:r>
           </a:p>
           <a:p>
             <a:pPr>
               <a:spcAft>
-                <a:spcPts val="200"/>
+                <a:spcPts val="800"/>
               </a:spcAft>
-              <a:defRPr sz="1600">
-                <a:solidFill>
-                  <a:srgbClr val="595959"/>
-                </a:solidFill>
-                <a:latin typeface="Courier New"/>
-              </a:defRPr>
-            </a:pPr>
-            <a:r>
-              <a:t># List with strings</a:t>
+              <a:defRPr sz="2000" b="1">
+                <a:solidFill>
+                  <a:srgbClr val="333333"/>
+                </a:solidFill>
+              </a:defRPr>
+            </a:pPr>
+            <a:r>
+              <a:t>Process all items with loops easily</a:t>
             </a:r>
           </a:p>
           <a:p>
             <a:pPr>
               <a:spcAft>
-                <a:spcPts val="200"/>
+                <a:spcPts val="800"/>
               </a:spcAft>
-              <a:defRPr sz="1600">
-                <a:solidFill>
-                  <a:srgbClr val="595959"/>
-                </a:solidFill>
-                <a:latin typeface="Courier New"/>
-              </a:defRPr>
-            </a:pPr>
-            <a:r>
-              <a:t>fruits = ['apple', 'banana', 'cherry']</a:t>
+              <a:defRPr sz="2000" b="1">
+                <a:solidFill>
+                  <a:srgbClr val="333333"/>
+                </a:solidFill>
+              </a:defRPr>
+            </a:pPr>
+            <a:r>
+              <a:t>Efficiency</a:t>
             </a:r>
           </a:p>
           <a:p>
             <a:pPr>
               <a:spcAft>
-                <a:spcPts val="200"/>
+                <a:spcPts val="800"/>
               </a:spcAft>
-              <a:defRPr sz="1600">
-                <a:solidFill>
-                  <a:srgbClr val="595959"/>
-                </a:solidFill>
-                <a:latin typeface="Courier New"/>
-              </a:defRPr>
-            </a:pPr>
+              <a:defRPr sz="2000" b="1">
+                <a:solidFill>
+                  <a:srgbClr val="333333"/>
+                </a:solidFill>
+              </a:defRPr>
+            </a:pPr>
+            <a:r>
+              <a:t>Work with any number of items</a:t>
+            </a:r>
           </a:p>
           <a:p>
             <a:pPr>
               <a:spcAft>
-                <a:spcPts val="200"/>
+                <a:spcPts val="800"/>
               </a:spcAft>
-              <a:defRPr sz="1600">
-                <a:solidFill>
-                  <a:srgbClr val="595959"/>
-                </a:solidFill>
-                <a:latin typeface="Courier New"/>
-              </a:defRPr>
-            </a:pPr>
-            <a:r>
-              <a:t># Mixed types</a:t>
-            </a:r>
-          </a:p>
-          <a:p>
-            <a:pPr>
-              <a:spcAft>
-                <a:spcPts val="200"/>
-              </a:spcAft>
-              <a:defRPr sz="1600">
-                <a:solidFill>
-                  <a:srgbClr val="595959"/>
-                </a:solidFill>
-                <a:latin typeface="Courier New"/>
-              </a:defRPr>
-            </a:pPr>
-            <a:r>
-              <a:t>mixed = [42, 'hello', 3.14, True]</a:t>
-            </a:r>
-          </a:p>
-          <a:p>
-            <a:pPr>
-              <a:spcAft>
-                <a:spcPts val="200"/>
-              </a:spcAft>
-              <a:defRPr sz="1600">
-                <a:solidFill>
-                  <a:srgbClr val="595959"/>
-                </a:solidFill>
-                <a:latin typeface="Courier New"/>
-              </a:defRPr>
-            </a:pPr>
-          </a:p>
-          <a:p>
-            <a:pPr>
-              <a:spcAft>
-                <a:spcPts val="200"/>
-              </a:spcAft>
-              <a:defRPr sz="1600">
-                <a:solidFill>
-                  <a:srgbClr val="595959"/>
-                </a:solidFill>
-                <a:latin typeface="Courier New"/>
-              </a:defRPr>
-            </a:pPr>
-            <a:r>
-              <a:t># List of lists</a:t>
-            </a:r>
-          </a:p>
-          <a:p>
-            <a:pPr>
-              <a:spcAft>
-                <a:spcPts val="200"/>
-              </a:spcAft>
-              <a:defRPr sz="1600">
-                <a:solidFill>
-                  <a:srgbClr val="595959"/>
-                </a:solidFill>
-                <a:latin typeface="Courier New"/>
-              </a:defRPr>
-            </a:pPr>
-            <a:r>
-              <a:t>matrix = [[1, 2, 3], [4, 5, 6], [7, 8, 9]]</a:t>
-            </a:r>
-          </a:p>
-          <a:p>
-            <a:pPr>
-              <a:spcAft>
-                <a:spcPts val="200"/>
-              </a:spcAft>
-              <a:defRPr sz="1600">
-                <a:solidFill>
-                  <a:srgbClr val="595959"/>
-                </a:solidFill>
-                <a:latin typeface="Courier New"/>
-              </a:defRPr>
-            </a:pPr>
-          </a:p>
-          <a:p>
-            <a:pPr>
-              <a:spcAft>
-                <a:spcPts val="200"/>
-              </a:spcAft>
-              <a:defRPr sz="1600">
-                <a:solidFill>
-                  <a:srgbClr val="595959"/>
-                </a:solidFill>
-                <a:latin typeface="Courier New"/>
-              </a:defRPr>
-            </a:pPr>
-            <a:r>
-              <a:t># Using list() constructor</a:t>
-            </a:r>
-          </a:p>
-          <a:p>
-            <a:pPr>
-              <a:spcAft>
-                <a:spcPts val="200"/>
-              </a:spcAft>
-              <a:defRPr sz="1600">
-                <a:solidFill>
-                  <a:srgbClr val="595959"/>
-                </a:solidFill>
-                <a:latin typeface="Courier New"/>
-              </a:defRPr>
-            </a:pPr>
-            <a:r>
-              <a:t>letters = list('abc')  # ['a', 'b', 'c']</a:t>
+              <a:defRPr sz="2000" b="1">
+                <a:solidFill>
+                  <a:srgbClr val="333333"/>
+                </a:solidFill>
+              </a:defRPr>
+            </a:pPr>
+            <a:r>
+              <a:t>Real-world examples:Shopping lists, student grades, to-do tasks, product inventory</a:t>
             </a:r>
           </a:p>
         </p:txBody>
@@ -8128,14 +6136,6 @@
 <file path=ppt/slides/slide4.xml><?xml version="1.0" encoding="utf-8"?>
 <p:sld xmlns:a="http://schemas.openxmlformats.org/drawingml/2006/main" xmlns:p="http://schemas.openxmlformats.org/presentationml/2006/main" xmlns:r="http://schemas.openxmlformats.org/officeDocument/2006/relationships">
   <p:cSld>
-    <p:bg>
-      <p:bgPr>
-        <a:solidFill>
-          <a:srgbClr val="FFFFFF"/>
-        </a:solidFill>
-        <a:effectLst/>
-      </p:bgPr>
-    </p:bg>
     <p:spTree>
       <p:nvGrpSpPr>
         <p:cNvPr id="1" name=""/>
@@ -8152,13 +6152,13 @@
         <p:spPr>
           <a:xfrm>
             <a:off x="0" y="0"/>
-            <a:ext cx="9144000" cy="914400"/>
+            <a:ext cx="12191695" cy="6858000"/>
           </a:xfrm>
           <a:prstGeom prst="rect">
             <a:avLst/>
           </a:prstGeom>
           <a:solidFill>
-            <a:srgbClr val="29629B"/>
+            <a:srgbClr val="FFFFFF"/>
           </a:solidFill>
           <a:ln>
             <a:noFill/>
@@ -8188,95 +6188,23 @@
       </p:sp>
       <p:sp>
         <p:nvSpPr>
-          <p:cNvPr id="3" name="TextBox 2"/>
-          <p:cNvSpPr txBox="1"/>
-          <p:nvPr/>
-        </p:nvSpPr>
-        <p:spPr>
-          <a:xfrm>
-            <a:off x="457200" y="137160"/>
-            <a:ext cx="8229600" cy="640080"/>
-          </a:xfrm>
-          <a:prstGeom prst="rect">
-            <a:avLst/>
-          </a:prstGeom>
-          <a:noFill/>
-        </p:spPr>
-        <p:txBody>
-          <a:bodyPr wrap="none">
-            <a:spAutoFit/>
-          </a:bodyPr>
-          <a:lstStyle/>
-          <a:p>
-            <a:pPr>
-              <a:defRPr sz="4000" b="1">
-                <a:solidFill>
-                  <a:srgbClr val="FFFFFF"/>
-                </a:solidFill>
-              </a:defRPr>
-            </a:pPr>
-            <a:r>
-              <a:t>Accessing Elements</a:t>
-            </a:r>
-          </a:p>
-        </p:txBody>
-      </p:sp>
-      <p:sp>
-        <p:nvSpPr>
-          <p:cNvPr id="4" name="TextBox 3"/>
-          <p:cNvSpPr txBox="1"/>
-          <p:nvPr/>
-        </p:nvSpPr>
-        <p:spPr>
-          <a:xfrm>
-            <a:off x="640080" y="1371600"/>
-            <a:ext cx="7863840" cy="914400"/>
-          </a:xfrm>
-          <a:prstGeom prst="rect">
-            <a:avLst/>
-          </a:prstGeom>
-          <a:noFill/>
-        </p:spPr>
-        <p:txBody>
-          <a:bodyPr wrap="square">
-            <a:spAutoFit/>
-          </a:bodyPr>
-          <a:lstStyle/>
-          <a:p>
-            <a:pPr>
-              <a:defRPr sz="1800">
-                <a:solidFill>
-                  <a:srgbClr val="595959"/>
-                </a:solidFill>
-              </a:defRPr>
-            </a:pPr>
-            <a:r>
-              <a:t>Use indices to access individual items (0-based indexing)</a:t>
-            </a:r>
-          </a:p>
-        </p:txBody>
-      </p:sp>
-      <p:sp>
-        <p:nvSpPr>
-          <p:cNvPr id="5" name="Rectangle 4"/>
+          <p:cNvPr id="3" name="Rectangle 2"/>
           <p:cNvSpPr/>
           <p:nvPr/>
         </p:nvSpPr>
         <p:spPr>
           <a:xfrm>
-            <a:off x="640080" y="2468880"/>
-            <a:ext cx="7863840" cy="4389120"/>
+            <a:off x="0" y="0"/>
+            <a:ext cx="12191695" cy="137160"/>
           </a:xfrm>
           <a:prstGeom prst="rect">
             <a:avLst/>
           </a:prstGeom>
           <a:solidFill>
-            <a:srgbClr val="F8F9FA"/>
+            <a:srgbClr val="0066CC"/>
           </a:solidFill>
-          <a:ln w="25400">
-            <a:solidFill>
-              <a:srgbClr val="6497CA"/>
-            </a:solidFill>
+          <a:ln>
+            <a:noFill/>
           </a:ln>
         </p:spPr>
         <p:style>
@@ -8303,14 +6231,14 @@
       </p:sp>
       <p:sp>
         <p:nvSpPr>
-          <p:cNvPr id="6" name="TextBox 5"/>
+          <p:cNvPr id="4" name="TextBox 3"/>
           <p:cNvSpPr txBox="1"/>
           <p:nvPr/>
         </p:nvSpPr>
         <p:spPr>
           <a:xfrm>
-            <a:off x="914400" y="2651760"/>
-            <a:ext cx="7315200" cy="4023359"/>
+            <a:off x="457200" y="365760"/>
+            <a:ext cx="10972800" cy="731520"/>
           </a:xfrm>
           <a:prstGeom prst="rect">
             <a:avLst/>
@@ -8324,204 +6252,140 @@
           <a:lstStyle/>
           <a:p>
             <a:pPr>
-              <a:spcAft>
-                <a:spcPts val="200"/>
-              </a:spcAft>
-              <a:defRPr sz="1600">
-                <a:solidFill>
-                  <a:srgbClr val="595959"/>
-                </a:solidFill>
-                <a:latin typeface="Courier New"/>
-              </a:defRPr>
-            </a:pPr>
-            <a:r>
-              <a:t># Positive indices (from start)</a:t>
-            </a:r>
-          </a:p>
+              <a:defRPr sz="4000" b="1">
+                <a:solidFill>
+                  <a:srgbClr val="003366"/>
+                </a:solidFill>
+              </a:defRPr>
+            </a:pPr>
+            <a:r>
+              <a:t>Creating Lists ✨</a:t>
+            </a:r>
+          </a:p>
+        </p:txBody>
+      </p:sp>
+      <p:sp>
+        <p:nvSpPr>
+          <p:cNvPr id="5" name="Rectangle 4"/>
+          <p:cNvSpPr/>
+          <p:nvPr/>
+        </p:nvSpPr>
+        <p:spPr>
+          <a:xfrm>
+            <a:off x="457200" y="1005840"/>
+            <a:ext cx="1828800" cy="45720"/>
+          </a:xfrm>
+          <a:prstGeom prst="rect">
+            <a:avLst/>
+          </a:prstGeom>
+          <a:solidFill>
+            <a:srgbClr val="0066CC"/>
+          </a:solidFill>
+          <a:ln>
+            <a:noFill/>
+          </a:ln>
+        </p:spPr>
+        <p:style>
+          <a:lnRef idx="1">
+            <a:schemeClr val="accent1"/>
+          </a:lnRef>
+          <a:fillRef idx="3">
+            <a:schemeClr val="accent1"/>
+          </a:fillRef>
+          <a:effectRef idx="2">
+            <a:schemeClr val="accent1"/>
+          </a:effectRef>
+          <a:fontRef idx="minor">
+            <a:schemeClr val="lt1"/>
+          </a:fontRef>
+        </p:style>
+        <p:txBody>
+          <a:bodyPr rtlCol="0" anchor="ctr"/>
+          <a:lstStyle/>
+          <a:p>
+            <a:pPr algn="ctr"/>
+          </a:p>
+        </p:txBody>
+      </p:sp>
+      <p:sp>
+        <p:nvSpPr>
+          <p:cNvPr id="6" name="TextBox 5"/>
+          <p:cNvSpPr txBox="1"/>
+          <p:nvPr/>
+        </p:nvSpPr>
+        <p:spPr>
+          <a:xfrm>
+            <a:off x="640080" y="1371600"/>
+            <a:ext cx="10789920" cy="4572000"/>
+          </a:xfrm>
+          <a:prstGeom prst="rect">
+            <a:avLst/>
+          </a:prstGeom>
+          <a:noFill/>
+        </p:spPr>
+        <p:txBody>
+          <a:bodyPr wrap="square">
+            <a:spAutoFit/>
+          </a:bodyPr>
+          <a:lstStyle/>
           <a:p>
             <a:pPr>
               <a:spcAft>
-                <a:spcPts val="200"/>
+                <a:spcPts val="800"/>
               </a:spcAft>
-              <a:defRPr sz="1600">
-                <a:solidFill>
-                  <a:srgbClr val="595959"/>
-                </a:solidFill>
-                <a:latin typeface="Courier New"/>
-              </a:defRPr>
-            </a:pPr>
-            <a:r>
-              <a:t>fruits = ['apple', 'banana', 'cherry', 'date']</a:t>
+              <a:defRPr sz="2000" b="1">
+                <a:solidFill>
+                  <a:srgbClr val="333333"/>
+                </a:solidFill>
+              </a:defRPr>
+            </a:pPr>
+            <a:r>
+              <a:t>Empty List</a:t>
             </a:r>
           </a:p>
           <a:p>
             <a:pPr>
               <a:spcAft>
-                <a:spcPts val="200"/>
+                <a:spcPts val="800"/>
               </a:spcAft>
-              <a:defRPr sz="1600">
-                <a:solidFill>
-                  <a:srgbClr val="595959"/>
-                </a:solidFill>
-                <a:latin typeface="Courier New"/>
-              </a:defRPr>
-            </a:pPr>
-            <a:r>
-              <a:t>print(fruits[0])   # 'apple'  (first item)</a:t>
+              <a:defRPr sz="2000" b="1">
+                <a:solidFill>
+                  <a:srgbClr val="333333"/>
+                </a:solidFill>
+              </a:defRPr>
+            </a:pPr>
+            <a:r>
+              <a:t>List of Numbers</a:t>
             </a:r>
           </a:p>
           <a:p>
             <a:pPr>
               <a:spcAft>
-                <a:spcPts val="200"/>
+                <a:spcPts val="800"/>
               </a:spcAft>
-              <a:defRPr sz="1600">
-                <a:solidFill>
-                  <a:srgbClr val="595959"/>
-                </a:solidFill>
-                <a:latin typeface="Courier New"/>
-              </a:defRPr>
-            </a:pPr>
-            <a:r>
-              <a:t>print(fruits[1])   # 'banana' (second item)</a:t>
+              <a:defRPr sz="2000" b="1">
+                <a:solidFill>
+                  <a:srgbClr val="333333"/>
+                </a:solidFill>
+              </a:defRPr>
+            </a:pPr>
+            <a:r>
+              <a:t>List of Strings</a:t>
             </a:r>
           </a:p>
           <a:p>
             <a:pPr>
               <a:spcAft>
-                <a:spcPts val="200"/>
+                <a:spcPts val="800"/>
               </a:spcAft>
-              <a:defRPr sz="1600">
-                <a:solidFill>
-                  <a:srgbClr val="595959"/>
-                </a:solidFill>
-                <a:latin typeface="Courier New"/>
-              </a:defRPr>
-            </a:pPr>
-            <a:r>
-              <a:t>print(fruits[3])   # 'date'   (fourth item)</a:t>
-            </a:r>
-          </a:p>
-          <a:p>
-            <a:pPr>
-              <a:spcAft>
-                <a:spcPts val="200"/>
-              </a:spcAft>
-              <a:defRPr sz="1600">
-                <a:solidFill>
-                  <a:srgbClr val="595959"/>
-                </a:solidFill>
-                <a:latin typeface="Courier New"/>
-              </a:defRPr>
-            </a:pPr>
-          </a:p>
-          <a:p>
-            <a:pPr>
-              <a:spcAft>
-                <a:spcPts val="200"/>
-              </a:spcAft>
-              <a:defRPr sz="1600">
-                <a:solidFill>
-                  <a:srgbClr val="595959"/>
-                </a:solidFill>
-                <a:latin typeface="Courier New"/>
-              </a:defRPr>
-            </a:pPr>
-            <a:r>
-              <a:t># Negative indices (from end)</a:t>
-            </a:r>
-          </a:p>
-          <a:p>
-            <a:pPr>
-              <a:spcAft>
-                <a:spcPts val="200"/>
-              </a:spcAft>
-              <a:defRPr sz="1600">
-                <a:solidFill>
-                  <a:srgbClr val="595959"/>
-                </a:solidFill>
-                <a:latin typeface="Courier New"/>
-              </a:defRPr>
-            </a:pPr>
-            <a:r>
-              <a:t>print(fruits[-1])  # 'date'   (last item)</a:t>
-            </a:r>
-          </a:p>
-          <a:p>
-            <a:pPr>
-              <a:spcAft>
-                <a:spcPts val="200"/>
-              </a:spcAft>
-              <a:defRPr sz="1600">
-                <a:solidFill>
-                  <a:srgbClr val="595959"/>
-                </a:solidFill>
-                <a:latin typeface="Courier New"/>
-              </a:defRPr>
-            </a:pPr>
-            <a:r>
-              <a:t>print(fruits[-2])  # 'cherry' (second to last)</a:t>
-            </a:r>
-          </a:p>
-          <a:p>
-            <a:pPr>
-              <a:spcAft>
-                <a:spcPts val="200"/>
-              </a:spcAft>
-              <a:defRPr sz="1600">
-                <a:solidFill>
-                  <a:srgbClr val="595959"/>
-                </a:solidFill>
-                <a:latin typeface="Courier New"/>
-              </a:defRPr>
-            </a:pPr>
-            <a:r>
-              <a:t>print(fruits[-4])  # 'apple'  (same as [0])</a:t>
-            </a:r>
-          </a:p>
-          <a:p>
-            <a:pPr>
-              <a:spcAft>
-                <a:spcPts val="200"/>
-              </a:spcAft>
-              <a:defRPr sz="1600">
-                <a:solidFill>
-                  <a:srgbClr val="595959"/>
-                </a:solidFill>
-                <a:latin typeface="Courier New"/>
-              </a:defRPr>
-            </a:pPr>
-          </a:p>
-          <a:p>
-            <a:pPr>
-              <a:spcAft>
-                <a:spcPts val="200"/>
-              </a:spcAft>
-              <a:defRPr sz="1600">
-                <a:solidFill>
-                  <a:srgbClr val="595959"/>
-                </a:solidFill>
-                <a:latin typeface="Courier New"/>
-              </a:defRPr>
-            </a:pPr>
-            <a:r>
-              <a:t># Index out of range causes an error</a:t>
-            </a:r>
-          </a:p>
-          <a:p>
-            <a:pPr>
-              <a:spcAft>
-                <a:spcPts val="200"/>
-              </a:spcAft>
-              <a:defRPr sz="1600">
-                <a:solidFill>
-                  <a:srgbClr val="595959"/>
-                </a:solidFill>
-                <a:latin typeface="Courier New"/>
-              </a:defRPr>
-            </a:pPr>
-            <a:r>
-              <a:t># print(fruits[10])  # IndexError!</a:t>
+              <a:defRPr sz="2000" b="1">
+                <a:solidFill>
+                  <a:srgbClr val="333333"/>
+                </a:solidFill>
+              </a:defRPr>
+            </a:pPr>
+            <a:r>
+              <a:t>Mixed Types (Possible but not recommended)</a:t>
             </a:r>
           </a:p>
         </p:txBody>
@@ -8537,14 +6401,6 @@
 <file path=ppt/slides/slide5.xml><?xml version="1.0" encoding="utf-8"?>
 <p:sld xmlns:a="http://schemas.openxmlformats.org/drawingml/2006/main" xmlns:p="http://schemas.openxmlformats.org/presentationml/2006/main" xmlns:r="http://schemas.openxmlformats.org/officeDocument/2006/relationships">
   <p:cSld>
-    <p:bg>
-      <p:bgPr>
-        <a:solidFill>
-          <a:srgbClr val="FFFFFF"/>
-        </a:solidFill>
-        <a:effectLst/>
-      </p:bgPr>
-    </p:bg>
     <p:spTree>
       <p:nvGrpSpPr>
         <p:cNvPr id="1" name=""/>
@@ -8561,13 +6417,13 @@
         <p:spPr>
           <a:xfrm>
             <a:off x="0" y="0"/>
-            <a:ext cx="9144000" cy="914400"/>
+            <a:ext cx="12191695" cy="6858000"/>
           </a:xfrm>
           <a:prstGeom prst="rect">
             <a:avLst/>
           </a:prstGeom>
           <a:solidFill>
-            <a:srgbClr val="29629B"/>
+            <a:srgbClr val="FFFFFF"/>
           </a:solidFill>
           <a:ln>
             <a:noFill/>
@@ -8597,95 +6453,23 @@
       </p:sp>
       <p:sp>
         <p:nvSpPr>
-          <p:cNvPr id="3" name="TextBox 2"/>
-          <p:cNvSpPr txBox="1"/>
-          <p:nvPr/>
-        </p:nvSpPr>
-        <p:spPr>
-          <a:xfrm>
-            <a:off x="457200" y="137160"/>
-            <a:ext cx="8229600" cy="640080"/>
-          </a:xfrm>
-          <a:prstGeom prst="rect">
-            <a:avLst/>
-          </a:prstGeom>
-          <a:noFill/>
-        </p:spPr>
-        <p:txBody>
-          <a:bodyPr wrap="none">
-            <a:spAutoFit/>
-          </a:bodyPr>
-          <a:lstStyle/>
-          <a:p>
-            <a:pPr>
-              <a:defRPr sz="4000" b="1">
-                <a:solidFill>
-                  <a:srgbClr val="FFFFFF"/>
-                </a:solidFill>
-              </a:defRPr>
-            </a:pPr>
-            <a:r>
-              <a:t>Slicing Lists</a:t>
-            </a:r>
-          </a:p>
-        </p:txBody>
-      </p:sp>
-      <p:sp>
-        <p:nvSpPr>
-          <p:cNvPr id="4" name="TextBox 3"/>
-          <p:cNvSpPr txBox="1"/>
-          <p:nvPr/>
-        </p:nvSpPr>
-        <p:spPr>
-          <a:xfrm>
-            <a:off x="640080" y="1371600"/>
-            <a:ext cx="7863840" cy="914400"/>
-          </a:xfrm>
-          <a:prstGeom prst="rect">
-            <a:avLst/>
-          </a:prstGeom>
-          <a:noFill/>
-        </p:spPr>
-        <p:txBody>
-          <a:bodyPr wrap="square">
-            <a:spAutoFit/>
-          </a:bodyPr>
-          <a:lstStyle/>
-          <a:p>
-            <a:pPr>
-              <a:defRPr sz="1800">
-                <a:solidFill>
-                  <a:srgbClr val="595959"/>
-                </a:solidFill>
-              </a:defRPr>
-            </a:pPr>
-            <a:r>
-              <a:t>Extract portions of a list using slice notation</a:t>
-            </a:r>
-          </a:p>
-        </p:txBody>
-      </p:sp>
-      <p:sp>
-        <p:nvSpPr>
-          <p:cNvPr id="5" name="Rectangle 4"/>
+          <p:cNvPr id="3" name="Rectangle 2"/>
           <p:cNvSpPr/>
           <p:nvPr/>
         </p:nvSpPr>
         <p:spPr>
           <a:xfrm>
-            <a:off x="640080" y="2468880"/>
-            <a:ext cx="7863840" cy="4389120"/>
+            <a:off x="0" y="0"/>
+            <a:ext cx="12191695" cy="137160"/>
           </a:xfrm>
           <a:prstGeom prst="rect">
             <a:avLst/>
           </a:prstGeom>
           <a:solidFill>
-            <a:srgbClr val="F8F9FA"/>
+            <a:srgbClr val="0066CC"/>
           </a:solidFill>
-          <a:ln w="25400">
-            <a:solidFill>
-              <a:srgbClr val="6497CA"/>
-            </a:solidFill>
+          <a:ln>
+            <a:noFill/>
           </a:ln>
         </p:spPr>
         <p:style>
@@ -8712,14 +6496,14 @@
       </p:sp>
       <p:sp>
         <p:nvSpPr>
-          <p:cNvPr id="6" name="TextBox 5"/>
+          <p:cNvPr id="4" name="TextBox 3"/>
           <p:cNvSpPr txBox="1"/>
           <p:nvPr/>
         </p:nvSpPr>
         <p:spPr>
           <a:xfrm>
-            <a:off x="914400" y="2651760"/>
-            <a:ext cx="7315200" cy="4023359"/>
+            <a:off x="457200" y="365760"/>
+            <a:ext cx="10972800" cy="731520"/>
           </a:xfrm>
           <a:prstGeom prst="rect">
             <a:avLst/>
@@ -8733,217 +6517,140 @@
           <a:lstStyle/>
           <a:p>
             <a:pPr>
-              <a:spcAft>
-                <a:spcPts val="200"/>
-              </a:spcAft>
-              <a:defRPr sz="1600">
-                <a:solidFill>
-                  <a:srgbClr val="595959"/>
-                </a:solidFill>
-                <a:latin typeface="Courier New"/>
-              </a:defRPr>
-            </a:pPr>
-            <a:r>
-              <a:t>numbers = [0, 1, 2, 3, 4, 5, 6, 7, 8, 9]</a:t>
-            </a:r>
-          </a:p>
+              <a:defRPr sz="4000" b="1">
+                <a:solidFill>
+                  <a:srgbClr val="003366"/>
+                </a:solidFill>
+              </a:defRPr>
+            </a:pPr>
+            <a:r>
+              <a:t>Accessing Elements 🎯</a:t>
+            </a:r>
+          </a:p>
+        </p:txBody>
+      </p:sp>
+      <p:sp>
+        <p:nvSpPr>
+          <p:cNvPr id="5" name="Rectangle 4"/>
+          <p:cNvSpPr/>
+          <p:nvPr/>
+        </p:nvSpPr>
+        <p:spPr>
+          <a:xfrm>
+            <a:off x="457200" y="1005840"/>
+            <a:ext cx="1828800" cy="45720"/>
+          </a:xfrm>
+          <a:prstGeom prst="rect">
+            <a:avLst/>
+          </a:prstGeom>
+          <a:solidFill>
+            <a:srgbClr val="0066CC"/>
+          </a:solidFill>
+          <a:ln>
+            <a:noFill/>
+          </a:ln>
+        </p:spPr>
+        <p:style>
+          <a:lnRef idx="1">
+            <a:schemeClr val="accent1"/>
+          </a:lnRef>
+          <a:fillRef idx="3">
+            <a:schemeClr val="accent1"/>
+          </a:fillRef>
+          <a:effectRef idx="2">
+            <a:schemeClr val="accent1"/>
+          </a:effectRef>
+          <a:fontRef idx="minor">
+            <a:schemeClr val="lt1"/>
+          </a:fontRef>
+        </p:style>
+        <p:txBody>
+          <a:bodyPr rtlCol="0" anchor="ctr"/>
+          <a:lstStyle/>
+          <a:p>
+            <a:pPr algn="ctr"/>
+          </a:p>
+        </p:txBody>
+      </p:sp>
+      <p:sp>
+        <p:nvSpPr>
+          <p:cNvPr id="6" name="TextBox 5"/>
+          <p:cNvSpPr txBox="1"/>
+          <p:nvPr/>
+        </p:nvSpPr>
+        <p:spPr>
+          <a:xfrm>
+            <a:off x="640080" y="1371600"/>
+            <a:ext cx="10789920" cy="4572000"/>
+          </a:xfrm>
+          <a:prstGeom prst="rect">
+            <a:avLst/>
+          </a:prstGeom>
+          <a:noFill/>
+        </p:spPr>
+        <p:txBody>
+          <a:bodyPr wrap="square">
+            <a:spAutoFit/>
+          </a:bodyPr>
+          <a:lstStyle/>
           <a:p>
             <a:pPr>
               <a:spcAft>
-                <a:spcPts val="200"/>
+                <a:spcPts val="800"/>
               </a:spcAft>
-              <a:defRPr sz="1600">
-                <a:solidFill>
-                  <a:srgbClr val="595959"/>
-                </a:solidFill>
-                <a:latin typeface="Courier New"/>
-              </a:defRPr>
-            </a:pPr>
+              <a:defRPr sz="2000" b="1">
+                <a:solidFill>
+                  <a:srgbClr val="333333"/>
+                </a:solidFill>
+              </a:defRPr>
+            </a:pPr>
+            <a:r>
+              <a:t>Each item in a list has an index (position number)</a:t>
+            </a:r>
           </a:p>
           <a:p>
             <a:pPr>
               <a:spcAft>
-                <a:spcPts val="200"/>
+                <a:spcPts val="800"/>
               </a:spcAft>
-              <a:defRPr sz="1600">
-                <a:solidFill>
-                  <a:srgbClr val="595959"/>
-                </a:solidFill>
-                <a:latin typeface="Courier New"/>
-              </a:defRPr>
-            </a:pPr>
-            <a:r>
-              <a:t># Basic slicing [start:end] - end is exclusive</a:t>
+              <a:defRPr sz="2000" b="1">
+                <a:solidFill>
+                  <a:srgbClr val="333333"/>
+                </a:solidFill>
+              </a:defRPr>
+            </a:pPr>
+            <a:r>
+              <a:t>Positive Indices (from start)</a:t>
             </a:r>
           </a:p>
           <a:p>
             <a:pPr>
               <a:spcAft>
-                <a:spcPts val="200"/>
+                <a:spcPts val="800"/>
               </a:spcAft>
-              <a:defRPr sz="1600">
-                <a:solidFill>
-                  <a:srgbClr val="595959"/>
-                </a:solidFill>
-                <a:latin typeface="Courier New"/>
-              </a:defRPr>
-            </a:pPr>
-            <a:r>
-              <a:t>print(numbers[2:5])    # [2, 3, 4]</a:t>
+              <a:defRPr sz="2000" b="1">
+                <a:solidFill>
+                  <a:srgbClr val="333333"/>
+                </a:solidFill>
+              </a:defRPr>
+            </a:pPr>
+            <a:r>
+              <a:t>Examples:</a:t>
             </a:r>
           </a:p>
           <a:p>
             <a:pPr>
               <a:spcAft>
-                <a:spcPts val="200"/>
+                <a:spcPts val="800"/>
               </a:spcAft>
-              <a:defRPr sz="1600">
-                <a:solidFill>
-                  <a:srgbClr val="595959"/>
-                </a:solidFill>
-                <a:latin typeface="Courier New"/>
-              </a:defRPr>
-            </a:pPr>
-            <a:r>
-              <a:t>print(numbers[0:3])    # [0, 1, 2]</a:t>
-            </a:r>
-          </a:p>
-          <a:p>
-            <a:pPr>
-              <a:spcAft>
-                <a:spcPts val="200"/>
-              </a:spcAft>
-              <a:defRPr sz="1600">
-                <a:solidFill>
-                  <a:srgbClr val="595959"/>
-                </a:solidFill>
-                <a:latin typeface="Courier New"/>
-              </a:defRPr>
-            </a:pPr>
-          </a:p>
-          <a:p>
-            <a:pPr>
-              <a:spcAft>
-                <a:spcPts val="200"/>
-              </a:spcAft>
-              <a:defRPr sz="1600">
-                <a:solidFill>
-                  <a:srgbClr val="595959"/>
-                </a:solidFill>
-                <a:latin typeface="Courier New"/>
-              </a:defRPr>
-            </a:pPr>
-            <a:r>
-              <a:t># Omit start or end</a:t>
-            </a:r>
-          </a:p>
-          <a:p>
-            <a:pPr>
-              <a:spcAft>
-                <a:spcPts val="200"/>
-              </a:spcAft>
-              <a:defRPr sz="1600">
-                <a:solidFill>
-                  <a:srgbClr val="595959"/>
-                </a:solidFill>
-                <a:latin typeface="Courier New"/>
-              </a:defRPr>
-            </a:pPr>
-            <a:r>
-              <a:t>print(numbers[:4])     # [0, 1, 2, 3] (from beginning)</a:t>
-            </a:r>
-          </a:p>
-          <a:p>
-            <a:pPr>
-              <a:spcAft>
-                <a:spcPts val="200"/>
-              </a:spcAft>
-              <a:defRPr sz="1600">
-                <a:solidFill>
-                  <a:srgbClr val="595959"/>
-                </a:solidFill>
-                <a:latin typeface="Courier New"/>
-              </a:defRPr>
-            </a:pPr>
-            <a:r>
-              <a:t>print(numbers[6:])     # [6, 7, 8, 9] (to end)</a:t>
-            </a:r>
-          </a:p>
-          <a:p>
-            <a:pPr>
-              <a:spcAft>
-                <a:spcPts val="200"/>
-              </a:spcAft>
-              <a:defRPr sz="1600">
-                <a:solidFill>
-                  <a:srgbClr val="595959"/>
-                </a:solidFill>
-                <a:latin typeface="Courier New"/>
-              </a:defRPr>
-            </a:pPr>
-          </a:p>
-          <a:p>
-            <a:pPr>
-              <a:spcAft>
-                <a:spcPts val="200"/>
-              </a:spcAft>
-              <a:defRPr sz="1600">
-                <a:solidFill>
-                  <a:srgbClr val="595959"/>
-                </a:solidFill>
-                <a:latin typeface="Courier New"/>
-              </a:defRPr>
-            </a:pPr>
-            <a:r>
-              <a:t># Step value [start:end:step]</a:t>
-            </a:r>
-          </a:p>
-          <a:p>
-            <a:pPr>
-              <a:spcAft>
-                <a:spcPts val="200"/>
-              </a:spcAft>
-              <a:defRPr sz="1600">
-                <a:solidFill>
-                  <a:srgbClr val="595959"/>
-                </a:solidFill>
-                <a:latin typeface="Courier New"/>
-              </a:defRPr>
-            </a:pPr>
-            <a:r>
-              <a:t>print(numbers[::2])    # [0, 2, 4, 6, 8] (every 2nd)</a:t>
-            </a:r>
-          </a:p>
-          <a:p>
-            <a:pPr>
-              <a:spcAft>
-                <a:spcPts val="200"/>
-              </a:spcAft>
-              <a:defRPr sz="1600">
-                <a:solidFill>
-                  <a:srgbClr val="595959"/>
-                </a:solidFill>
-                <a:latin typeface="Courier New"/>
-              </a:defRPr>
-            </a:pPr>
-            <a:r>
-              <a:t>print(numbers[1::2])   # [1, 3, 5, 7, 9] (odd numbers)</a:t>
-            </a:r>
-          </a:p>
-          <a:p>
-            <a:pPr>
-              <a:spcAft>
-                <a:spcPts val="200"/>
-              </a:spcAft>
-              <a:defRPr sz="1600">
-                <a:solidFill>
-                  <a:srgbClr val="595959"/>
-                </a:solidFill>
-                <a:latin typeface="Courier New"/>
-              </a:defRPr>
-            </a:pPr>
-            <a:r>
-              <a:t>print(numbers[::-1])   # [9, 8, 7...0] (reversed!)</a:t>
+              <a:defRPr sz="2000" b="1">
+                <a:solidFill>
+                  <a:srgbClr val="333333"/>
+                </a:solidFill>
+              </a:defRPr>
+            </a:pPr>
+            <a:r>
+              <a:t>⚠️ Important:Python lists start at index 0, not 1!</a:t>
             </a:r>
           </a:p>
         </p:txBody>
@@ -8959,14 +6666,6 @@
 <file path=ppt/slides/slide6.xml><?xml version="1.0" encoding="utf-8"?>
 <p:sld xmlns:a="http://schemas.openxmlformats.org/drawingml/2006/main" xmlns:p="http://schemas.openxmlformats.org/presentationml/2006/main" xmlns:r="http://schemas.openxmlformats.org/officeDocument/2006/relationships">
   <p:cSld>
-    <p:bg>
-      <p:bgPr>
-        <a:solidFill>
-          <a:srgbClr val="FFFFFF"/>
-        </a:solidFill>
-        <a:effectLst/>
-      </p:bgPr>
-    </p:bg>
     <p:spTree>
       <p:nvGrpSpPr>
         <p:cNvPr id="1" name=""/>
@@ -8983,13 +6682,13 @@
         <p:spPr>
           <a:xfrm>
             <a:off x="0" y="0"/>
-            <a:ext cx="9144000" cy="914400"/>
+            <a:ext cx="12191695" cy="6858000"/>
           </a:xfrm>
           <a:prstGeom prst="rect">
             <a:avLst/>
           </a:prstGeom>
           <a:solidFill>
-            <a:srgbClr val="29629B"/>
+            <a:srgbClr val="FFFFFF"/>
           </a:solidFill>
           <a:ln>
             <a:noFill/>
@@ -9019,95 +6718,23 @@
       </p:sp>
       <p:sp>
         <p:nvSpPr>
-          <p:cNvPr id="3" name="TextBox 2"/>
-          <p:cNvSpPr txBox="1"/>
-          <p:nvPr/>
-        </p:nvSpPr>
-        <p:spPr>
-          <a:xfrm>
-            <a:off x="457200" y="137160"/>
-            <a:ext cx="8229600" cy="640080"/>
-          </a:xfrm>
-          <a:prstGeom prst="rect">
-            <a:avLst/>
-          </a:prstGeom>
-          <a:noFill/>
-        </p:spPr>
-        <p:txBody>
-          <a:bodyPr wrap="none">
-            <a:spAutoFit/>
-          </a:bodyPr>
-          <a:lstStyle/>
-          <a:p>
-            <a:pPr>
-              <a:defRPr sz="4000" b="1">
-                <a:solidFill>
-                  <a:srgbClr val="FFFFFF"/>
-                </a:solidFill>
-              </a:defRPr>
-            </a:pPr>
-            <a:r>
-              <a:t>Adding Items</a:t>
-            </a:r>
-          </a:p>
-        </p:txBody>
-      </p:sp>
-      <p:sp>
-        <p:nvSpPr>
-          <p:cNvPr id="4" name="TextBox 3"/>
-          <p:cNvSpPr txBox="1"/>
-          <p:nvPr/>
-        </p:nvSpPr>
-        <p:spPr>
-          <a:xfrm>
-            <a:off x="640080" y="1371600"/>
-            <a:ext cx="7863840" cy="914400"/>
-          </a:xfrm>
-          <a:prstGeom prst="rect">
-            <a:avLst/>
-          </a:prstGeom>
-          <a:noFill/>
-        </p:spPr>
-        <p:txBody>
-          <a:bodyPr wrap="square">
-            <a:spAutoFit/>
-          </a:bodyPr>
-          <a:lstStyle/>
-          <a:p>
-            <a:pPr>
-              <a:defRPr sz="1800">
-                <a:solidFill>
-                  <a:srgbClr val="595959"/>
-                </a:solidFill>
-              </a:defRPr>
-            </a:pPr>
-            <a:r>
-              <a:t>Multiple ways to add items to a list</a:t>
-            </a:r>
-          </a:p>
-        </p:txBody>
-      </p:sp>
-      <p:sp>
-        <p:nvSpPr>
-          <p:cNvPr id="5" name="Rectangle 4"/>
+          <p:cNvPr id="3" name="Rectangle 2"/>
           <p:cNvSpPr/>
           <p:nvPr/>
         </p:nvSpPr>
         <p:spPr>
           <a:xfrm>
-            <a:off x="640080" y="2468880"/>
-            <a:ext cx="7863840" cy="4389120"/>
+            <a:off x="0" y="0"/>
+            <a:ext cx="12191695" cy="137160"/>
           </a:xfrm>
           <a:prstGeom prst="rect">
             <a:avLst/>
           </a:prstGeom>
           <a:solidFill>
-            <a:srgbClr val="F8F9FA"/>
+            <a:srgbClr val="0066CC"/>
           </a:solidFill>
-          <a:ln w="25400">
-            <a:solidFill>
-              <a:srgbClr val="6497CA"/>
-            </a:solidFill>
+          <a:ln>
+            <a:noFill/>
           </a:ln>
         </p:spPr>
         <p:style>
@@ -9134,14 +6761,14 @@
       </p:sp>
       <p:sp>
         <p:nvSpPr>
-          <p:cNvPr id="6" name="TextBox 5"/>
+          <p:cNvPr id="4" name="TextBox 3"/>
           <p:cNvSpPr txBox="1"/>
           <p:nvPr/>
         </p:nvSpPr>
         <p:spPr>
           <a:xfrm>
-            <a:off x="914400" y="2651760"/>
-            <a:ext cx="7315200" cy="4023359"/>
+            <a:off x="457200" y="365760"/>
+            <a:ext cx="10972800" cy="731520"/>
           </a:xfrm>
           <a:prstGeom prst="rect">
             <a:avLst/>
@@ -9155,246 +6782,140 @@
           <a:lstStyle/>
           <a:p>
             <a:pPr>
-              <a:spcAft>
-                <a:spcPts val="200"/>
-              </a:spcAft>
-              <a:defRPr sz="1600">
-                <a:solidFill>
-                  <a:srgbClr val="595959"/>
-                </a:solidFill>
-                <a:latin typeface="Courier New"/>
-              </a:defRPr>
-            </a:pPr>
-            <a:r>
-              <a:t>fruits = ['apple', 'banana']</a:t>
-            </a:r>
-          </a:p>
+              <a:defRPr sz="4000" b="1">
+                <a:solidFill>
+                  <a:srgbClr val="003366"/>
+                </a:solidFill>
+              </a:defRPr>
+            </a:pPr>
+            <a:r>
+              <a:t>Negative Indices ⬅️</a:t>
+            </a:r>
+          </a:p>
+        </p:txBody>
+      </p:sp>
+      <p:sp>
+        <p:nvSpPr>
+          <p:cNvPr id="5" name="Rectangle 4"/>
+          <p:cNvSpPr/>
+          <p:nvPr/>
+        </p:nvSpPr>
+        <p:spPr>
+          <a:xfrm>
+            <a:off x="457200" y="1005840"/>
+            <a:ext cx="1828800" cy="45720"/>
+          </a:xfrm>
+          <a:prstGeom prst="rect">
+            <a:avLst/>
+          </a:prstGeom>
+          <a:solidFill>
+            <a:srgbClr val="0066CC"/>
+          </a:solidFill>
+          <a:ln>
+            <a:noFill/>
+          </a:ln>
+        </p:spPr>
+        <p:style>
+          <a:lnRef idx="1">
+            <a:schemeClr val="accent1"/>
+          </a:lnRef>
+          <a:fillRef idx="3">
+            <a:schemeClr val="accent1"/>
+          </a:fillRef>
+          <a:effectRef idx="2">
+            <a:schemeClr val="accent1"/>
+          </a:effectRef>
+          <a:fontRef idx="minor">
+            <a:schemeClr val="lt1"/>
+          </a:fontRef>
+        </p:style>
+        <p:txBody>
+          <a:bodyPr rtlCol="0" anchor="ctr"/>
+          <a:lstStyle/>
+          <a:p>
+            <a:pPr algn="ctr"/>
+          </a:p>
+        </p:txBody>
+      </p:sp>
+      <p:sp>
+        <p:nvSpPr>
+          <p:cNvPr id="6" name="TextBox 5"/>
+          <p:cNvSpPr txBox="1"/>
+          <p:nvPr/>
+        </p:nvSpPr>
+        <p:spPr>
+          <a:xfrm>
+            <a:off x="640080" y="1371600"/>
+            <a:ext cx="10789920" cy="4572000"/>
+          </a:xfrm>
+          <a:prstGeom prst="rect">
+            <a:avLst/>
+          </a:prstGeom>
+          <a:noFill/>
+        </p:spPr>
+        <p:txBody>
+          <a:bodyPr wrap="square">
+            <a:spAutoFit/>
+          </a:bodyPr>
+          <a:lstStyle/>
           <a:p>
             <a:pPr>
               <a:spcAft>
-                <a:spcPts val="200"/>
+                <a:spcPts val="800"/>
               </a:spcAft>
-              <a:defRPr sz="1600">
-                <a:solidFill>
-                  <a:srgbClr val="595959"/>
-                </a:solidFill>
-                <a:latin typeface="Courier New"/>
-              </a:defRPr>
-            </a:pPr>
+              <a:defRPr sz="2000" b="1">
+                <a:solidFill>
+                  <a:srgbClr val="333333"/>
+                </a:solidFill>
+              </a:defRPr>
+            </a:pPr>
+            <a:r>
+              <a:t>Access items from the end of the list using negative numbers</a:t>
+            </a:r>
           </a:p>
           <a:p>
             <a:pPr>
               <a:spcAft>
-                <a:spcPts val="200"/>
+                <a:spcPts val="800"/>
               </a:spcAft>
-              <a:defRPr sz="1600">
-                <a:solidFill>
-                  <a:srgbClr val="595959"/>
-                </a:solidFill>
-                <a:latin typeface="Courier New"/>
-              </a:defRPr>
-            </a:pPr>
-            <a:r>
-              <a:t># append() - add to end</a:t>
+              <a:defRPr sz="2000" b="1">
+                <a:solidFill>
+                  <a:srgbClr val="333333"/>
+                </a:solidFill>
+              </a:defRPr>
+            </a:pPr>
+            <a:r>
+              <a:t>Negative Indices (from end)</a:t>
             </a:r>
           </a:p>
           <a:p>
             <a:pPr>
               <a:spcAft>
-                <a:spcPts val="200"/>
+                <a:spcPts val="800"/>
               </a:spcAft>
-              <a:defRPr sz="1600">
-                <a:solidFill>
-                  <a:srgbClr val="595959"/>
-                </a:solidFill>
-                <a:latin typeface="Courier New"/>
-              </a:defRPr>
-            </a:pPr>
-            <a:r>
-              <a:t>fruits.append('cherry')</a:t>
+              <a:defRPr sz="2000" b="1">
+                <a:solidFill>
+                  <a:srgbClr val="333333"/>
+                </a:solidFill>
+              </a:defRPr>
+            </a:pPr>
+            <a:r>
+              <a:t>Examples:</a:t>
             </a:r>
           </a:p>
           <a:p>
             <a:pPr>
               <a:spcAft>
-                <a:spcPts val="200"/>
+                <a:spcPts val="800"/>
               </a:spcAft>
-              <a:defRPr sz="1600">
-                <a:solidFill>
-                  <a:srgbClr val="595959"/>
-                </a:solidFill>
-                <a:latin typeface="Courier New"/>
-              </a:defRPr>
-            </a:pPr>
-            <a:r>
-              <a:t># ['apple', 'banana', 'cherry']</a:t>
-            </a:r>
-          </a:p>
-          <a:p>
-            <a:pPr>
-              <a:spcAft>
-                <a:spcPts val="200"/>
-              </a:spcAft>
-              <a:defRPr sz="1600">
-                <a:solidFill>
-                  <a:srgbClr val="595959"/>
-                </a:solidFill>
-                <a:latin typeface="Courier New"/>
-              </a:defRPr>
-            </a:pPr>
-          </a:p>
-          <a:p>
-            <a:pPr>
-              <a:spcAft>
-                <a:spcPts val="200"/>
-              </a:spcAft>
-              <a:defRPr sz="1600">
-                <a:solidFill>
-                  <a:srgbClr val="595959"/>
-                </a:solidFill>
-                <a:latin typeface="Courier New"/>
-              </a:defRPr>
-            </a:pPr>
-            <a:r>
-              <a:t># insert() - add at specific position</a:t>
-            </a:r>
-          </a:p>
-          <a:p>
-            <a:pPr>
-              <a:spcAft>
-                <a:spcPts val="200"/>
-              </a:spcAft>
-              <a:defRPr sz="1600">
-                <a:solidFill>
-                  <a:srgbClr val="595959"/>
-                </a:solidFill>
-                <a:latin typeface="Courier New"/>
-              </a:defRPr>
-            </a:pPr>
-            <a:r>
-              <a:t>fruits.insert(1, 'orange')</a:t>
-            </a:r>
-          </a:p>
-          <a:p>
-            <a:pPr>
-              <a:spcAft>
-                <a:spcPts val="200"/>
-              </a:spcAft>
-              <a:defRPr sz="1600">
-                <a:solidFill>
-                  <a:srgbClr val="595959"/>
-                </a:solidFill>
-                <a:latin typeface="Courier New"/>
-              </a:defRPr>
-            </a:pPr>
-            <a:r>
-              <a:t># ['apple', 'orange', 'banana', 'cherry']</a:t>
-            </a:r>
-          </a:p>
-          <a:p>
-            <a:pPr>
-              <a:spcAft>
-                <a:spcPts val="200"/>
-              </a:spcAft>
-              <a:defRPr sz="1600">
-                <a:solidFill>
-                  <a:srgbClr val="595959"/>
-                </a:solidFill>
-                <a:latin typeface="Courier New"/>
-              </a:defRPr>
-            </a:pPr>
-          </a:p>
-          <a:p>
-            <a:pPr>
-              <a:spcAft>
-                <a:spcPts val="200"/>
-              </a:spcAft>
-              <a:defRPr sz="1600">
-                <a:solidFill>
-                  <a:srgbClr val="595959"/>
-                </a:solidFill>
-                <a:latin typeface="Courier New"/>
-              </a:defRPr>
-            </a:pPr>
-            <a:r>
-              <a:t># extend() - add multiple items</a:t>
-            </a:r>
-          </a:p>
-          <a:p>
-            <a:pPr>
-              <a:spcAft>
-                <a:spcPts val="200"/>
-              </a:spcAft>
-              <a:defRPr sz="1600">
-                <a:solidFill>
-                  <a:srgbClr val="595959"/>
-                </a:solidFill>
-                <a:latin typeface="Courier New"/>
-              </a:defRPr>
-            </a:pPr>
-            <a:r>
-              <a:t>fruits.extend(['grape', 'mango'])</a:t>
-            </a:r>
-          </a:p>
-          <a:p>
-            <a:pPr>
-              <a:spcAft>
-                <a:spcPts val="200"/>
-              </a:spcAft>
-              <a:defRPr sz="1600">
-                <a:solidFill>
-                  <a:srgbClr val="595959"/>
-                </a:solidFill>
-                <a:latin typeface="Courier New"/>
-              </a:defRPr>
-            </a:pPr>
-            <a:r>
-              <a:t># ['apple', 'orange', 'banana', 'cherry', 'grape', 'mango']</a:t>
-            </a:r>
-          </a:p>
-          <a:p>
-            <a:pPr>
-              <a:spcAft>
-                <a:spcPts val="200"/>
-              </a:spcAft>
-              <a:defRPr sz="1600">
-                <a:solidFill>
-                  <a:srgbClr val="595959"/>
-                </a:solidFill>
-                <a:latin typeface="Courier New"/>
-              </a:defRPr>
-            </a:pPr>
-          </a:p>
-          <a:p>
-            <a:pPr>
-              <a:spcAft>
-                <a:spcPts val="200"/>
-              </a:spcAft>
-              <a:defRPr sz="1600">
-                <a:solidFill>
-                  <a:srgbClr val="595959"/>
-                </a:solidFill>
-                <a:latin typeface="Courier New"/>
-              </a:defRPr>
-            </a:pPr>
-            <a:r>
-              <a:t># + operator - create new list</a:t>
-            </a:r>
-          </a:p>
-          <a:p>
-            <a:pPr>
-              <a:spcAft>
-                <a:spcPts val="200"/>
-              </a:spcAft>
-              <a:defRPr sz="1600">
-                <a:solidFill>
-                  <a:srgbClr val="595959"/>
-                </a:solidFill>
-                <a:latin typeface="Courier New"/>
-              </a:defRPr>
-            </a:pPr>
-            <a:r>
-              <a:t>more_fruits = fruits + ['kiwi', 'peach']</a:t>
+              <a:defRPr sz="2000" b="1">
+                <a:solidFill>
+                  <a:srgbClr val="333333"/>
+                </a:solidFill>
+              </a:defRPr>
+            </a:pPr>
+            <a:r>
+              <a:t>💡 Tip:Use -1 to always get the last item!</a:t>
             </a:r>
           </a:p>
         </p:txBody>
@@ -9410,14 +6931,6 @@
 <file path=ppt/slides/slide7.xml><?xml version="1.0" encoding="utf-8"?>
 <p:sld xmlns:a="http://schemas.openxmlformats.org/drawingml/2006/main" xmlns:p="http://schemas.openxmlformats.org/presentationml/2006/main" xmlns:r="http://schemas.openxmlformats.org/officeDocument/2006/relationships">
   <p:cSld>
-    <p:bg>
-      <p:bgPr>
-        <a:solidFill>
-          <a:srgbClr val="FFFFFF"/>
-        </a:solidFill>
-        <a:effectLst/>
-      </p:bgPr>
-    </p:bg>
     <p:spTree>
       <p:nvGrpSpPr>
         <p:cNvPr id="1" name=""/>
@@ -9434,13 +6947,13 @@
         <p:spPr>
           <a:xfrm>
             <a:off x="0" y="0"/>
-            <a:ext cx="9144000" cy="914400"/>
+            <a:ext cx="12191695" cy="6858000"/>
           </a:xfrm>
           <a:prstGeom prst="rect">
             <a:avLst/>
           </a:prstGeom>
           <a:solidFill>
-            <a:srgbClr val="29629B"/>
+            <a:srgbClr val="FFFFFF"/>
           </a:solidFill>
           <a:ln>
             <a:noFill/>
@@ -9470,95 +6983,23 @@
       </p:sp>
       <p:sp>
         <p:nvSpPr>
-          <p:cNvPr id="3" name="TextBox 2"/>
-          <p:cNvSpPr txBox="1"/>
-          <p:nvPr/>
-        </p:nvSpPr>
-        <p:spPr>
-          <a:xfrm>
-            <a:off x="457200" y="137160"/>
-            <a:ext cx="8229600" cy="640080"/>
-          </a:xfrm>
-          <a:prstGeom prst="rect">
-            <a:avLst/>
-          </a:prstGeom>
-          <a:noFill/>
-        </p:spPr>
-        <p:txBody>
-          <a:bodyPr wrap="none">
-            <a:spAutoFit/>
-          </a:bodyPr>
-          <a:lstStyle/>
-          <a:p>
-            <a:pPr>
-              <a:defRPr sz="4000" b="1">
-                <a:solidFill>
-                  <a:srgbClr val="FFFFFF"/>
-                </a:solidFill>
-              </a:defRPr>
-            </a:pPr>
-            <a:r>
-              <a:t>Removing Items</a:t>
-            </a:r>
-          </a:p>
-        </p:txBody>
-      </p:sp>
-      <p:sp>
-        <p:nvSpPr>
-          <p:cNvPr id="4" name="TextBox 3"/>
-          <p:cNvSpPr txBox="1"/>
-          <p:nvPr/>
-        </p:nvSpPr>
-        <p:spPr>
-          <a:xfrm>
-            <a:off x="640080" y="1371600"/>
-            <a:ext cx="7863840" cy="914400"/>
-          </a:xfrm>
-          <a:prstGeom prst="rect">
-            <a:avLst/>
-          </a:prstGeom>
-          <a:noFill/>
-        </p:spPr>
-        <p:txBody>
-          <a:bodyPr wrap="square">
-            <a:spAutoFit/>
-          </a:bodyPr>
-          <a:lstStyle/>
-          <a:p>
-            <a:pPr>
-              <a:defRPr sz="1800">
-                <a:solidFill>
-                  <a:srgbClr val="595959"/>
-                </a:solidFill>
-              </a:defRPr>
-            </a:pPr>
-            <a:r>
-              <a:t>Different methods to remove items from a list</a:t>
-            </a:r>
-          </a:p>
-        </p:txBody>
-      </p:sp>
-      <p:sp>
-        <p:nvSpPr>
-          <p:cNvPr id="5" name="Rectangle 4"/>
+          <p:cNvPr id="3" name="Rectangle 2"/>
           <p:cNvSpPr/>
           <p:nvPr/>
         </p:nvSpPr>
         <p:spPr>
           <a:xfrm>
-            <a:off x="640080" y="2468880"/>
-            <a:ext cx="7863840" cy="4389120"/>
+            <a:off x="0" y="0"/>
+            <a:ext cx="12191695" cy="137160"/>
           </a:xfrm>
           <a:prstGeom prst="rect">
             <a:avLst/>
           </a:prstGeom>
           <a:solidFill>
-            <a:srgbClr val="F8F9FA"/>
+            <a:srgbClr val="0066CC"/>
           </a:solidFill>
-          <a:ln w="25400">
-            <a:solidFill>
-              <a:srgbClr val="6497CA"/>
-            </a:solidFill>
+          <a:ln>
+            <a:noFill/>
           </a:ln>
         </p:spPr>
         <p:style>
@@ -9585,14 +7026,14 @@
       </p:sp>
       <p:sp>
         <p:nvSpPr>
-          <p:cNvPr id="6" name="TextBox 5"/>
+          <p:cNvPr id="4" name="TextBox 3"/>
           <p:cNvSpPr txBox="1"/>
           <p:nvPr/>
         </p:nvSpPr>
         <p:spPr>
           <a:xfrm>
-            <a:off x="914400" y="2651760"/>
-            <a:ext cx="7315200" cy="4023359"/>
+            <a:off x="457200" y="365760"/>
+            <a:ext cx="10972800" cy="731520"/>
           </a:xfrm>
           <a:prstGeom prst="rect">
             <a:avLst/>
@@ -9606,291 +7047,125 @@
           <a:lstStyle/>
           <a:p>
             <a:pPr>
-              <a:spcAft>
-                <a:spcPts val="200"/>
-              </a:spcAft>
-              <a:defRPr sz="1600">
-                <a:solidFill>
-                  <a:srgbClr val="595959"/>
-                </a:solidFill>
-                <a:latin typeface="Courier New"/>
-              </a:defRPr>
-            </a:pPr>
-            <a:r>
-              <a:t>fruits = ['apple', 'banana', 'cherry', 'banana', 'date']</a:t>
-            </a:r>
-          </a:p>
+              <a:defRPr sz="4000" b="1">
+                <a:solidFill>
+                  <a:srgbClr val="003366"/>
+                </a:solidFill>
+              </a:defRPr>
+            </a:pPr>
+            <a:r>
+              <a:t>Slicing Lists ✂️</a:t>
+            </a:r>
+          </a:p>
+        </p:txBody>
+      </p:sp>
+      <p:sp>
+        <p:nvSpPr>
+          <p:cNvPr id="5" name="Rectangle 4"/>
+          <p:cNvSpPr/>
+          <p:nvPr/>
+        </p:nvSpPr>
+        <p:spPr>
+          <a:xfrm>
+            <a:off x="457200" y="1005840"/>
+            <a:ext cx="1828800" cy="45720"/>
+          </a:xfrm>
+          <a:prstGeom prst="rect">
+            <a:avLst/>
+          </a:prstGeom>
+          <a:solidFill>
+            <a:srgbClr val="0066CC"/>
+          </a:solidFill>
+          <a:ln>
+            <a:noFill/>
+          </a:ln>
+        </p:spPr>
+        <p:style>
+          <a:lnRef idx="1">
+            <a:schemeClr val="accent1"/>
+          </a:lnRef>
+          <a:fillRef idx="3">
+            <a:schemeClr val="accent1"/>
+          </a:fillRef>
+          <a:effectRef idx="2">
+            <a:schemeClr val="accent1"/>
+          </a:effectRef>
+          <a:fontRef idx="minor">
+            <a:schemeClr val="lt1"/>
+          </a:fontRef>
+        </p:style>
+        <p:txBody>
+          <a:bodyPr rtlCol="0" anchor="ctr"/>
+          <a:lstStyle/>
+          <a:p>
+            <a:pPr algn="ctr"/>
+          </a:p>
+        </p:txBody>
+      </p:sp>
+      <p:sp>
+        <p:nvSpPr>
+          <p:cNvPr id="6" name="TextBox 5"/>
+          <p:cNvSpPr txBox="1"/>
+          <p:nvPr/>
+        </p:nvSpPr>
+        <p:spPr>
+          <a:xfrm>
+            <a:off x="640080" y="1371600"/>
+            <a:ext cx="10789920" cy="4572000"/>
+          </a:xfrm>
+          <a:prstGeom prst="rect">
+            <a:avLst/>
+          </a:prstGeom>
+          <a:noFill/>
+        </p:spPr>
+        <p:txBody>
+          <a:bodyPr wrap="square">
+            <a:spAutoFit/>
+          </a:bodyPr>
+          <a:lstStyle/>
           <a:p>
             <a:pPr>
               <a:spcAft>
-                <a:spcPts val="200"/>
+                <a:spcPts val="800"/>
               </a:spcAft>
-              <a:defRPr sz="1600">
-                <a:solidFill>
-                  <a:srgbClr val="595959"/>
-                </a:solidFill>
-                <a:latin typeface="Courier New"/>
-              </a:defRPr>
-            </a:pPr>
+              <a:defRPr sz="2000" b="1">
+                <a:solidFill>
+                  <a:srgbClr val="333333"/>
+                </a:solidFill>
+              </a:defRPr>
+            </a:pPr>
+            <a:r>
+              <a:t>Extract a portion of a list using [start:end]</a:t>
+            </a:r>
           </a:p>
           <a:p>
             <a:pPr>
               <a:spcAft>
-                <a:spcPts val="200"/>
+                <a:spcPts val="800"/>
               </a:spcAft>
-              <a:defRPr sz="1600">
-                <a:solidFill>
-                  <a:srgbClr val="595959"/>
-                </a:solidFill>
-                <a:latin typeface="Courier New"/>
-              </a:defRPr>
-            </a:pPr>
-            <a:r>
-              <a:t># remove() - remove first occurrence</a:t>
+              <a:defRPr sz="2000" b="1">
+                <a:solidFill>
+                  <a:srgbClr val="333333"/>
+                </a:solidFill>
+              </a:defRPr>
+            </a:pPr>
+            <a:r>
+              <a:t>Syntax: list[start:end]</a:t>
             </a:r>
           </a:p>
           <a:p>
             <a:pPr>
               <a:spcAft>
-                <a:spcPts val="200"/>
+                <a:spcPts val="800"/>
               </a:spcAft>
-              <a:defRPr sz="1600">
-                <a:solidFill>
-                  <a:srgbClr val="595959"/>
-                </a:solidFill>
-                <a:latin typeface="Courier New"/>
-              </a:defRPr>
-            </a:pPr>
-            <a:r>
-              <a:t>fruits.remove('banana')</a:t>
-            </a:r>
-          </a:p>
-          <a:p>
-            <a:pPr>
-              <a:spcAft>
-                <a:spcPts val="200"/>
-              </a:spcAft>
-              <a:defRPr sz="1600">
-                <a:solidFill>
-                  <a:srgbClr val="595959"/>
-                </a:solidFill>
-                <a:latin typeface="Courier New"/>
-              </a:defRPr>
-            </a:pPr>
-            <a:r>
-              <a:t># ['apple', 'cherry', 'banana', 'date']</a:t>
-            </a:r>
-          </a:p>
-          <a:p>
-            <a:pPr>
-              <a:spcAft>
-                <a:spcPts val="200"/>
-              </a:spcAft>
-              <a:defRPr sz="1600">
-                <a:solidFill>
-                  <a:srgbClr val="595959"/>
-                </a:solidFill>
-                <a:latin typeface="Courier New"/>
-              </a:defRPr>
-            </a:pPr>
-          </a:p>
-          <a:p>
-            <a:pPr>
-              <a:spcAft>
-                <a:spcPts val="200"/>
-              </a:spcAft>
-              <a:defRPr sz="1600">
-                <a:solidFill>
-                  <a:srgbClr val="595959"/>
-                </a:solidFill>
-                <a:latin typeface="Courier New"/>
-              </a:defRPr>
-            </a:pPr>
-            <a:r>
-              <a:t># pop() - remove and return last item</a:t>
-            </a:r>
-          </a:p>
-          <a:p>
-            <a:pPr>
-              <a:spcAft>
-                <a:spcPts val="200"/>
-              </a:spcAft>
-              <a:defRPr sz="1600">
-                <a:solidFill>
-                  <a:srgbClr val="595959"/>
-                </a:solidFill>
-                <a:latin typeface="Courier New"/>
-              </a:defRPr>
-            </a:pPr>
-            <a:r>
-              <a:t>last = fruits.pop()  # 'date'</a:t>
-            </a:r>
-          </a:p>
-          <a:p>
-            <a:pPr>
-              <a:spcAft>
-                <a:spcPts val="200"/>
-              </a:spcAft>
-              <a:defRPr sz="1600">
-                <a:solidFill>
-                  <a:srgbClr val="595959"/>
-                </a:solidFill>
-                <a:latin typeface="Courier New"/>
-              </a:defRPr>
-            </a:pPr>
-            <a:r>
-              <a:t># ['apple', 'cherry', 'banana']</a:t>
-            </a:r>
-          </a:p>
-          <a:p>
-            <a:pPr>
-              <a:spcAft>
-                <a:spcPts val="200"/>
-              </a:spcAft>
-              <a:defRPr sz="1600">
-                <a:solidFill>
-                  <a:srgbClr val="595959"/>
-                </a:solidFill>
-                <a:latin typeface="Courier New"/>
-              </a:defRPr>
-            </a:pPr>
-          </a:p>
-          <a:p>
-            <a:pPr>
-              <a:spcAft>
-                <a:spcPts val="200"/>
-              </a:spcAft>
-              <a:defRPr sz="1600">
-                <a:solidFill>
-                  <a:srgbClr val="595959"/>
-                </a:solidFill>
-                <a:latin typeface="Courier New"/>
-              </a:defRPr>
-            </a:pPr>
-            <a:r>
-              <a:t># pop(index) - remove at specific position</a:t>
-            </a:r>
-          </a:p>
-          <a:p>
-            <a:pPr>
-              <a:spcAft>
-                <a:spcPts val="200"/>
-              </a:spcAft>
-              <a:defRPr sz="1600">
-                <a:solidFill>
-                  <a:srgbClr val="595959"/>
-                </a:solidFill>
-                <a:latin typeface="Courier New"/>
-              </a:defRPr>
-            </a:pPr>
-            <a:r>
-              <a:t>second = fruits.pop(1)  # 'cherry'</a:t>
-            </a:r>
-          </a:p>
-          <a:p>
-            <a:pPr>
-              <a:spcAft>
-                <a:spcPts val="200"/>
-              </a:spcAft>
-              <a:defRPr sz="1600">
-                <a:solidFill>
-                  <a:srgbClr val="595959"/>
-                </a:solidFill>
-                <a:latin typeface="Courier New"/>
-              </a:defRPr>
-            </a:pPr>
-            <a:r>
-              <a:t># ['apple', 'banana']</a:t>
-            </a:r>
-          </a:p>
-          <a:p>
-            <a:pPr>
-              <a:spcAft>
-                <a:spcPts val="200"/>
-              </a:spcAft>
-              <a:defRPr sz="1600">
-                <a:solidFill>
-                  <a:srgbClr val="595959"/>
-                </a:solidFill>
-                <a:latin typeface="Courier New"/>
-              </a:defRPr>
-            </a:pPr>
-          </a:p>
-          <a:p>
-            <a:pPr>
-              <a:spcAft>
-                <a:spcPts val="200"/>
-              </a:spcAft>
-              <a:defRPr sz="1600">
-                <a:solidFill>
-                  <a:srgbClr val="595959"/>
-                </a:solidFill>
-                <a:latin typeface="Courier New"/>
-              </a:defRPr>
-            </a:pPr>
-            <a:r>
-              <a:t># del - delete by index or slice</a:t>
-            </a:r>
-          </a:p>
-          <a:p>
-            <a:pPr>
-              <a:spcAft>
-                <a:spcPts val="200"/>
-              </a:spcAft>
-              <a:defRPr sz="1600">
-                <a:solidFill>
-                  <a:srgbClr val="595959"/>
-                </a:solidFill>
-                <a:latin typeface="Courier New"/>
-              </a:defRPr>
-            </a:pPr>
-            <a:r>
-              <a:t>del fruits[0]  # ['banana']</a:t>
-            </a:r>
-          </a:p>
-          <a:p>
-            <a:pPr>
-              <a:spcAft>
-                <a:spcPts val="200"/>
-              </a:spcAft>
-              <a:defRPr sz="1600">
-                <a:solidFill>
-                  <a:srgbClr val="595959"/>
-                </a:solidFill>
-                <a:latin typeface="Courier New"/>
-              </a:defRPr>
-            </a:pPr>
-          </a:p>
-          <a:p>
-            <a:pPr>
-              <a:spcAft>
-                <a:spcPts val="200"/>
-              </a:spcAft>
-              <a:defRPr sz="1600">
-                <a:solidFill>
-                  <a:srgbClr val="595959"/>
-                </a:solidFill>
-                <a:latin typeface="Courier New"/>
-              </a:defRPr>
-            </a:pPr>
-            <a:r>
-              <a:t># clear() - remove all items</a:t>
-            </a:r>
-          </a:p>
-          <a:p>
-            <a:pPr>
-              <a:spcAft>
-                <a:spcPts val="200"/>
-              </a:spcAft>
-              <a:defRPr sz="1600">
-                <a:solidFill>
-                  <a:srgbClr val="595959"/>
-                </a:solidFill>
-                <a:latin typeface="Courier New"/>
-              </a:defRPr>
-            </a:pPr>
-            <a:r>
-              <a:t>fruits.clear()  # []</a:t>
+              <a:defRPr sz="2000" b="1">
+                <a:solidFill>
+                  <a:srgbClr val="333333"/>
+                </a:solidFill>
+              </a:defRPr>
+            </a:pPr>
+            <a:r>
+              <a:t>Note:End index is NOT included in the slice</a:t>
             </a:r>
           </a:p>
         </p:txBody>
@@ -9906,14 +7181,6 @@
 <file path=ppt/slides/slide8.xml><?xml version="1.0" encoding="utf-8"?>
 <p:sld xmlns:a="http://schemas.openxmlformats.org/drawingml/2006/main" xmlns:p="http://schemas.openxmlformats.org/presentationml/2006/main" xmlns:r="http://schemas.openxmlformats.org/officeDocument/2006/relationships">
   <p:cSld>
-    <p:bg>
-      <p:bgPr>
-        <a:solidFill>
-          <a:srgbClr val="FFFFFF"/>
-        </a:solidFill>
-        <a:effectLst/>
-      </p:bgPr>
-    </p:bg>
     <p:spTree>
       <p:nvGrpSpPr>
         <p:cNvPr id="1" name=""/>
@@ -9930,13 +7197,13 @@
         <p:spPr>
           <a:xfrm>
             <a:off x="0" y="0"/>
-            <a:ext cx="9144000" cy="914400"/>
+            <a:ext cx="12191695" cy="6858000"/>
           </a:xfrm>
           <a:prstGeom prst="rect">
             <a:avLst/>
           </a:prstGeom>
           <a:solidFill>
-            <a:srgbClr val="29629B"/>
+            <a:srgbClr val="FFFFFF"/>
           </a:solidFill>
           <a:ln>
             <a:noFill/>
@@ -9966,95 +7233,23 @@
       </p:sp>
       <p:sp>
         <p:nvSpPr>
-          <p:cNvPr id="3" name="TextBox 2"/>
-          <p:cNvSpPr txBox="1"/>
-          <p:nvPr/>
-        </p:nvSpPr>
-        <p:spPr>
-          <a:xfrm>
-            <a:off x="457200" y="137160"/>
-            <a:ext cx="8229600" cy="640080"/>
-          </a:xfrm>
-          <a:prstGeom prst="rect">
-            <a:avLst/>
-          </a:prstGeom>
-          <a:noFill/>
-        </p:spPr>
-        <p:txBody>
-          <a:bodyPr wrap="none">
-            <a:spAutoFit/>
-          </a:bodyPr>
-          <a:lstStyle/>
-          <a:p>
-            <a:pPr>
-              <a:defRPr sz="4000" b="1">
-                <a:solidFill>
-                  <a:srgbClr val="FFFFFF"/>
-                </a:solidFill>
-              </a:defRPr>
-            </a:pPr>
-            <a:r>
-              <a:t>Organizing Lists</a:t>
-            </a:r>
-          </a:p>
-        </p:txBody>
-      </p:sp>
-      <p:sp>
-        <p:nvSpPr>
-          <p:cNvPr id="4" name="TextBox 3"/>
-          <p:cNvSpPr txBox="1"/>
-          <p:nvPr/>
-        </p:nvSpPr>
-        <p:spPr>
-          <a:xfrm>
-            <a:off x="640080" y="1371600"/>
-            <a:ext cx="7863840" cy="914400"/>
-          </a:xfrm>
-          <a:prstGeom prst="rect">
-            <a:avLst/>
-          </a:prstGeom>
-          <a:noFill/>
-        </p:spPr>
-        <p:txBody>
-          <a:bodyPr wrap="square">
-            <a:spAutoFit/>
-          </a:bodyPr>
-          <a:lstStyle/>
-          <a:p>
-            <a:pPr>
-              <a:defRPr sz="1800">
-                <a:solidFill>
-                  <a:srgbClr val="595959"/>
-                </a:solidFill>
-              </a:defRPr>
-            </a:pPr>
-            <a:r>
-              <a:t>Sort and reverse lists</a:t>
-            </a:r>
-          </a:p>
-        </p:txBody>
-      </p:sp>
-      <p:sp>
-        <p:nvSpPr>
-          <p:cNvPr id="5" name="Rectangle 4"/>
+          <p:cNvPr id="3" name="Rectangle 2"/>
           <p:cNvSpPr/>
           <p:nvPr/>
         </p:nvSpPr>
         <p:spPr>
           <a:xfrm>
-            <a:off x="640080" y="2468880"/>
-            <a:ext cx="7863840" cy="4389120"/>
+            <a:off x="0" y="0"/>
+            <a:ext cx="12191695" cy="137160"/>
           </a:xfrm>
           <a:prstGeom prst="rect">
             <a:avLst/>
           </a:prstGeom>
           <a:solidFill>
-            <a:srgbClr val="F8F9FA"/>
+            <a:srgbClr val="0066CC"/>
           </a:solidFill>
-          <a:ln w="25400">
-            <a:solidFill>
-              <a:srgbClr val="6497CA"/>
-            </a:solidFill>
+          <a:ln>
+            <a:noFill/>
           </a:ln>
         </p:spPr>
         <p:style>
@@ -10081,14 +7276,14 @@
       </p:sp>
       <p:sp>
         <p:nvSpPr>
-          <p:cNvPr id="6" name="TextBox 5"/>
+          <p:cNvPr id="4" name="TextBox 3"/>
           <p:cNvSpPr txBox="1"/>
           <p:nvPr/>
         </p:nvSpPr>
         <p:spPr>
           <a:xfrm>
-            <a:off x="914400" y="2651760"/>
-            <a:ext cx="7315200" cy="4023359"/>
+            <a:off x="457200" y="365760"/>
+            <a:ext cx="10972800" cy="731520"/>
           </a:xfrm>
           <a:prstGeom prst="rect">
             <a:avLst/>
@@ -10102,265 +7297,125 @@
           <a:lstStyle/>
           <a:p>
             <a:pPr>
-              <a:spcAft>
-                <a:spcPts val="200"/>
-              </a:spcAft>
-              <a:defRPr sz="1600">
-                <a:solidFill>
-                  <a:srgbClr val="595959"/>
-                </a:solidFill>
-                <a:latin typeface="Courier New"/>
-              </a:defRPr>
-            </a:pPr>
-            <a:r>
-              <a:t># sort() - modify list in place</a:t>
-            </a:r>
-          </a:p>
+              <a:defRPr sz="4000" b="1">
+                <a:solidFill>
+                  <a:srgbClr val="003366"/>
+                </a:solidFill>
+              </a:defRPr>
+            </a:pPr>
+            <a:r>
+              <a:t>Adding Items ➕</a:t>
+            </a:r>
+          </a:p>
+        </p:txBody>
+      </p:sp>
+      <p:sp>
+        <p:nvSpPr>
+          <p:cNvPr id="5" name="Rectangle 4"/>
+          <p:cNvSpPr/>
+          <p:nvPr/>
+        </p:nvSpPr>
+        <p:spPr>
+          <a:xfrm>
+            <a:off x="457200" y="1005840"/>
+            <a:ext cx="1828800" cy="45720"/>
+          </a:xfrm>
+          <a:prstGeom prst="rect">
+            <a:avLst/>
+          </a:prstGeom>
+          <a:solidFill>
+            <a:srgbClr val="0066CC"/>
+          </a:solidFill>
+          <a:ln>
+            <a:noFill/>
+          </a:ln>
+        </p:spPr>
+        <p:style>
+          <a:lnRef idx="1">
+            <a:schemeClr val="accent1"/>
+          </a:lnRef>
+          <a:fillRef idx="3">
+            <a:schemeClr val="accent1"/>
+          </a:fillRef>
+          <a:effectRef idx="2">
+            <a:schemeClr val="accent1"/>
+          </a:effectRef>
+          <a:fontRef idx="minor">
+            <a:schemeClr val="lt1"/>
+          </a:fontRef>
+        </p:style>
+        <p:txBody>
+          <a:bodyPr rtlCol="0" anchor="ctr"/>
+          <a:lstStyle/>
+          <a:p>
+            <a:pPr algn="ctr"/>
+          </a:p>
+        </p:txBody>
+      </p:sp>
+      <p:sp>
+        <p:nvSpPr>
+          <p:cNvPr id="6" name="TextBox 5"/>
+          <p:cNvSpPr txBox="1"/>
+          <p:nvPr/>
+        </p:nvSpPr>
+        <p:spPr>
+          <a:xfrm>
+            <a:off x="640080" y="1371600"/>
+            <a:ext cx="10789920" cy="4572000"/>
+          </a:xfrm>
+          <a:prstGeom prst="rect">
+            <a:avLst/>
+          </a:prstGeom>
+          <a:noFill/>
+        </p:spPr>
+        <p:txBody>
+          <a:bodyPr wrap="square">
+            <a:spAutoFit/>
+          </a:bodyPr>
+          <a:lstStyle/>
           <a:p>
             <a:pPr>
               <a:spcAft>
-                <a:spcPts val="200"/>
+                <a:spcPts val="800"/>
               </a:spcAft>
-              <a:defRPr sz="1600">
-                <a:solidFill>
-                  <a:srgbClr val="595959"/>
-                </a:solidFill>
-                <a:latin typeface="Courier New"/>
-              </a:defRPr>
-            </a:pPr>
-            <a:r>
-              <a:t>numbers = [3, 1, 4, 1, 5, 9, 2, 6]</a:t>
+              <a:defRPr sz="2000" b="1">
+                <a:solidFill>
+                  <a:srgbClr val="333333"/>
+                </a:solidFill>
+              </a:defRPr>
+            </a:pPr>
+            <a:r>
+              <a:t>append() - Add to end</a:t>
             </a:r>
           </a:p>
           <a:p>
             <a:pPr>
               <a:spcAft>
-                <a:spcPts val="200"/>
+                <a:spcPts val="800"/>
               </a:spcAft>
-              <a:defRPr sz="1600">
-                <a:solidFill>
-                  <a:srgbClr val="595959"/>
-                </a:solidFill>
-                <a:latin typeface="Courier New"/>
-              </a:defRPr>
-            </a:pPr>
-            <a:r>
-              <a:t>numbers.sort()</a:t>
+              <a:defRPr sz="2000" b="1">
+                <a:solidFill>
+                  <a:srgbClr val="333333"/>
+                </a:solidFill>
+              </a:defRPr>
+            </a:pPr>
+            <a:r>
+              <a:t>insert() - Add at specific position</a:t>
             </a:r>
           </a:p>
           <a:p>
             <a:pPr>
               <a:spcAft>
-                <a:spcPts val="200"/>
+                <a:spcPts val="800"/>
               </a:spcAft>
-              <a:defRPr sz="1600">
-                <a:solidFill>
-                  <a:srgbClr val="595959"/>
-                </a:solidFill>
-                <a:latin typeface="Courier New"/>
-              </a:defRPr>
-            </a:pPr>
-            <a:r>
-              <a:t>print(numbers)  # [1, 1, 2, 3, 4, 5, 6, 9]</a:t>
-            </a:r>
-          </a:p>
-          <a:p>
-            <a:pPr>
-              <a:spcAft>
-                <a:spcPts val="200"/>
-              </a:spcAft>
-              <a:defRPr sz="1600">
-                <a:solidFill>
-                  <a:srgbClr val="595959"/>
-                </a:solidFill>
-                <a:latin typeface="Courier New"/>
-              </a:defRPr>
-            </a:pPr>
-          </a:p>
-          <a:p>
-            <a:pPr>
-              <a:spcAft>
-                <a:spcPts val="200"/>
-              </a:spcAft>
-              <a:defRPr sz="1600">
-                <a:solidFill>
-                  <a:srgbClr val="595959"/>
-                </a:solidFill>
-                <a:latin typeface="Courier New"/>
-              </a:defRPr>
-            </a:pPr>
-            <a:r>
-              <a:t># sort(reverse=True) - descending order</a:t>
-            </a:r>
-          </a:p>
-          <a:p>
-            <a:pPr>
-              <a:spcAft>
-                <a:spcPts val="200"/>
-              </a:spcAft>
-              <a:defRPr sz="1600">
-                <a:solidFill>
-                  <a:srgbClr val="595959"/>
-                </a:solidFill>
-                <a:latin typeface="Courier New"/>
-              </a:defRPr>
-            </a:pPr>
-            <a:r>
-              <a:t>numbers.sort(reverse=True)</a:t>
-            </a:r>
-          </a:p>
-          <a:p>
-            <a:pPr>
-              <a:spcAft>
-                <a:spcPts val="200"/>
-              </a:spcAft>
-              <a:defRPr sz="1600">
-                <a:solidFill>
-                  <a:srgbClr val="595959"/>
-                </a:solidFill>
-                <a:latin typeface="Courier New"/>
-              </a:defRPr>
-            </a:pPr>
-            <a:r>
-              <a:t>print(numbers)  # [9, 6, 5, 4, 3, 2, 1, 1]</a:t>
-            </a:r>
-          </a:p>
-          <a:p>
-            <a:pPr>
-              <a:spcAft>
-                <a:spcPts val="200"/>
-              </a:spcAft>
-              <a:defRPr sz="1600">
-                <a:solidFill>
-                  <a:srgbClr val="595959"/>
-                </a:solidFill>
-                <a:latin typeface="Courier New"/>
-              </a:defRPr>
-            </a:pPr>
-          </a:p>
-          <a:p>
-            <a:pPr>
-              <a:spcAft>
-                <a:spcPts val="200"/>
-              </a:spcAft>
-              <a:defRPr sz="1600">
-                <a:solidFill>
-                  <a:srgbClr val="595959"/>
-                </a:solidFill>
-                <a:latin typeface="Courier New"/>
-              </a:defRPr>
-            </a:pPr>
-            <a:r>
-              <a:t># sorted() - return new sorted list (original unchanged)</a:t>
-            </a:r>
-          </a:p>
-          <a:p>
-            <a:pPr>
-              <a:spcAft>
-                <a:spcPts val="200"/>
-              </a:spcAft>
-              <a:defRPr sz="1600">
-                <a:solidFill>
-                  <a:srgbClr val="595959"/>
-                </a:solidFill>
-                <a:latin typeface="Courier New"/>
-              </a:defRPr>
-            </a:pPr>
-            <a:r>
-              <a:t>original = [3, 1, 4, 1, 5]</a:t>
-            </a:r>
-          </a:p>
-          <a:p>
-            <a:pPr>
-              <a:spcAft>
-                <a:spcPts val="200"/>
-              </a:spcAft>
-              <a:defRPr sz="1600">
-                <a:solidFill>
-                  <a:srgbClr val="595959"/>
-                </a:solidFill>
-                <a:latin typeface="Courier New"/>
-              </a:defRPr>
-            </a:pPr>
-            <a:r>
-              <a:t>new_list = sorted(original)</a:t>
-            </a:r>
-          </a:p>
-          <a:p>
-            <a:pPr>
-              <a:spcAft>
-                <a:spcPts val="200"/>
-              </a:spcAft>
-              <a:defRPr sz="1600">
-                <a:solidFill>
-                  <a:srgbClr val="595959"/>
-                </a:solidFill>
-                <a:latin typeface="Courier New"/>
-              </a:defRPr>
-            </a:pPr>
-            <a:r>
-              <a:t>print(original)  # [3, 1, 4, 1, 5] (unchanged)</a:t>
-            </a:r>
-          </a:p>
-          <a:p>
-            <a:pPr>
-              <a:spcAft>
-                <a:spcPts val="200"/>
-              </a:spcAft>
-              <a:defRPr sz="1600">
-                <a:solidFill>
-                  <a:srgbClr val="595959"/>
-                </a:solidFill>
-                <a:latin typeface="Courier New"/>
-              </a:defRPr>
-            </a:pPr>
-            <a:r>
-              <a:t>print(new_list)  # [1, 1, 3, 4, 5] (sorted)</a:t>
-            </a:r>
-          </a:p>
-          <a:p>
-            <a:pPr>
-              <a:spcAft>
-                <a:spcPts val="200"/>
-              </a:spcAft>
-              <a:defRPr sz="1600">
-                <a:solidFill>
-                  <a:srgbClr val="595959"/>
-                </a:solidFill>
-                <a:latin typeface="Courier New"/>
-              </a:defRPr>
-            </a:pPr>
-          </a:p>
-          <a:p>
-            <a:pPr>
-              <a:spcAft>
-                <a:spcPts val="200"/>
-              </a:spcAft>
-              <a:defRPr sz="1600">
-                <a:solidFill>
-                  <a:srgbClr val="595959"/>
-                </a:solidFill>
-                <a:latin typeface="Courier New"/>
-              </a:defRPr>
-            </a:pPr>
-            <a:r>
-              <a:t># reverse() - reverse order</a:t>
-            </a:r>
-          </a:p>
-          <a:p>
-            <a:pPr>
-              <a:spcAft>
-                <a:spcPts val="200"/>
-              </a:spcAft>
-              <a:defRPr sz="1600">
-                <a:solidFill>
-                  <a:srgbClr val="595959"/>
-                </a:solidFill>
-                <a:latin typeface="Courier New"/>
-              </a:defRPr>
-            </a:pPr>
-            <a:r>
-              <a:t>numbers.reverse()</a:t>
+              <a:defRPr sz="2000" b="1">
+                <a:solidFill>
+                  <a:srgbClr val="333333"/>
+                </a:solidFill>
+              </a:defRPr>
+            </a:pPr>
+            <a:r>
+              <a:t>extend() - Add multiple items</a:t>
             </a:r>
           </a:p>
         </p:txBody>
@@ -10376,14 +7431,6 @@
 <file path=ppt/slides/slide9.xml><?xml version="1.0" encoding="utf-8"?>
 <p:sld xmlns:a="http://schemas.openxmlformats.org/drawingml/2006/main" xmlns:p="http://schemas.openxmlformats.org/presentationml/2006/main" xmlns:r="http://schemas.openxmlformats.org/officeDocument/2006/relationships">
   <p:cSld>
-    <p:bg>
-      <p:bgPr>
-        <a:solidFill>
-          <a:srgbClr val="FFFFFF"/>
-        </a:solidFill>
-        <a:effectLst/>
-      </p:bgPr>
-    </p:bg>
     <p:spTree>
       <p:nvGrpSpPr>
         <p:cNvPr id="1" name=""/>
@@ -10400,13 +7447,13 @@
         <p:spPr>
           <a:xfrm>
             <a:off x="0" y="0"/>
-            <a:ext cx="9144000" cy="914400"/>
+            <a:ext cx="12191695" cy="6858000"/>
           </a:xfrm>
           <a:prstGeom prst="rect">
             <a:avLst/>
           </a:prstGeom>
           <a:solidFill>
-            <a:srgbClr val="29629B"/>
+            <a:srgbClr val="FFFFFF"/>
           </a:solidFill>
           <a:ln>
             <a:noFill/>
@@ -10436,95 +7483,23 @@
       </p:sp>
       <p:sp>
         <p:nvSpPr>
-          <p:cNvPr id="3" name="TextBox 2"/>
-          <p:cNvSpPr txBox="1"/>
-          <p:nvPr/>
-        </p:nvSpPr>
-        <p:spPr>
-          <a:xfrm>
-            <a:off x="457200" y="137160"/>
-            <a:ext cx="8229600" cy="640080"/>
-          </a:xfrm>
-          <a:prstGeom prst="rect">
-            <a:avLst/>
-          </a:prstGeom>
-          <a:noFill/>
-        </p:spPr>
-        <p:txBody>
-          <a:bodyPr wrap="none">
-            <a:spAutoFit/>
-          </a:bodyPr>
-          <a:lstStyle/>
-          <a:p>
-            <a:pPr>
-              <a:defRPr sz="4000" b="1">
-                <a:solidFill>
-                  <a:srgbClr val="FFFFFF"/>
-                </a:solidFill>
-              </a:defRPr>
-            </a:pPr>
-            <a:r>
-              <a:t>Getting Information</a:t>
-            </a:r>
-          </a:p>
-        </p:txBody>
-      </p:sp>
-      <p:sp>
-        <p:nvSpPr>
-          <p:cNvPr id="4" name="TextBox 3"/>
-          <p:cNvSpPr txBox="1"/>
-          <p:nvPr/>
-        </p:nvSpPr>
-        <p:spPr>
-          <a:xfrm>
-            <a:off x="640080" y="1371600"/>
-            <a:ext cx="7863840" cy="914400"/>
-          </a:xfrm>
-          <a:prstGeom prst="rect">
-            <a:avLst/>
-          </a:prstGeom>
-          <a:noFill/>
-        </p:spPr>
-        <p:txBody>
-          <a:bodyPr wrap="square">
-            <a:spAutoFit/>
-          </a:bodyPr>
-          <a:lstStyle/>
-          <a:p>
-            <a:pPr>
-              <a:defRPr sz="1800">
-                <a:solidFill>
-                  <a:srgbClr val="595959"/>
-                </a:solidFill>
-              </a:defRPr>
-            </a:pPr>
-            <a:r>
-              <a:t>Methods and operators to query lists</a:t>
-            </a:r>
-          </a:p>
-        </p:txBody>
-      </p:sp>
-      <p:sp>
-        <p:nvSpPr>
-          <p:cNvPr id="5" name="Rectangle 4"/>
+          <p:cNvPr id="3" name="Rectangle 2"/>
           <p:cNvSpPr/>
           <p:nvPr/>
         </p:nvSpPr>
         <p:spPr>
           <a:xfrm>
-            <a:off x="640080" y="2468880"/>
-            <a:ext cx="7863840" cy="4389120"/>
+            <a:off x="0" y="0"/>
+            <a:ext cx="12191695" cy="137160"/>
           </a:xfrm>
           <a:prstGeom prst="rect">
             <a:avLst/>
           </a:prstGeom>
           <a:solidFill>
-            <a:srgbClr val="F8F9FA"/>
+            <a:srgbClr val="0066CC"/>
           </a:solidFill>
-          <a:ln w="25400">
-            <a:solidFill>
-              <a:srgbClr val="6497CA"/>
-            </a:solidFill>
+          <a:ln>
+            <a:noFill/>
           </a:ln>
         </p:spPr>
         <p:style>
@@ -10551,14 +7526,14 @@
       </p:sp>
       <p:sp>
         <p:nvSpPr>
-          <p:cNvPr id="6" name="TextBox 5"/>
+          <p:cNvPr id="4" name="TextBox 3"/>
           <p:cNvSpPr txBox="1"/>
           <p:nvPr/>
         </p:nvSpPr>
         <p:spPr>
           <a:xfrm>
-            <a:off x="914400" y="2651760"/>
-            <a:ext cx="7315200" cy="4023359"/>
+            <a:off x="457200" y="365760"/>
+            <a:ext cx="10972800" cy="731520"/>
           </a:xfrm>
           <a:prstGeom prst="rect">
             <a:avLst/>
@@ -10572,262 +7547,125 @@
           <a:lstStyle/>
           <a:p>
             <a:pPr>
-              <a:spcAft>
-                <a:spcPts val="200"/>
-              </a:spcAft>
-              <a:defRPr sz="1600">
-                <a:solidFill>
-                  <a:srgbClr val="595959"/>
-                </a:solidFill>
-                <a:latin typeface="Courier New"/>
-              </a:defRPr>
-            </a:pPr>
-            <a:r>
-              <a:t>fruits = ['apple', 'banana', 'cherry', 'banana']</a:t>
-            </a:r>
-          </a:p>
+              <a:defRPr sz="4000" b="1">
+                <a:solidFill>
+                  <a:srgbClr val="003366"/>
+                </a:solidFill>
+              </a:defRPr>
+            </a:pPr>
+            <a:r>
+              <a:t>Removing Items ➖</a:t>
+            </a:r>
+          </a:p>
+        </p:txBody>
+      </p:sp>
+      <p:sp>
+        <p:nvSpPr>
+          <p:cNvPr id="5" name="Rectangle 4"/>
+          <p:cNvSpPr/>
+          <p:nvPr/>
+        </p:nvSpPr>
+        <p:spPr>
+          <a:xfrm>
+            <a:off x="457200" y="1005840"/>
+            <a:ext cx="1828800" cy="45720"/>
+          </a:xfrm>
+          <a:prstGeom prst="rect">
+            <a:avLst/>
+          </a:prstGeom>
+          <a:solidFill>
+            <a:srgbClr val="0066CC"/>
+          </a:solidFill>
+          <a:ln>
+            <a:noFill/>
+          </a:ln>
+        </p:spPr>
+        <p:style>
+          <a:lnRef idx="1">
+            <a:schemeClr val="accent1"/>
+          </a:lnRef>
+          <a:fillRef idx="3">
+            <a:schemeClr val="accent1"/>
+          </a:fillRef>
+          <a:effectRef idx="2">
+            <a:schemeClr val="accent1"/>
+          </a:effectRef>
+          <a:fontRef idx="minor">
+            <a:schemeClr val="lt1"/>
+          </a:fontRef>
+        </p:style>
+        <p:txBody>
+          <a:bodyPr rtlCol="0" anchor="ctr"/>
+          <a:lstStyle/>
+          <a:p>
+            <a:pPr algn="ctr"/>
+          </a:p>
+        </p:txBody>
+      </p:sp>
+      <p:sp>
+        <p:nvSpPr>
+          <p:cNvPr id="6" name="TextBox 5"/>
+          <p:cNvSpPr txBox="1"/>
+          <p:nvPr/>
+        </p:nvSpPr>
+        <p:spPr>
+          <a:xfrm>
+            <a:off x="640080" y="1371600"/>
+            <a:ext cx="10789920" cy="4572000"/>
+          </a:xfrm>
+          <a:prstGeom prst="rect">
+            <a:avLst/>
+          </a:prstGeom>
+          <a:noFill/>
+        </p:spPr>
+        <p:txBody>
+          <a:bodyPr wrap="square">
+            <a:spAutoFit/>
+          </a:bodyPr>
+          <a:lstStyle/>
           <a:p>
             <a:pPr>
               <a:spcAft>
-                <a:spcPts val="200"/>
+                <a:spcPts val="800"/>
               </a:spcAft>
-              <a:defRPr sz="1600">
-                <a:solidFill>
-                  <a:srgbClr val="595959"/>
-                </a:solidFill>
-                <a:latin typeface="Courier New"/>
-              </a:defRPr>
-            </a:pPr>
+              <a:defRPr sz="2000" b="1">
+                <a:solidFill>
+                  <a:srgbClr val="333333"/>
+                </a:solidFill>
+              </a:defRPr>
+            </a:pPr>
+            <a:r>
+              <a:t>remove() - Remove by value</a:t>
+            </a:r>
           </a:p>
           <a:p>
             <a:pPr>
               <a:spcAft>
-                <a:spcPts val="200"/>
+                <a:spcPts val="800"/>
               </a:spcAft>
-              <a:defRPr sz="1600">
-                <a:solidFill>
-                  <a:srgbClr val="595959"/>
-                </a:solidFill>
-                <a:latin typeface="Courier New"/>
-              </a:defRPr>
-            </a:pPr>
-            <a:r>
-              <a:t># len() - number of items</a:t>
+              <a:defRPr sz="2000" b="1">
+                <a:solidFill>
+                  <a:srgbClr val="333333"/>
+                </a:solidFill>
+              </a:defRPr>
+            </a:pPr>
+            <a:r>
+              <a:t>pop() - Remove by index (returns item)</a:t>
             </a:r>
           </a:p>
           <a:p>
             <a:pPr>
               <a:spcAft>
-                <a:spcPts val="200"/>
+                <a:spcPts val="800"/>
               </a:spcAft>
-              <a:defRPr sz="1600">
-                <a:solidFill>
-                  <a:srgbClr val="595959"/>
-                </a:solidFill>
-                <a:latin typeface="Courier New"/>
-              </a:defRPr>
-            </a:pPr>
-            <a:r>
-              <a:t>print(len(fruits))  # 4</a:t>
-            </a:r>
-          </a:p>
-          <a:p>
-            <a:pPr>
-              <a:spcAft>
-                <a:spcPts val="200"/>
-              </a:spcAft>
-              <a:defRPr sz="1600">
-                <a:solidFill>
-                  <a:srgbClr val="595959"/>
-                </a:solidFill>
-                <a:latin typeface="Courier New"/>
-              </a:defRPr>
-            </a:pPr>
-          </a:p>
-          <a:p>
-            <a:pPr>
-              <a:spcAft>
-                <a:spcPts val="200"/>
-              </a:spcAft>
-              <a:defRPr sz="1600">
-                <a:solidFill>
-                  <a:srgbClr val="595959"/>
-                </a:solidFill>
-                <a:latin typeface="Courier New"/>
-              </a:defRPr>
-            </a:pPr>
-            <a:r>
-              <a:t># count() - count occurrences</a:t>
-            </a:r>
-          </a:p>
-          <a:p>
-            <a:pPr>
-              <a:spcAft>
-                <a:spcPts val="200"/>
-              </a:spcAft>
-              <a:defRPr sz="1600">
-                <a:solidFill>
-                  <a:srgbClr val="595959"/>
-                </a:solidFill>
-                <a:latin typeface="Courier New"/>
-              </a:defRPr>
-            </a:pPr>
-            <a:r>
-              <a:t>print(fruits.count('banana'))  # 2</a:t>
-            </a:r>
-          </a:p>
-          <a:p>
-            <a:pPr>
-              <a:spcAft>
-                <a:spcPts val="200"/>
-              </a:spcAft>
-              <a:defRPr sz="1600">
-                <a:solidFill>
-                  <a:srgbClr val="595959"/>
-                </a:solidFill>
-                <a:latin typeface="Courier New"/>
-              </a:defRPr>
-            </a:pPr>
-            <a:r>
-              <a:t>print(fruits.count('grape'))   # 0</a:t>
-            </a:r>
-          </a:p>
-          <a:p>
-            <a:pPr>
-              <a:spcAft>
-                <a:spcPts val="200"/>
-              </a:spcAft>
-              <a:defRPr sz="1600">
-                <a:solidFill>
-                  <a:srgbClr val="595959"/>
-                </a:solidFill>
-                <a:latin typeface="Courier New"/>
-              </a:defRPr>
-            </a:pPr>
-          </a:p>
-          <a:p>
-            <a:pPr>
-              <a:spcAft>
-                <a:spcPts val="200"/>
-              </a:spcAft>
-              <a:defRPr sz="1600">
-                <a:solidFill>
-                  <a:srgbClr val="595959"/>
-                </a:solidFill>
-                <a:latin typeface="Courier New"/>
-              </a:defRPr>
-            </a:pPr>
-            <a:r>
-              <a:t># index() - find position of item</a:t>
-            </a:r>
-          </a:p>
-          <a:p>
-            <a:pPr>
-              <a:spcAft>
-                <a:spcPts val="200"/>
-              </a:spcAft>
-              <a:defRPr sz="1600">
-                <a:solidFill>
-                  <a:srgbClr val="595959"/>
-                </a:solidFill>
-                <a:latin typeface="Courier New"/>
-              </a:defRPr>
-            </a:pPr>
-            <a:r>
-              <a:t>print(fruits.index('cherry'))  # 2</a:t>
-            </a:r>
-          </a:p>
-          <a:p>
-            <a:pPr>
-              <a:spcAft>
-                <a:spcPts val="200"/>
-              </a:spcAft>
-              <a:defRPr sz="1600">
-                <a:solidFill>
-                  <a:srgbClr val="595959"/>
-                </a:solidFill>
-                <a:latin typeface="Courier New"/>
-              </a:defRPr>
-            </a:pPr>
-            <a:r>
-              <a:t># print(fruits.index('grape'))  # ValueError!</a:t>
-            </a:r>
-          </a:p>
-          <a:p>
-            <a:pPr>
-              <a:spcAft>
-                <a:spcPts val="200"/>
-              </a:spcAft>
-              <a:defRPr sz="1600">
-                <a:solidFill>
-                  <a:srgbClr val="595959"/>
-                </a:solidFill>
-                <a:latin typeface="Courier New"/>
-              </a:defRPr>
-            </a:pPr>
-          </a:p>
-          <a:p>
-            <a:pPr>
-              <a:spcAft>
-                <a:spcPts val="200"/>
-              </a:spcAft>
-              <a:defRPr sz="1600">
-                <a:solidFill>
-                  <a:srgbClr val="595959"/>
-                </a:solidFill>
-                <a:latin typeface="Courier New"/>
-              </a:defRPr>
-            </a:pPr>
-            <a:r>
-              <a:t># in operator - check membership</a:t>
-            </a:r>
-          </a:p>
-          <a:p>
-            <a:pPr>
-              <a:spcAft>
-                <a:spcPts val="200"/>
-              </a:spcAft>
-              <a:defRPr sz="1600">
-                <a:solidFill>
-                  <a:srgbClr val="595959"/>
-                </a:solidFill>
-                <a:latin typeface="Courier New"/>
-              </a:defRPr>
-            </a:pPr>
-            <a:r>
-              <a:t>print('apple' in fruits)   # True</a:t>
-            </a:r>
-          </a:p>
-          <a:p>
-            <a:pPr>
-              <a:spcAft>
-                <a:spcPts val="200"/>
-              </a:spcAft>
-              <a:defRPr sz="1600">
-                <a:solidFill>
-                  <a:srgbClr val="595959"/>
-                </a:solidFill>
-                <a:latin typeface="Courier New"/>
-              </a:defRPr>
-            </a:pPr>
-            <a:r>
-              <a:t>print('grape' in fruits)   # False</a:t>
-            </a:r>
-          </a:p>
-          <a:p>
-            <a:pPr>
-              <a:spcAft>
-                <a:spcPts val="200"/>
-              </a:spcAft>
-              <a:defRPr sz="1600">
-                <a:solidFill>
-                  <a:srgbClr val="595959"/>
-                </a:solidFill>
-                <a:latin typeface="Courier New"/>
-              </a:defRPr>
-            </a:pPr>
-            <a:r>
-              <a:t>print('grape' not in fruits)  # True</a:t>
+              <a:defRPr sz="2000" b="1">
+                <a:solidFill>
+                  <a:srgbClr val="333333"/>
+                </a:solidFill>
+              </a:defRPr>
+            </a:pPr>
+            <a:r>
+              <a:t>clear() - Remove all items</a:t>
             </a:r>
           </a:p>
         </p:txBody>
